--- a/submission/GCB/figures_polished/Figure3.pptx
+++ b/submission/GCB/figures_polished/Figure3.pptx
@@ -571,7 +571,7 @@
             </a:pathLst>
           </a:custGeom>
           <a:solidFill>
-            <a:srgbClr val="843B28"/>
+            <a:srgbClr val="7F7F7F"/>
           </a:solidFill>
           <a:ln w="0">
             <a:noFill/>
@@ -692,7 +692,7 @@
             </a:pathLst>
           </a:custGeom>
           <a:solidFill>
-            <a:srgbClr val="964129"/>
+            <a:srgbClr val="944029"/>
           </a:solidFill>
           <a:ln w="0">
             <a:noFill/>
@@ -813,7 +813,7 @@
             </a:pathLst>
           </a:custGeom>
           <a:solidFill>
-            <a:srgbClr val="B74C2B"/>
+            <a:srgbClr val="B84C2B"/>
           </a:solidFill>
           <a:ln w="16200">
             <a:solidFill>
@@ -876,7 +876,7 @@
             </a:pathLst>
           </a:custGeom>
           <a:solidFill>
-            <a:srgbClr val="B94D2B"/>
+            <a:srgbClr val="BA4D2B"/>
           </a:solidFill>
           <a:ln w="0">
             <a:noFill/>
@@ -967,69 +967,6 @@
         </p:nvSpPr>
         <p:spPr>
           <a:xfrm>
-            <a:off x="1523160" y="779040"/>
-            <a:ext cx="693720" cy="327960"/>
-          </a:xfrm>
-          <a:custGeom>
-            <a:avLst/>
-            <a:gdLst/>
-            <a:ahLst/>
-            <a:rect l="0" t="0" r="r" b="b"/>
-            <a:pathLst>
-              <a:path w="1927" h="911">
-                <a:moveTo>
-                  <a:pt x="0" y="0"/>
-                </a:moveTo>
-                <a:lnTo>
-                  <a:pt x="1927" y="0"/>
-                </a:lnTo>
-                <a:lnTo>
-                  <a:pt x="1927" y="911"/>
-                </a:lnTo>
-                <a:lnTo>
-                  <a:pt x="0" y="911"/>
-                </a:lnTo>
-                <a:lnTo>
-                  <a:pt x="0" y="0"/>
-                </a:lnTo>
-                <a:close/>
-              </a:path>
-            </a:pathLst>
-          </a:custGeom>
-          <a:solidFill>
-            <a:srgbClr val="D2582F"/>
-          </a:solidFill>
-          <a:ln w="16200">
-            <a:solidFill>
-              <a:srgbClr val="FFFFFF"/>
-            </a:solidFill>
-            <a:miter/>
-          </a:ln>
-        </p:spPr>
-        <p:txBody>
-          <a:bodyPr lIns="7920" tIns="7920" rIns="7920" bIns="7920" anchor="t">
-            <a:noAutofit/>
-          </a:bodyPr>
-          <a:p>
-            <a:endParaRPr lang="en-US" sz="2400" b="0" u="none" strike="noStrike">
-              <a:solidFill>
-                <a:srgbClr val="FFFFFF"/>
-              </a:solidFill>
-              <a:effectLst/>
-              <a:uFillTx/>
-              <a:latin typeface="Times New Roman"/>
-            </a:endParaRPr>
-          </a:p>
-        </p:txBody>
-      </p:sp>
-      <p:sp>
-        <p:nvSpPr>
-          <p:cNvPr id="18" name=""/>
-          <p:cNvSpPr/>
-          <p:nvPr/>
-        </p:nvSpPr>
-        <p:spPr>
-          <a:xfrm>
             <a:off x="1523160" y="451080"/>
             <a:ext cx="693720" cy="328320"/>
           </a:xfrm>
@@ -1060,7 +997,7 @@
             </a:pathLst>
           </a:custGeom>
           <a:solidFill>
-            <a:srgbClr val="D86C48"/>
+            <a:srgbClr val="D66742"/>
           </a:solidFill>
           <a:ln w="0">
             <a:noFill/>
@@ -1084,7 +1021,7 @@
       </p:sp>
       <p:sp>
         <p:nvSpPr>
-          <p:cNvPr id="19" name=""/>
+          <p:cNvPr id="18" name=""/>
           <p:cNvSpPr/>
           <p:nvPr/>
         </p:nvSpPr>
@@ -1145,6 +1082,69 @@
       </p:sp>
       <p:sp>
         <p:nvSpPr>
+          <p:cNvPr id="19" name=""/>
+          <p:cNvSpPr/>
+          <p:nvPr/>
+        </p:nvSpPr>
+        <p:spPr>
+          <a:xfrm>
+            <a:off x="1523160" y="779040"/>
+            <a:ext cx="693720" cy="327960"/>
+          </a:xfrm>
+          <a:custGeom>
+            <a:avLst/>
+            <a:gdLst/>
+            <a:ahLst/>
+            <a:rect l="0" t="0" r="r" b="b"/>
+            <a:pathLst>
+              <a:path w="1927" h="911">
+                <a:moveTo>
+                  <a:pt x="0" y="0"/>
+                </a:moveTo>
+                <a:lnTo>
+                  <a:pt x="1927" y="0"/>
+                </a:lnTo>
+                <a:lnTo>
+                  <a:pt x="1927" y="911"/>
+                </a:lnTo>
+                <a:lnTo>
+                  <a:pt x="0" y="911"/>
+                </a:lnTo>
+                <a:lnTo>
+                  <a:pt x="0" y="0"/>
+                </a:lnTo>
+                <a:close/>
+              </a:path>
+            </a:pathLst>
+          </a:custGeom>
+          <a:solidFill>
+            <a:srgbClr val="D2572E"/>
+          </a:solidFill>
+          <a:ln w="16200">
+            <a:solidFill>
+              <a:srgbClr val="FFFFFF"/>
+            </a:solidFill>
+            <a:miter/>
+          </a:ln>
+        </p:spPr>
+        <p:txBody>
+          <a:bodyPr lIns="7920" tIns="7920" rIns="7920" bIns="7920" anchor="t">
+            <a:noAutofit/>
+          </a:bodyPr>
+          <a:p>
+            <a:endParaRPr lang="en-US" sz="2400" b="0" u="none" strike="noStrike">
+              <a:solidFill>
+                <a:srgbClr val="FFFFFF"/>
+              </a:solidFill>
+              <a:effectLst/>
+              <a:uFillTx/>
+              <a:latin typeface="Times New Roman"/>
+            </a:endParaRPr>
+          </a:p>
+        </p:txBody>
+      </p:sp>
+      <p:sp>
+        <p:nvSpPr>
           <p:cNvPr id="20" name=""/>
           <p:cNvSpPr/>
           <p:nvPr/>
@@ -1181,7 +1181,7 @@
             </a:pathLst>
           </a:custGeom>
           <a:solidFill>
-            <a:srgbClr val="DF886B"/>
+            <a:srgbClr val="DE8668"/>
           </a:solidFill>
           <a:ln w="0">
             <a:noFill/>
@@ -1302,7 +1302,7 @@
             </a:pathLst>
           </a:custGeom>
           <a:solidFill>
-            <a:srgbClr val="E18F74"/>
+            <a:srgbClr val="E18F73"/>
           </a:solidFill>
           <a:ln w="0">
             <a:noFill/>
@@ -1423,7 +1423,7 @@
             </a:pathLst>
           </a:custGeom>
           <a:solidFill>
-            <a:srgbClr val="EDBDAC"/>
+            <a:srgbClr val="ECBBAA"/>
           </a:solidFill>
           <a:ln w="16200">
             <a:solidFill>
@@ -1486,7 +1486,7 @@
             </a:pathLst>
           </a:custGeom>
           <a:solidFill>
-            <a:srgbClr val="F7E2DB"/>
+            <a:srgbClr val="F7E1DA"/>
           </a:solidFill>
           <a:ln w="16200">
             <a:solidFill>
@@ -1549,7 +1549,7 @@
             </a:pathLst>
           </a:custGeom>
           <a:solidFill>
-            <a:srgbClr val="F1CEC2"/>
+            <a:srgbClr val="F1CEC1"/>
           </a:solidFill>
           <a:ln w="0">
             <a:noFill/>
@@ -1791,7 +1791,7 @@
             </a:pathLst>
           </a:custGeom>
           <a:solidFill>
-            <a:srgbClr val="FAEEEB"/>
+            <a:srgbClr val="FAEDE9"/>
           </a:solidFill>
           <a:ln w="0">
             <a:noFill/>
@@ -1912,7 +1912,7 @@
             </a:pathLst>
           </a:custGeom>
           <a:solidFill>
-            <a:srgbClr val="F5DBD2"/>
+            <a:srgbClr val="F4D9D0"/>
           </a:solidFill>
           <a:ln w="0">
             <a:noFill/>
@@ -2033,7 +2033,7 @@
             </a:pathLst>
           </a:custGeom>
           <a:solidFill>
-            <a:srgbClr val="F2D1C5"/>
+            <a:srgbClr val="F1D0C4"/>
           </a:solidFill>
           <a:ln w="0">
             <a:noFill/>
@@ -2477,7 +2477,7 @@
                 <a:latin typeface="Arial"/>
                 <a:ea typeface="Arial"/>
               </a:rPr>
-              <a:t>1.30***</a:t>
+              <a:t>1.29***</a:t>
             </a:r>
             <a:endParaRPr lang="en-US" sz="600" b="0" u="none" strike="noStrike">
               <a:solidFill>
@@ -2493,6 +2493,54 @@
       <p:sp>
         <p:nvSpPr>
           <p:cNvPr id="43" name=""/>
+          <p:cNvSpPr txBox="1"/>
+          <p:nvPr/>
+        </p:nvSpPr>
+        <p:spPr>
+          <a:xfrm>
+            <a:off x="1762200" y="570960"/>
+            <a:ext cx="237960" cy="86040"/>
+          </a:xfrm>
+          <a:prstGeom prst="rect">
+            <a:avLst/>
+          </a:prstGeom>
+          <a:noFill/>
+          <a:ln w="0">
+            <a:noFill/>
+          </a:ln>
+        </p:spPr>
+        <p:txBody>
+          <a:bodyPr wrap="none" lIns="0" tIns="0" rIns="0" bIns="0" anchor="t">
+            <a:spAutoFit/>
+          </a:bodyPr>
+          <a:p>
+            <a:pPr/>
+            <a:r>
+              <a:rPr lang="en-US" sz="600" b="0" u="none" strike="noStrike">
+                <a:solidFill>
+                  <a:srgbClr val="FFFFFF"/>
+                </a:solidFill>
+                <a:effectLst/>
+                <a:uFillTx/>
+                <a:latin typeface="Arial"/>
+                <a:ea typeface="Arial"/>
+              </a:rPr>
+              <a:t>1.22***</a:t>
+            </a:r>
+            <a:endParaRPr lang="en-US" sz="600" b="0" u="none" strike="noStrike">
+              <a:solidFill>
+                <a:srgbClr val="000000"/>
+              </a:solidFill>
+              <a:effectLst/>
+              <a:uFillTx/>
+              <a:latin typeface="Times New Roman"/>
+            </a:endParaRPr>
+          </a:p>
+        </p:txBody>
+      </p:sp>
+      <p:sp>
+        <p:nvSpPr>
+          <p:cNvPr id="44" name=""/>
           <p:cNvSpPr txBox="1"/>
           <p:nvPr/>
         </p:nvSpPr>
@@ -2540,54 +2588,6 @@
       </p:sp>
       <p:sp>
         <p:nvSpPr>
-          <p:cNvPr id="44" name=""/>
-          <p:cNvSpPr txBox="1"/>
-          <p:nvPr/>
-        </p:nvSpPr>
-        <p:spPr>
-          <a:xfrm>
-            <a:off x="1762200" y="570960"/>
-            <a:ext cx="237960" cy="86040"/>
-          </a:xfrm>
-          <a:prstGeom prst="rect">
-            <a:avLst/>
-          </a:prstGeom>
-          <a:noFill/>
-          <a:ln w="0">
-            <a:noFill/>
-          </a:ln>
-        </p:spPr>
-        <p:txBody>
-          <a:bodyPr wrap="none" lIns="0" tIns="0" rIns="0" bIns="0" anchor="t">
-            <a:spAutoFit/>
-          </a:bodyPr>
-          <a:p>
-            <a:pPr/>
-            <a:r>
-              <a:rPr lang="en-US" sz="600" b="0" u="none" strike="noStrike">
-                <a:solidFill>
-                  <a:srgbClr val="FFFFFF"/>
-                </a:solidFill>
-                <a:effectLst/>
-                <a:uFillTx/>
-                <a:latin typeface="Arial"/>
-                <a:ea typeface="Arial"/>
-              </a:rPr>
-              <a:t>1.21***</a:t>
-            </a:r>
-            <a:endParaRPr lang="en-US" sz="600" b="0" u="none" strike="noStrike">
-              <a:solidFill>
-                <a:srgbClr val="000000"/>
-              </a:solidFill>
-              <a:effectLst/>
-              <a:uFillTx/>
-              <a:latin typeface="Times New Roman"/>
-            </a:endParaRPr>
-          </a:p>
-        </p:txBody>
-      </p:sp>
-      <p:sp>
-        <p:nvSpPr>
           <p:cNvPr id="45" name=""/>
           <p:cNvSpPr txBox="1"/>
           <p:nvPr/>
@@ -2813,7 +2813,7 @@
                 <a:latin typeface="Arial"/>
                 <a:ea typeface="Arial"/>
               </a:rPr>
-              <a:t>1.03</a:t>
+              <a:t>1.04</a:t>
             </a:r>
             <a:endParaRPr lang="en-US" sz="600" b="0" u="none" strike="noStrike">
               <a:solidFill>
@@ -2957,7 +2957,7 @@
                 <a:latin typeface="Arial"/>
                 <a:ea typeface="Arial"/>
               </a:rPr>
-              <a:t>1.00</a:t>
+              <a:t>1.01</a:t>
             </a:r>
             <a:endParaRPr lang="en-US" sz="600" b="0" u="none" strike="noStrike">
               <a:solidFill>
@@ -4288,7 +4288,7 @@
             </a:pathLst>
           </a:custGeom>
           <a:solidFill>
-            <a:srgbClr val="6C6C6C"/>
+            <a:srgbClr val="6B6B6B"/>
           </a:solidFill>
           <a:ln w="0">
             <a:noFill/>
@@ -4409,7 +4409,7 @@
             </a:pathLst>
           </a:custGeom>
           <a:solidFill>
-            <a:srgbClr val="8E8E8E"/>
+            <a:srgbClr val="959595"/>
           </a:solidFill>
           <a:ln w="16200">
             <a:solidFill>
@@ -4472,7 +4472,7 @@
             </a:pathLst>
           </a:custGeom>
           <a:solidFill>
-            <a:srgbClr val="949494"/>
+            <a:srgbClr val="9A9A9A"/>
           </a:solidFill>
           <a:ln w="0">
             <a:noFill/>
@@ -4563,6 +4563,127 @@
         </p:nvSpPr>
         <p:spPr>
           <a:xfrm>
+            <a:off x="4410000" y="451080"/>
+            <a:ext cx="693720" cy="328320"/>
+          </a:xfrm>
+          <a:custGeom>
+            <a:avLst/>
+            <a:gdLst/>
+            <a:ahLst/>
+            <a:rect l="0" t="0" r="r" b="b"/>
+            <a:pathLst>
+              <a:path w="1927" h="912">
+                <a:moveTo>
+                  <a:pt x="0" y="0"/>
+                </a:moveTo>
+                <a:lnTo>
+                  <a:pt x="1927" y="0"/>
+                </a:lnTo>
+                <a:lnTo>
+                  <a:pt x="1927" y="912"/>
+                </a:lnTo>
+                <a:lnTo>
+                  <a:pt x="0" y="912"/>
+                </a:lnTo>
+                <a:lnTo>
+                  <a:pt x="0" y="0"/>
+                </a:lnTo>
+                <a:close/>
+              </a:path>
+            </a:pathLst>
+          </a:custGeom>
+          <a:solidFill>
+            <a:srgbClr val="AFAFAF"/>
+          </a:solidFill>
+          <a:ln w="0">
+            <a:noFill/>
+          </a:ln>
+        </p:spPr>
+        <p:txBody>
+          <a:bodyPr lIns="0" tIns="0" rIns="0" bIns="0" anchor="t">
+            <a:noAutofit/>
+          </a:bodyPr>
+          <a:p>
+            <a:endParaRPr lang="en-US" sz="2400" b="0" u="none" strike="noStrike">
+              <a:solidFill>
+                <a:srgbClr val="000000"/>
+              </a:solidFill>
+              <a:effectLst/>
+              <a:uFillTx/>
+              <a:latin typeface="Times New Roman"/>
+            </a:endParaRPr>
+          </a:p>
+        </p:txBody>
+      </p:sp>
+      <p:sp>
+        <p:nvSpPr>
+          <p:cNvPr id="86" name=""/>
+          <p:cNvSpPr/>
+          <p:nvPr/>
+        </p:nvSpPr>
+        <p:spPr>
+          <a:xfrm>
+            <a:off x="4410000" y="451080"/>
+            <a:ext cx="693720" cy="328320"/>
+          </a:xfrm>
+          <a:custGeom>
+            <a:avLst/>
+            <a:gdLst/>
+            <a:ahLst/>
+            <a:rect l="0" t="0" r="r" b="b"/>
+            <a:pathLst>
+              <a:path w="1927" h="912">
+                <a:moveTo>
+                  <a:pt x="0" y="0"/>
+                </a:moveTo>
+                <a:lnTo>
+                  <a:pt x="1927" y="0"/>
+                </a:lnTo>
+                <a:lnTo>
+                  <a:pt x="1927" y="912"/>
+                </a:lnTo>
+                <a:lnTo>
+                  <a:pt x="0" y="912"/>
+                </a:lnTo>
+                <a:lnTo>
+                  <a:pt x="0" y="0"/>
+                </a:lnTo>
+                <a:close/>
+              </a:path>
+            </a:pathLst>
+          </a:custGeom>
+          <a:noFill/>
+          <a:ln w="16200">
+            <a:solidFill>
+              <a:srgbClr val="FFFFFF"/>
+            </a:solidFill>
+            <a:miter/>
+          </a:ln>
+        </p:spPr>
+        <p:txBody>
+          <a:bodyPr lIns="7920" tIns="7920" rIns="7920" bIns="7920" anchor="t">
+            <a:noAutofit/>
+          </a:bodyPr>
+          <a:p>
+            <a:endParaRPr lang="en-US" sz="2400" b="0" u="none" strike="noStrike">
+              <a:solidFill>
+                <a:srgbClr val="000000"/>
+              </a:solidFill>
+              <a:effectLst/>
+              <a:uFillTx/>
+              <a:latin typeface="Times New Roman"/>
+            </a:endParaRPr>
+          </a:p>
+        </p:txBody>
+      </p:sp>
+      <p:sp>
+        <p:nvSpPr>
+          <p:cNvPr id="87" name=""/>
+          <p:cNvSpPr/>
+          <p:nvPr/>
+        </p:nvSpPr>
+        <p:spPr>
+          <a:xfrm>
             <a:off x="4410000" y="779040"/>
             <a:ext cx="693720" cy="327960"/>
           </a:xfrm>
@@ -4593,129 +4714,8 @@
             </a:pathLst>
           </a:custGeom>
           <a:solidFill>
-            <a:srgbClr val="ACACAC"/>
+            <a:srgbClr val="B2B2B2"/>
           </a:solidFill>
-          <a:ln w="16200">
-            <a:solidFill>
-              <a:srgbClr val="FFFFFF"/>
-            </a:solidFill>
-            <a:miter/>
-          </a:ln>
-        </p:spPr>
-        <p:txBody>
-          <a:bodyPr lIns="7920" tIns="7920" rIns="7920" bIns="7920" anchor="t">
-            <a:noAutofit/>
-          </a:bodyPr>
-          <a:p>
-            <a:endParaRPr lang="en-US" sz="2400" b="0" u="none" strike="noStrike">
-              <a:solidFill>
-                <a:srgbClr val="000000"/>
-              </a:solidFill>
-              <a:effectLst/>
-              <a:uFillTx/>
-              <a:latin typeface="Times New Roman"/>
-            </a:endParaRPr>
-          </a:p>
-        </p:txBody>
-      </p:sp>
-      <p:sp>
-        <p:nvSpPr>
-          <p:cNvPr id="86" name=""/>
-          <p:cNvSpPr/>
-          <p:nvPr/>
-        </p:nvSpPr>
-        <p:spPr>
-          <a:xfrm>
-            <a:off x="4410000" y="451080"/>
-            <a:ext cx="693720" cy="328320"/>
-          </a:xfrm>
-          <a:custGeom>
-            <a:avLst/>
-            <a:gdLst/>
-            <a:ahLst/>
-            <a:rect l="0" t="0" r="r" b="b"/>
-            <a:pathLst>
-              <a:path w="1927" h="912">
-                <a:moveTo>
-                  <a:pt x="0" y="0"/>
-                </a:moveTo>
-                <a:lnTo>
-                  <a:pt x="1927" y="0"/>
-                </a:lnTo>
-                <a:lnTo>
-                  <a:pt x="1927" y="912"/>
-                </a:lnTo>
-                <a:lnTo>
-                  <a:pt x="0" y="912"/>
-                </a:lnTo>
-                <a:lnTo>
-                  <a:pt x="0" y="0"/>
-                </a:lnTo>
-                <a:close/>
-              </a:path>
-            </a:pathLst>
-          </a:custGeom>
-          <a:solidFill>
-            <a:srgbClr val="B5B5B5"/>
-          </a:solidFill>
-          <a:ln w="0">
-            <a:noFill/>
-          </a:ln>
-        </p:spPr>
-        <p:txBody>
-          <a:bodyPr lIns="0" tIns="0" rIns="0" bIns="0" anchor="t">
-            <a:noAutofit/>
-          </a:bodyPr>
-          <a:p>
-            <a:endParaRPr lang="en-US" sz="2400" b="0" u="none" strike="noStrike">
-              <a:solidFill>
-                <a:srgbClr val="000000"/>
-              </a:solidFill>
-              <a:effectLst/>
-              <a:uFillTx/>
-              <a:latin typeface="Times New Roman"/>
-            </a:endParaRPr>
-          </a:p>
-        </p:txBody>
-      </p:sp>
-      <p:sp>
-        <p:nvSpPr>
-          <p:cNvPr id="87" name=""/>
-          <p:cNvSpPr/>
-          <p:nvPr/>
-        </p:nvSpPr>
-        <p:spPr>
-          <a:xfrm>
-            <a:off x="4410000" y="451080"/>
-            <a:ext cx="693720" cy="328320"/>
-          </a:xfrm>
-          <a:custGeom>
-            <a:avLst/>
-            <a:gdLst/>
-            <a:ahLst/>
-            <a:rect l="0" t="0" r="r" b="b"/>
-            <a:pathLst>
-              <a:path w="1927" h="912">
-                <a:moveTo>
-                  <a:pt x="0" y="0"/>
-                </a:moveTo>
-                <a:lnTo>
-                  <a:pt x="1927" y="0"/>
-                </a:lnTo>
-                <a:lnTo>
-                  <a:pt x="1927" y="912"/>
-                </a:lnTo>
-                <a:lnTo>
-                  <a:pt x="0" y="912"/>
-                </a:lnTo>
-                <a:lnTo>
-                  <a:pt x="0" y="0"/>
-                </a:lnTo>
-                <a:close/>
-              </a:path>
-            </a:pathLst>
-          </a:custGeom>
-          <a:noFill/>
           <a:ln w="16200">
             <a:solidFill>
               <a:srgbClr val="FFFFFF"/>
@@ -4840,7 +4840,7 @@
             </a:pathLst>
           </a:custGeom>
           <a:solidFill>
-            <a:srgbClr val="D6D6D6"/>
+            <a:srgbClr val="D9D9D9"/>
           </a:solidFill>
           <a:ln w="0">
             <a:noFill/>
@@ -4961,7 +4961,7 @@
             </a:pathLst>
           </a:custGeom>
           <a:solidFill>
-            <a:srgbClr val="ECECEC"/>
+            <a:srgbClr val="F0F0F0"/>
           </a:solidFill>
           <a:ln w="0">
             <a:noFill/>
@@ -5082,7 +5082,7 @@
             </a:pathLst>
           </a:custGeom>
           <a:solidFill>
-            <a:srgbClr val="EDEDED"/>
+            <a:srgbClr val="F2F2F2"/>
           </a:solidFill>
           <a:ln w="16200">
             <a:solidFill>
@@ -5145,7 +5145,7 @@
             </a:pathLst>
           </a:custGeom>
           <a:solidFill>
-            <a:srgbClr val="EFEFEF"/>
+            <a:srgbClr val="F3F3F3"/>
           </a:solidFill>
           <a:ln w="0">
             <a:noFill/>
@@ -5266,7 +5266,7 @@
             </a:pathLst>
           </a:custGeom>
           <a:solidFill>
-            <a:srgbClr val="F0F0F0"/>
+            <a:srgbClr val="F5F5F5"/>
           </a:solidFill>
           <a:ln w="0">
             <a:noFill/>
@@ -5387,7 +5387,7 @@
             </a:pathLst>
           </a:custGeom>
           <a:solidFill>
-            <a:srgbClr val="F1F1F1"/>
+            <a:srgbClr val="F7F7F7"/>
           </a:solidFill>
           <a:ln w="0">
             <a:noFill/>
@@ -5508,7 +5508,7 @@
             </a:pathLst>
           </a:custGeom>
           <a:solidFill>
-            <a:srgbClr val="F4F4F4"/>
+            <a:srgbClr val="7F7F7F"/>
           </a:solidFill>
           <a:ln w="0">
             <a:noFill/>
@@ -5521,7 +5521,7 @@
           <a:p>
             <a:endParaRPr lang="en-US" sz="2400" b="0" u="none" strike="noStrike">
               <a:solidFill>
-                <a:srgbClr val="000000"/>
+                <a:srgbClr val="FFFFFF"/>
               </a:solidFill>
               <a:effectLst/>
               <a:uFillTx/>
@@ -5629,7 +5629,7 @@
             </a:pathLst>
           </a:custGeom>
           <a:solidFill>
-            <a:srgbClr val="F6F6F6"/>
+            <a:srgbClr val="7F7F7F"/>
           </a:solidFill>
           <a:ln w="0">
             <a:noFill/>
@@ -5642,7 +5642,7 @@
           <a:p>
             <a:endParaRPr lang="en-US" sz="2400" b="0" u="none" strike="noStrike">
               <a:solidFill>
-                <a:srgbClr val="000000"/>
+                <a:srgbClr val="FFFFFF"/>
               </a:solidFill>
               <a:effectLst/>
               <a:uFillTx/>
@@ -5750,7 +5750,7 @@
             </a:pathLst>
           </a:custGeom>
           <a:solidFill>
-            <a:srgbClr val="F6F6F6"/>
+            <a:srgbClr val="7F7F7F"/>
           </a:solidFill>
           <a:ln w="16200">
             <a:solidFill>
@@ -5766,7 +5766,7 @@
           <a:p>
             <a:endParaRPr lang="en-US" sz="2400" b="0" u="none" strike="noStrike">
               <a:solidFill>
-                <a:srgbClr val="000000"/>
+                <a:srgbClr val="FFFFFF"/>
               </a:solidFill>
               <a:effectLst/>
               <a:uFillTx/>
@@ -5988,103 +5988,7 @@
         </p:nvSpPr>
         <p:spPr>
           <a:xfrm>
-            <a:off x="5430960" y="898560"/>
-            <a:ext cx="75960" cy="86040"/>
-          </a:xfrm>
-          <a:prstGeom prst="rect">
-            <a:avLst/>
-          </a:prstGeom>
-          <a:noFill/>
-          <a:ln w="0">
-            <a:noFill/>
-          </a:ln>
-        </p:spPr>
-        <p:txBody>
-          <a:bodyPr wrap="none" lIns="0" tIns="0" rIns="0" bIns="0" anchor="t">
-            <a:spAutoFit/>
-          </a:bodyPr>
-          <a:p>
-            <a:pPr/>
-            <a:r>
-              <a:rPr lang="en-US" sz="600" b="0" u="none" strike="noStrike">
-                <a:solidFill>
-                  <a:srgbClr val="FFFFFF"/>
-                </a:solidFill>
-                <a:effectLst/>
-                <a:uFillTx/>
-                <a:latin typeface="Arial"/>
-                <a:ea typeface="Arial"/>
-              </a:rPr>
-              <a:t>9</a:t>
-            </a:r>
-            <a:endParaRPr lang="en-US" sz="600" b="0" u="none" strike="noStrike">
-              <a:solidFill>
-                <a:srgbClr val="000000"/>
-              </a:solidFill>
-              <a:effectLst/>
-              <a:uFillTx/>
-              <a:latin typeface="Times New Roman"/>
-            </a:endParaRPr>
-          </a:p>
-        </p:txBody>
-      </p:sp>
-      <p:sp>
-        <p:nvSpPr>
-          <p:cNvPr id="110" name=""/>
-          <p:cNvSpPr txBox="1"/>
-          <p:nvPr/>
-        </p:nvSpPr>
-        <p:spPr>
-          <a:xfrm>
-            <a:off x="6105240" y="898560"/>
-            <a:ext cx="85320" cy="86040"/>
-          </a:xfrm>
-          <a:prstGeom prst="rect">
-            <a:avLst/>
-          </a:prstGeom>
-          <a:noFill/>
-          <a:ln w="0">
-            <a:noFill/>
-          </a:ln>
-        </p:spPr>
-        <p:txBody>
-          <a:bodyPr wrap="none" lIns="0" tIns="0" rIns="0" bIns="0" anchor="t">
-            <a:spAutoFit/>
-          </a:bodyPr>
-          <a:p>
-            <a:pPr/>
-            <a:r>
-              <a:rPr lang="en-US" sz="600" b="0" u="none" strike="noStrike">
-                <a:solidFill>
-                  <a:srgbClr val="FFFFFF"/>
-                </a:solidFill>
-                <a:effectLst/>
-                <a:uFillTx/>
-                <a:latin typeface="Arial"/>
-                <a:ea typeface="Arial"/>
-              </a:rPr>
-              <a:t>10</a:t>
-            </a:r>
-            <a:endParaRPr lang="en-US" sz="600" b="0" u="none" strike="noStrike">
-              <a:solidFill>
-                <a:srgbClr val="000000"/>
-              </a:solidFill>
-              <a:effectLst/>
-              <a:uFillTx/>
-              <a:latin typeface="Times New Roman"/>
-            </a:endParaRPr>
-          </a:p>
-        </p:txBody>
-      </p:sp>
-      <p:sp>
-        <p:nvSpPr>
-          <p:cNvPr id="111" name=""/>
-          <p:cNvSpPr txBox="1"/>
-          <p:nvPr/>
-        </p:nvSpPr>
-        <p:spPr>
-          <a:xfrm>
-            <a:off x="4718880" y="898560"/>
+            <a:off x="5412240" y="898560"/>
             <a:ext cx="85320" cy="86040"/>
           </a:xfrm>
           <a:prstGeom prst="rect">
@@ -6111,7 +6015,7 @@
                 <a:latin typeface="Arial"/>
                 <a:ea typeface="Arial"/>
               </a:rPr>
-              <a:t>15</a:t>
+              <a:t>10</a:t>
             </a:r>
             <a:endParaRPr lang="en-US" sz="600" b="0" u="none" strike="noStrike">
               <a:solidFill>
@@ -6126,13 +6030,13 @@
       </p:sp>
       <p:sp>
         <p:nvSpPr>
-          <p:cNvPr id="112" name=""/>
+          <p:cNvPr id="110" name=""/>
           <p:cNvSpPr txBox="1"/>
           <p:nvPr/>
         </p:nvSpPr>
         <p:spPr>
           <a:xfrm>
-            <a:off x="4718880" y="570960"/>
+            <a:off x="6105240" y="898560"/>
             <a:ext cx="85320" cy="86040"/>
           </a:xfrm>
           <a:prstGeom prst="rect">
@@ -6159,7 +6063,103 @@
                 <a:latin typeface="Arial"/>
                 <a:ea typeface="Arial"/>
               </a:rPr>
-              <a:t>17</a:t>
+              <a:t>11</a:t>
+            </a:r>
+            <a:endParaRPr lang="en-US" sz="600" b="0" u="none" strike="noStrike">
+              <a:solidFill>
+                <a:srgbClr val="000000"/>
+              </a:solidFill>
+              <a:effectLst/>
+              <a:uFillTx/>
+              <a:latin typeface="Times New Roman"/>
+            </a:endParaRPr>
+          </a:p>
+        </p:txBody>
+      </p:sp>
+      <p:sp>
+        <p:nvSpPr>
+          <p:cNvPr id="111" name=""/>
+          <p:cNvSpPr txBox="1"/>
+          <p:nvPr/>
+        </p:nvSpPr>
+        <p:spPr>
+          <a:xfrm>
+            <a:off x="4718880" y="570960"/>
+            <a:ext cx="85320" cy="86040"/>
+          </a:xfrm>
+          <a:prstGeom prst="rect">
+            <a:avLst/>
+          </a:prstGeom>
+          <a:noFill/>
+          <a:ln w="0">
+            <a:noFill/>
+          </a:ln>
+        </p:spPr>
+        <p:txBody>
+          <a:bodyPr wrap="none" lIns="0" tIns="0" rIns="0" bIns="0" anchor="t">
+            <a:spAutoFit/>
+          </a:bodyPr>
+          <a:p>
+            <a:pPr/>
+            <a:r>
+              <a:rPr lang="en-US" sz="600" b="0" u="none" strike="noStrike">
+                <a:solidFill>
+                  <a:srgbClr val="1A1A1A"/>
+                </a:solidFill>
+                <a:effectLst/>
+                <a:uFillTx/>
+                <a:latin typeface="Arial"/>
+                <a:ea typeface="Arial"/>
+              </a:rPr>
+              <a:t>16</a:t>
+            </a:r>
+            <a:endParaRPr lang="en-US" sz="600" b="0" u="none" strike="noStrike">
+              <a:solidFill>
+                <a:srgbClr val="000000"/>
+              </a:solidFill>
+              <a:effectLst/>
+              <a:uFillTx/>
+              <a:latin typeface="Times New Roman"/>
+            </a:endParaRPr>
+          </a:p>
+        </p:txBody>
+      </p:sp>
+      <p:sp>
+        <p:nvSpPr>
+          <p:cNvPr id="112" name=""/>
+          <p:cNvSpPr txBox="1"/>
+          <p:nvPr/>
+        </p:nvSpPr>
+        <p:spPr>
+          <a:xfrm>
+            <a:off x="4718880" y="898560"/>
+            <a:ext cx="85320" cy="86040"/>
+          </a:xfrm>
+          <a:prstGeom prst="rect">
+            <a:avLst/>
+          </a:prstGeom>
+          <a:noFill/>
+          <a:ln w="0">
+            <a:noFill/>
+          </a:ln>
+        </p:spPr>
+        <p:txBody>
+          <a:bodyPr wrap="none" lIns="0" tIns="0" rIns="0" bIns="0" anchor="t">
+            <a:spAutoFit/>
+          </a:bodyPr>
+          <a:p>
+            <a:pPr/>
+            <a:r>
+              <a:rPr lang="en-US" sz="600" b="0" u="none" strike="noStrike">
+                <a:solidFill>
+                  <a:srgbClr val="1A1A1A"/>
+                </a:solidFill>
+                <a:effectLst/>
+                <a:uFillTx/>
+                <a:latin typeface="Arial"/>
+                <a:ea typeface="Arial"/>
+              </a:rPr>
+              <a:t>16</a:t>
             </a:r>
             <a:endParaRPr lang="en-US" sz="600" b="0" u="none" strike="noStrike">
               <a:solidFill>
@@ -6255,7 +6255,7 @@
                 <a:latin typeface="Arial"/>
                 <a:ea typeface="Arial"/>
               </a:rPr>
-              <a:t>24</a:t>
+              <a:t>25</a:t>
             </a:r>
             <a:endParaRPr lang="en-US" sz="600" b="0" u="none" strike="noStrike">
               <a:solidFill>
@@ -6277,102 +6277,6 @@
         <p:spPr>
           <a:xfrm>
             <a:off x="5412240" y="1226160"/>
-            <a:ext cx="85320" cy="86040"/>
-          </a:xfrm>
-          <a:prstGeom prst="rect">
-            <a:avLst/>
-          </a:prstGeom>
-          <a:noFill/>
-          <a:ln w="0">
-            <a:noFill/>
-          </a:ln>
-        </p:spPr>
-        <p:txBody>
-          <a:bodyPr wrap="none" lIns="0" tIns="0" rIns="0" bIns="0" anchor="t">
-            <a:spAutoFit/>
-          </a:bodyPr>
-          <a:p>
-            <a:pPr/>
-            <a:r>
-              <a:rPr lang="en-US" sz="600" b="0" u="none" strike="noStrike">
-                <a:solidFill>
-                  <a:srgbClr val="1A1A1A"/>
-                </a:solidFill>
-                <a:effectLst/>
-                <a:uFillTx/>
-                <a:latin typeface="Arial"/>
-                <a:ea typeface="Arial"/>
-              </a:rPr>
-              <a:t>31</a:t>
-            </a:r>
-            <a:endParaRPr lang="en-US" sz="600" b="0" u="none" strike="noStrike">
-              <a:solidFill>
-                <a:srgbClr val="000000"/>
-              </a:solidFill>
-              <a:effectLst/>
-              <a:uFillTx/>
-              <a:latin typeface="Times New Roman"/>
-            </a:endParaRPr>
-          </a:p>
-        </p:txBody>
-      </p:sp>
-      <p:sp>
-        <p:nvSpPr>
-          <p:cNvPr id="116" name=""/>
-          <p:cNvSpPr txBox="1"/>
-          <p:nvPr/>
-        </p:nvSpPr>
-        <p:spPr>
-          <a:xfrm>
-            <a:off x="4718880" y="1226160"/>
-            <a:ext cx="85320" cy="86040"/>
-          </a:xfrm>
-          <a:prstGeom prst="rect">
-            <a:avLst/>
-          </a:prstGeom>
-          <a:noFill/>
-          <a:ln w="0">
-            <a:noFill/>
-          </a:ln>
-        </p:spPr>
-        <p:txBody>
-          <a:bodyPr wrap="none" lIns="0" tIns="0" rIns="0" bIns="0" anchor="t">
-            <a:spAutoFit/>
-          </a:bodyPr>
-          <a:p>
-            <a:pPr/>
-            <a:r>
-              <a:rPr lang="en-US" sz="600" b="0" u="none" strike="noStrike">
-                <a:solidFill>
-                  <a:srgbClr val="1A1A1A"/>
-                </a:solidFill>
-                <a:effectLst/>
-                <a:uFillTx/>
-                <a:latin typeface="Arial"/>
-                <a:ea typeface="Arial"/>
-              </a:rPr>
-              <a:t>31</a:t>
-            </a:r>
-            <a:endParaRPr lang="en-US" sz="600" b="0" u="none" strike="noStrike">
-              <a:solidFill>
-                <a:srgbClr val="000000"/>
-              </a:solidFill>
-              <a:effectLst/>
-              <a:uFillTx/>
-              <a:latin typeface="Times New Roman"/>
-            </a:endParaRPr>
-          </a:p>
-        </p:txBody>
-      </p:sp>
-      <p:sp>
-        <p:nvSpPr>
-          <p:cNvPr id="117" name=""/>
-          <p:cNvSpPr txBox="1"/>
-          <p:nvPr/>
-        </p:nvSpPr>
-        <p:spPr>
-          <a:xfrm>
-            <a:off x="6105240" y="1226160"/>
             <a:ext cx="85320" cy="86040"/>
           </a:xfrm>
           <a:prstGeom prst="rect">
@@ -6414,109 +6318,13 @@
       </p:sp>
       <p:sp>
         <p:nvSpPr>
-          <p:cNvPr id="118" name=""/>
+          <p:cNvPr id="116" name=""/>
           <p:cNvSpPr txBox="1"/>
           <p:nvPr/>
         </p:nvSpPr>
         <p:spPr>
           <a:xfrm>
-            <a:off x="4025520" y="1226160"/>
-            <a:ext cx="85320" cy="86040"/>
-          </a:xfrm>
-          <a:prstGeom prst="rect">
-            <a:avLst/>
-          </a:prstGeom>
-          <a:noFill/>
-          <a:ln w="0">
-            <a:noFill/>
-          </a:ln>
-        </p:spPr>
-        <p:txBody>
-          <a:bodyPr wrap="none" lIns="0" tIns="0" rIns="0" bIns="0" anchor="t">
-            <a:spAutoFit/>
-          </a:bodyPr>
-          <a:p>
-            <a:pPr/>
-            <a:r>
-              <a:rPr lang="en-US" sz="600" b="0" u="none" strike="noStrike">
-                <a:solidFill>
-                  <a:srgbClr val="1A1A1A"/>
-                </a:solidFill>
-                <a:effectLst/>
-                <a:uFillTx/>
-                <a:latin typeface="Arial"/>
-                <a:ea typeface="Arial"/>
-              </a:rPr>
-              <a:t>32</a:t>
-            </a:r>
-            <a:endParaRPr lang="en-US" sz="600" b="0" u="none" strike="noStrike">
-              <a:solidFill>
-                <a:srgbClr val="000000"/>
-              </a:solidFill>
-              <a:effectLst/>
-              <a:uFillTx/>
-              <a:latin typeface="Times New Roman"/>
-            </a:endParaRPr>
-          </a:p>
-        </p:txBody>
-      </p:sp>
-      <p:sp>
-        <p:nvSpPr>
-          <p:cNvPr id="119" name=""/>
-          <p:cNvSpPr txBox="1"/>
-          <p:nvPr/>
-        </p:nvSpPr>
-        <p:spPr>
-          <a:xfrm>
-            <a:off x="4718880" y="1553760"/>
-            <a:ext cx="85320" cy="86040"/>
-          </a:xfrm>
-          <a:prstGeom prst="rect">
-            <a:avLst/>
-          </a:prstGeom>
-          <a:noFill/>
-          <a:ln w="0">
-            <a:noFill/>
-          </a:ln>
-        </p:spPr>
-        <p:txBody>
-          <a:bodyPr wrap="none" lIns="0" tIns="0" rIns="0" bIns="0" anchor="t">
-            <a:spAutoFit/>
-          </a:bodyPr>
-          <a:p>
-            <a:pPr/>
-            <a:r>
-              <a:rPr lang="en-US" sz="600" b="0" u="none" strike="noStrike">
-                <a:solidFill>
-                  <a:srgbClr val="1A1A1A"/>
-                </a:solidFill>
-                <a:effectLst/>
-                <a:uFillTx/>
-                <a:latin typeface="Arial"/>
-                <a:ea typeface="Arial"/>
-              </a:rPr>
-              <a:t>32</a:t>
-            </a:r>
-            <a:endParaRPr lang="en-US" sz="600" b="0" u="none" strike="noStrike">
-              <a:solidFill>
-                <a:srgbClr val="000000"/>
-              </a:solidFill>
-              <a:effectLst/>
-              <a:uFillTx/>
-              <a:latin typeface="Times New Roman"/>
-            </a:endParaRPr>
-          </a:p>
-        </p:txBody>
-      </p:sp>
-      <p:sp>
-        <p:nvSpPr>
-          <p:cNvPr id="120" name=""/>
-          <p:cNvSpPr txBox="1"/>
-          <p:nvPr/>
-        </p:nvSpPr>
-        <p:spPr>
-          <a:xfrm>
-            <a:off x="6105240" y="1553760"/>
+            <a:off x="4718880" y="1226160"/>
             <a:ext cx="85320" cy="86040"/>
           </a:xfrm>
           <a:prstGeom prst="rect">
@@ -6558,13 +6366,61 @@
       </p:sp>
       <p:sp>
         <p:nvSpPr>
-          <p:cNvPr id="121" name=""/>
+          <p:cNvPr id="117" name=""/>
           <p:cNvSpPr txBox="1"/>
           <p:nvPr/>
         </p:nvSpPr>
         <p:spPr>
           <a:xfrm>
-            <a:off x="5412240" y="1553760"/>
+            <a:off x="6105240" y="1226160"/>
+            <a:ext cx="85320" cy="86040"/>
+          </a:xfrm>
+          <a:prstGeom prst="rect">
+            <a:avLst/>
+          </a:prstGeom>
+          <a:noFill/>
+          <a:ln w="0">
+            <a:noFill/>
+          </a:ln>
+        </p:spPr>
+        <p:txBody>
+          <a:bodyPr wrap="none" lIns="0" tIns="0" rIns="0" bIns="0" anchor="t">
+            <a:spAutoFit/>
+          </a:bodyPr>
+          <a:p>
+            <a:pPr/>
+            <a:r>
+              <a:rPr lang="en-US" sz="600" b="0" u="none" strike="noStrike">
+                <a:solidFill>
+                  <a:srgbClr val="1A1A1A"/>
+                </a:solidFill>
+                <a:effectLst/>
+                <a:uFillTx/>
+                <a:latin typeface="Arial"/>
+                <a:ea typeface="Arial"/>
+              </a:rPr>
+              <a:t>33</a:t>
+            </a:r>
+            <a:endParaRPr lang="en-US" sz="600" b="0" u="none" strike="noStrike">
+              <a:solidFill>
+                <a:srgbClr val="000000"/>
+              </a:solidFill>
+              <a:effectLst/>
+              <a:uFillTx/>
+              <a:latin typeface="Times New Roman"/>
+            </a:endParaRPr>
+          </a:p>
+        </p:txBody>
+      </p:sp>
+      <p:sp>
+        <p:nvSpPr>
+          <p:cNvPr id="118" name=""/>
+          <p:cNvSpPr txBox="1"/>
+          <p:nvPr/>
+        </p:nvSpPr>
+        <p:spPr>
+          <a:xfrm>
+            <a:off x="4025520" y="1226160"/>
             <a:ext cx="85320" cy="86040"/>
           </a:xfrm>
           <a:prstGeom prst="rect">
@@ -6606,13 +6462,13 @@
       </p:sp>
       <p:sp>
         <p:nvSpPr>
-          <p:cNvPr id="122" name=""/>
+          <p:cNvPr id="119" name=""/>
           <p:cNvSpPr txBox="1"/>
           <p:nvPr/>
         </p:nvSpPr>
         <p:spPr>
           <a:xfrm>
-            <a:off x="4025520" y="1553760"/>
+            <a:off x="4718880" y="1553760"/>
             <a:ext cx="85320" cy="86040"/>
           </a:xfrm>
           <a:prstGeom prst="rect">
@@ -6654,6 +6510,150 @@
       </p:sp>
       <p:sp>
         <p:nvSpPr>
+          <p:cNvPr id="120" name=""/>
+          <p:cNvSpPr txBox="1"/>
+          <p:nvPr/>
+        </p:nvSpPr>
+        <p:spPr>
+          <a:xfrm>
+            <a:off x="6105240" y="1553760"/>
+            <a:ext cx="85320" cy="86040"/>
+          </a:xfrm>
+          <a:prstGeom prst="rect">
+            <a:avLst/>
+          </a:prstGeom>
+          <a:noFill/>
+          <a:ln w="0">
+            <a:noFill/>
+          </a:ln>
+        </p:spPr>
+        <p:txBody>
+          <a:bodyPr wrap="none" lIns="0" tIns="0" rIns="0" bIns="0" anchor="t">
+            <a:spAutoFit/>
+          </a:bodyPr>
+          <a:p>
+            <a:pPr/>
+            <a:r>
+              <a:rPr lang="en-US" sz="600" b="0" u="none" strike="noStrike">
+                <a:solidFill>
+                  <a:srgbClr val="FFFFFF"/>
+                </a:solidFill>
+                <a:effectLst/>
+                <a:uFillTx/>
+                <a:latin typeface="Arial"/>
+                <a:ea typeface="Arial"/>
+              </a:rPr>
+              <a:t>35</a:t>
+            </a:r>
+            <a:endParaRPr lang="en-US" sz="600" b="0" u="none" strike="noStrike">
+              <a:solidFill>
+                <a:srgbClr val="000000"/>
+              </a:solidFill>
+              <a:effectLst/>
+              <a:uFillTx/>
+              <a:latin typeface="Times New Roman"/>
+            </a:endParaRPr>
+          </a:p>
+        </p:txBody>
+      </p:sp>
+      <p:sp>
+        <p:nvSpPr>
+          <p:cNvPr id="121" name=""/>
+          <p:cNvSpPr txBox="1"/>
+          <p:nvPr/>
+        </p:nvSpPr>
+        <p:spPr>
+          <a:xfrm>
+            <a:off x="5412240" y="1553760"/>
+            <a:ext cx="85320" cy="86040"/>
+          </a:xfrm>
+          <a:prstGeom prst="rect">
+            <a:avLst/>
+          </a:prstGeom>
+          <a:noFill/>
+          <a:ln w="0">
+            <a:noFill/>
+          </a:ln>
+        </p:spPr>
+        <p:txBody>
+          <a:bodyPr wrap="none" lIns="0" tIns="0" rIns="0" bIns="0" anchor="t">
+            <a:spAutoFit/>
+          </a:bodyPr>
+          <a:p>
+            <a:pPr/>
+            <a:r>
+              <a:rPr lang="en-US" sz="600" b="0" u="none" strike="noStrike">
+                <a:solidFill>
+                  <a:srgbClr val="FFFFFF"/>
+                </a:solidFill>
+                <a:effectLst/>
+                <a:uFillTx/>
+                <a:latin typeface="Arial"/>
+                <a:ea typeface="Arial"/>
+              </a:rPr>
+              <a:t>35</a:t>
+            </a:r>
+            <a:endParaRPr lang="en-US" sz="600" b="0" u="none" strike="noStrike">
+              <a:solidFill>
+                <a:srgbClr val="000000"/>
+              </a:solidFill>
+              <a:effectLst/>
+              <a:uFillTx/>
+              <a:latin typeface="Times New Roman"/>
+            </a:endParaRPr>
+          </a:p>
+        </p:txBody>
+      </p:sp>
+      <p:sp>
+        <p:nvSpPr>
+          <p:cNvPr id="122" name=""/>
+          <p:cNvSpPr txBox="1"/>
+          <p:nvPr/>
+        </p:nvSpPr>
+        <p:spPr>
+          <a:xfrm>
+            <a:off x="4025520" y="1553760"/>
+            <a:ext cx="85320" cy="86040"/>
+          </a:xfrm>
+          <a:prstGeom prst="rect">
+            <a:avLst/>
+          </a:prstGeom>
+          <a:noFill/>
+          <a:ln w="0">
+            <a:noFill/>
+          </a:ln>
+        </p:spPr>
+        <p:txBody>
+          <a:bodyPr wrap="none" lIns="0" tIns="0" rIns="0" bIns="0" anchor="t">
+            <a:spAutoFit/>
+          </a:bodyPr>
+          <a:p>
+            <a:pPr/>
+            <a:r>
+              <a:rPr lang="en-US" sz="600" b="0" u="none" strike="noStrike">
+                <a:solidFill>
+                  <a:srgbClr val="FFFFFF"/>
+                </a:solidFill>
+                <a:effectLst/>
+                <a:uFillTx/>
+                <a:latin typeface="Arial"/>
+                <a:ea typeface="Arial"/>
+              </a:rPr>
+              <a:t>35</a:t>
+            </a:r>
+            <a:endParaRPr lang="en-US" sz="600" b="0" u="none" strike="noStrike">
+              <a:solidFill>
+                <a:srgbClr val="000000"/>
+              </a:solidFill>
+              <a:effectLst/>
+              <a:uFillTx/>
+              <a:latin typeface="Times New Roman"/>
+            </a:endParaRPr>
+          </a:p>
+        </p:txBody>
+      </p:sp>
+      <p:sp>
+        <p:nvSpPr>
           <p:cNvPr id="123" name=""/>
           <p:cNvSpPr txBox="1"/>
           <p:nvPr/>
@@ -7835,8 +7835,8 @@
         </p:nvSpPr>
         <p:spPr>
           <a:xfrm>
-            <a:off x="1712160" y="2600640"/>
-            <a:ext cx="1060560" cy="0"/>
+            <a:off x="1720800" y="2600640"/>
+            <a:ext cx="1065600" cy="0"/>
           </a:xfrm>
           <a:prstGeom prst="line">
             <a:avLst/>
@@ -7878,8 +7878,8 @@
         </p:nvSpPr>
         <p:spPr>
           <a:xfrm>
-            <a:off x="1733400" y="2782440"/>
-            <a:ext cx="1055880" cy="0"/>
+            <a:off x="1743840" y="2782440"/>
+            <a:ext cx="1061280" cy="0"/>
           </a:xfrm>
           <a:prstGeom prst="line">
             <a:avLst/>
@@ -7921,8 +7921,8 @@
         </p:nvSpPr>
         <p:spPr>
           <a:xfrm>
-            <a:off x="1723320" y="2691360"/>
-            <a:ext cx="1050480" cy="0"/>
+            <a:off x="1729800" y="2691360"/>
+            <a:ext cx="1055520" cy="0"/>
           </a:xfrm>
           <a:prstGeom prst="line">
             <a:avLst/>
@@ -7964,8 +7964,8 @@
         </p:nvSpPr>
         <p:spPr>
           <a:xfrm>
-            <a:off x="1679760" y="2963880"/>
-            <a:ext cx="1059840" cy="0"/>
+            <a:off x="1688040" y="2963880"/>
+            <a:ext cx="1062360" cy="0"/>
           </a:xfrm>
           <a:prstGeom prst="line">
             <a:avLst/>
@@ -8007,8 +8007,8 @@
         </p:nvSpPr>
         <p:spPr>
           <a:xfrm>
-            <a:off x="1695600" y="3145680"/>
-            <a:ext cx="1052640" cy="0"/>
+            <a:off x="1704960" y="3145680"/>
+            <a:ext cx="1055880" cy="0"/>
           </a:xfrm>
           <a:prstGeom prst="line">
             <a:avLst/>
@@ -8050,8 +8050,8 @@
         </p:nvSpPr>
         <p:spPr>
           <a:xfrm>
-            <a:off x="1686960" y="3054960"/>
-            <a:ext cx="1047600" cy="0"/>
+            <a:off x="1693080" y="3054960"/>
+            <a:ext cx="1050840" cy="0"/>
           </a:xfrm>
           <a:prstGeom prst="line">
             <a:avLst/>
@@ -8093,8 +8093,8 @@
         </p:nvSpPr>
         <p:spPr>
           <a:xfrm>
-            <a:off x="1739160" y="3327480"/>
-            <a:ext cx="1086840" cy="0"/>
+            <a:off x="1749960" y="3327480"/>
+            <a:ext cx="1093680" cy="0"/>
           </a:xfrm>
           <a:prstGeom prst="line">
             <a:avLst/>
@@ -8136,8 +8136,8 @@
         </p:nvSpPr>
         <p:spPr>
           <a:xfrm>
-            <a:off x="1765440" y="3508920"/>
-            <a:ext cx="1086480" cy="0"/>
+            <a:off x="1777680" y="3508920"/>
+            <a:ext cx="1094760" cy="0"/>
           </a:xfrm>
           <a:prstGeom prst="line">
             <a:avLst/>
@@ -8179,8 +8179,8 @@
         </p:nvSpPr>
         <p:spPr>
           <a:xfrm>
-            <a:off x="1751040" y="3418200"/>
-            <a:ext cx="1079280" cy="0"/>
+            <a:off x="1760760" y="3418200"/>
+            <a:ext cx="1087200" cy="0"/>
           </a:xfrm>
           <a:prstGeom prst="line">
             <a:avLst/>
@@ -8222,8 +8222,8 @@
         </p:nvSpPr>
         <p:spPr>
           <a:xfrm>
-            <a:off x="1623960" y="3690720"/>
-            <a:ext cx="1012320" cy="0"/>
+            <a:off x="1626120" y="3690720"/>
+            <a:ext cx="1011240" cy="0"/>
           </a:xfrm>
           <a:prstGeom prst="line">
             <a:avLst/>
@@ -8265,8 +8265,8 @@
         </p:nvSpPr>
         <p:spPr>
           <a:xfrm>
-            <a:off x="1646280" y="3872160"/>
-            <a:ext cx="1005480" cy="0"/>
+            <a:off x="1648440" y="3872160"/>
+            <a:ext cx="1004400" cy="0"/>
           </a:xfrm>
           <a:prstGeom prst="line">
             <a:avLst/>
@@ -8351,7 +8351,352 @@
         </p:nvSpPr>
         <p:spPr>
           <a:xfrm>
-            <a:off x="2192400" y="2580120"/>
+            <a:off x="2202840" y="2580120"/>
+            <a:ext cx="41400" cy="41760"/>
+          </a:xfrm>
+          <a:custGeom>
+            <a:avLst/>
+            <a:gdLst/>
+            <a:ahLst/>
+            <a:rect l="0" t="0" r="r" b="b"/>
+            <a:pathLst>
+              <a:path w="115" h="116">
+                <a:moveTo>
+                  <a:pt x="0" y="58"/>
+                </a:moveTo>
+                <a:cubicBezTo>
+                  <a:pt x="0" y="-19"/>
+                  <a:pt x="115" y="-19"/>
+                  <a:pt x="115" y="58"/>
+                </a:cubicBezTo>
+                <a:cubicBezTo>
+                  <a:pt x="115" y="135"/>
+                  <a:pt x="0" y="135"/>
+                  <a:pt x="0" y="58"/>
+                </a:cubicBezTo>
+                <a:close/>
+              </a:path>
+            </a:pathLst>
+          </a:custGeom>
+          <a:solidFill>
+            <a:srgbClr val="D1552C"/>
+          </a:solidFill>
+          <a:ln w="0">
+            <a:noFill/>
+          </a:ln>
+        </p:spPr>
+        <p:txBody>
+          <a:bodyPr lIns="0" tIns="0" rIns="0" bIns="0" anchor="t">
+            <a:noAutofit/>
+          </a:bodyPr>
+          <a:p>
+            <a:endParaRPr lang="en-US" sz="2400" b="0" u="none" strike="noStrike">
+              <a:solidFill>
+                <a:srgbClr val="FFFFFF"/>
+              </a:solidFill>
+              <a:effectLst/>
+              <a:uFillTx/>
+              <a:latin typeface="Times New Roman"/>
+            </a:endParaRPr>
+          </a:p>
+        </p:txBody>
+      </p:sp>
+      <p:sp>
+        <p:nvSpPr>
+          <p:cNvPr id="162" name=""/>
+          <p:cNvSpPr/>
+          <p:nvPr/>
+        </p:nvSpPr>
+        <p:spPr>
+          <a:xfrm>
+            <a:off x="2202840" y="2580120"/>
+            <a:ext cx="41400" cy="41760"/>
+          </a:xfrm>
+          <a:custGeom>
+            <a:avLst/>
+            <a:gdLst/>
+            <a:ahLst/>
+            <a:rect l="0" t="0" r="r" b="b"/>
+            <a:pathLst>
+              <a:path fill="none" w="115" h="116">
+                <a:moveTo>
+                  <a:pt x="115" y="58"/>
+                </a:moveTo>
+                <a:cubicBezTo>
+                  <a:pt x="115" y="135"/>
+                  <a:pt x="0" y="135"/>
+                  <a:pt x="0" y="58"/>
+                </a:cubicBezTo>
+                <a:cubicBezTo>
+                  <a:pt x="0" y="-19"/>
+                  <a:pt x="115" y="-19"/>
+                  <a:pt x="115" y="58"/>
+                </a:cubicBezTo>
+              </a:path>
+            </a:pathLst>
+          </a:custGeom>
+          <a:ln cap="rnd" w="5400">
+            <a:solidFill>
+              <a:srgbClr val="D1552C"/>
+            </a:solidFill>
+            <a:round/>
+          </a:ln>
+        </p:spPr>
+        <p:txBody>
+          <a:bodyPr lIns="2520" tIns="2520" rIns="2520" bIns="2520" anchor="t">
+            <a:noAutofit/>
+          </a:bodyPr>
+          <a:p>
+            <a:endParaRPr lang="en-US" sz="2400" b="0" u="none" strike="noStrike">
+              <a:solidFill>
+                <a:srgbClr val="000000"/>
+              </a:solidFill>
+              <a:effectLst/>
+              <a:uFillTx/>
+              <a:latin typeface="Times New Roman"/>
+            </a:endParaRPr>
+          </a:p>
+        </p:txBody>
+      </p:sp>
+      <p:sp>
+        <p:nvSpPr>
+          <p:cNvPr id="163" name=""/>
+          <p:cNvSpPr/>
+          <p:nvPr/>
+        </p:nvSpPr>
+        <p:spPr>
+          <a:xfrm>
+            <a:off x="2224080" y="2761920"/>
+            <a:ext cx="41400" cy="41040"/>
+          </a:xfrm>
+          <a:custGeom>
+            <a:avLst/>
+            <a:gdLst/>
+            <a:ahLst/>
+            <a:rect l="0" t="0" r="r" b="b"/>
+            <a:pathLst>
+              <a:path w="115" h="114">
+                <a:moveTo>
+                  <a:pt x="0" y="57"/>
+                </a:moveTo>
+                <a:cubicBezTo>
+                  <a:pt x="0" y="-19"/>
+                  <a:pt x="115" y="-19"/>
+                  <a:pt x="115" y="57"/>
+                </a:cubicBezTo>
+                <a:cubicBezTo>
+                  <a:pt x="115" y="133"/>
+                  <a:pt x="0" y="133"/>
+                  <a:pt x="0" y="57"/>
+                </a:cubicBezTo>
+                <a:close/>
+              </a:path>
+            </a:pathLst>
+          </a:custGeom>
+          <a:solidFill>
+            <a:srgbClr val="A8A8A8"/>
+          </a:solidFill>
+          <a:ln w="0">
+            <a:noFill/>
+          </a:ln>
+        </p:spPr>
+        <p:txBody>
+          <a:bodyPr lIns="0" tIns="0" rIns="0" bIns="0" anchor="t">
+            <a:noAutofit/>
+          </a:bodyPr>
+          <a:p>
+            <a:endParaRPr lang="en-US" sz="2400" b="0" u="none" strike="noStrike">
+              <a:solidFill>
+                <a:srgbClr val="000000"/>
+              </a:solidFill>
+              <a:effectLst/>
+              <a:uFillTx/>
+              <a:latin typeface="Times New Roman"/>
+            </a:endParaRPr>
+          </a:p>
+        </p:txBody>
+      </p:sp>
+      <p:sp>
+        <p:nvSpPr>
+          <p:cNvPr id="164" name=""/>
+          <p:cNvSpPr/>
+          <p:nvPr/>
+        </p:nvSpPr>
+        <p:spPr>
+          <a:xfrm>
+            <a:off x="2224080" y="2761920"/>
+            <a:ext cx="41400" cy="41040"/>
+          </a:xfrm>
+          <a:custGeom>
+            <a:avLst/>
+            <a:gdLst/>
+            <a:ahLst/>
+            <a:rect l="0" t="0" r="r" b="b"/>
+            <a:pathLst>
+              <a:path fill="none" w="115" h="114">
+                <a:moveTo>
+                  <a:pt x="115" y="57"/>
+                </a:moveTo>
+                <a:cubicBezTo>
+                  <a:pt x="115" y="133"/>
+                  <a:pt x="0" y="133"/>
+                  <a:pt x="0" y="57"/>
+                </a:cubicBezTo>
+                <a:cubicBezTo>
+                  <a:pt x="0" y="-19"/>
+                  <a:pt x="115" y="-19"/>
+                  <a:pt x="115" y="57"/>
+                </a:cubicBezTo>
+              </a:path>
+            </a:pathLst>
+          </a:custGeom>
+          <a:ln cap="rnd" w="5400">
+            <a:solidFill>
+              <a:srgbClr val="A8A8A8"/>
+            </a:solidFill>
+            <a:round/>
+          </a:ln>
+        </p:spPr>
+        <p:txBody>
+          <a:bodyPr lIns="2520" tIns="2520" rIns="2520" bIns="2520" anchor="t">
+            <a:noAutofit/>
+          </a:bodyPr>
+          <a:p>
+            <a:endParaRPr lang="en-US" sz="2400" b="0" u="none" strike="noStrike">
+              <a:solidFill>
+                <a:srgbClr val="000000"/>
+              </a:solidFill>
+              <a:effectLst/>
+              <a:uFillTx/>
+              <a:latin typeface="Times New Roman"/>
+            </a:endParaRPr>
+          </a:p>
+        </p:txBody>
+      </p:sp>
+      <p:sp>
+        <p:nvSpPr>
+          <p:cNvPr id="165" name=""/>
+          <p:cNvSpPr/>
+          <p:nvPr/>
+        </p:nvSpPr>
+        <p:spPr>
+          <a:xfrm>
+            <a:off x="2207520" y="2670840"/>
+            <a:ext cx="41400" cy="41760"/>
+          </a:xfrm>
+          <a:custGeom>
+            <a:avLst/>
+            <a:gdLst/>
+            <a:ahLst/>
+            <a:rect l="0" t="0" r="r" b="b"/>
+            <a:pathLst>
+              <a:path w="115" h="116">
+                <a:moveTo>
+                  <a:pt x="0" y="58"/>
+                </a:moveTo>
+                <a:cubicBezTo>
+                  <a:pt x="0" y="-19"/>
+                  <a:pt x="115" y="-19"/>
+                  <a:pt x="115" y="58"/>
+                </a:cubicBezTo>
+                <a:cubicBezTo>
+                  <a:pt x="115" y="135"/>
+                  <a:pt x="0" y="135"/>
+                  <a:pt x="0" y="58"/>
+                </a:cubicBezTo>
+                <a:close/>
+              </a:path>
+            </a:pathLst>
+          </a:custGeom>
+          <a:solidFill>
+            <a:srgbClr val="6E6E6E"/>
+          </a:solidFill>
+          <a:ln w="0">
+            <a:noFill/>
+          </a:ln>
+        </p:spPr>
+        <p:txBody>
+          <a:bodyPr lIns="0" tIns="0" rIns="0" bIns="0" anchor="t">
+            <a:noAutofit/>
+          </a:bodyPr>
+          <a:p>
+            <a:endParaRPr lang="en-US" sz="2400" b="0" u="none" strike="noStrike">
+              <a:solidFill>
+                <a:srgbClr val="FFFFFF"/>
+              </a:solidFill>
+              <a:effectLst/>
+              <a:uFillTx/>
+              <a:latin typeface="Times New Roman"/>
+            </a:endParaRPr>
+          </a:p>
+        </p:txBody>
+      </p:sp>
+      <p:sp>
+        <p:nvSpPr>
+          <p:cNvPr id="166" name=""/>
+          <p:cNvSpPr/>
+          <p:nvPr/>
+        </p:nvSpPr>
+        <p:spPr>
+          <a:xfrm>
+            <a:off x="2207520" y="2670840"/>
+            <a:ext cx="41400" cy="41760"/>
+          </a:xfrm>
+          <a:custGeom>
+            <a:avLst/>
+            <a:gdLst/>
+            <a:ahLst/>
+            <a:rect l="0" t="0" r="r" b="b"/>
+            <a:pathLst>
+              <a:path fill="none" w="115" h="116">
+                <a:moveTo>
+                  <a:pt x="115" y="58"/>
+                </a:moveTo>
+                <a:cubicBezTo>
+                  <a:pt x="115" y="135"/>
+                  <a:pt x="0" y="135"/>
+                  <a:pt x="0" y="58"/>
+                </a:cubicBezTo>
+                <a:cubicBezTo>
+                  <a:pt x="0" y="-19"/>
+                  <a:pt x="115" y="-19"/>
+                  <a:pt x="115" y="58"/>
+                </a:cubicBezTo>
+              </a:path>
+            </a:pathLst>
+          </a:custGeom>
+          <a:ln cap="rnd" w="5400">
+            <a:solidFill>
+              <a:srgbClr val="6E6E6E"/>
+            </a:solidFill>
+            <a:round/>
+          </a:ln>
+        </p:spPr>
+        <p:txBody>
+          <a:bodyPr lIns="2520" tIns="2520" rIns="2520" bIns="2520" anchor="t">
+            <a:noAutofit/>
+          </a:bodyPr>
+          <a:p>
+            <a:endParaRPr lang="en-US" sz="2400" b="0" u="none" strike="noStrike">
+              <a:solidFill>
+                <a:srgbClr val="000000"/>
+              </a:solidFill>
+              <a:effectLst/>
+              <a:uFillTx/>
+              <a:latin typeface="Times New Roman"/>
+            </a:endParaRPr>
+          </a:p>
+        </p:txBody>
+      </p:sp>
+      <p:sp>
+        <p:nvSpPr>
+          <p:cNvPr id="167" name=""/>
+          <p:cNvSpPr/>
+          <p:nvPr/>
+        </p:nvSpPr>
+        <p:spPr>
+          <a:xfrm>
+            <a:off x="2168640" y="2943360"/>
             <a:ext cx="41040" cy="41760"/>
           </a:xfrm>
           <a:custGeom>
@@ -8403,13 +8748,13 @@
       </p:sp>
       <p:sp>
         <p:nvSpPr>
-          <p:cNvPr id="162" name=""/>
-          <p:cNvSpPr/>
-          <p:nvPr/>
-        </p:nvSpPr>
-        <p:spPr>
-          <a:xfrm>
-            <a:off x="2192400" y="2580120"/>
+          <p:cNvPr id="168" name=""/>
+          <p:cNvSpPr/>
+          <p:nvPr/>
+        </p:nvSpPr>
+        <p:spPr>
+          <a:xfrm>
+            <a:off x="2168640" y="2943360"/>
             <a:ext cx="41040" cy="41760"/>
           </a:xfrm>
           <a:custGeom>
@@ -8460,13 +8805,1986 @@
       </p:sp>
       <p:sp>
         <p:nvSpPr>
-          <p:cNvPr id="163" name=""/>
-          <p:cNvSpPr/>
-          <p:nvPr/>
-        </p:nvSpPr>
-        <p:spPr>
-          <a:xfrm>
-            <a:off x="2211480" y="2761920"/>
+          <p:cNvPr id="169" name=""/>
+          <p:cNvSpPr/>
+          <p:nvPr/>
+        </p:nvSpPr>
+        <p:spPr>
+          <a:xfrm>
+            <a:off x="2182680" y="3125160"/>
+            <a:ext cx="41400" cy="41400"/>
+          </a:xfrm>
+          <a:custGeom>
+            <a:avLst/>
+            <a:gdLst/>
+            <a:ahLst/>
+            <a:rect l="0" t="0" r="r" b="b"/>
+            <a:pathLst>
+              <a:path w="115" h="115">
+                <a:moveTo>
+                  <a:pt x="0" y="57"/>
+                </a:moveTo>
+                <a:cubicBezTo>
+                  <a:pt x="0" y="-19"/>
+                  <a:pt x="115" y="-19"/>
+                  <a:pt x="115" y="57"/>
+                </a:cubicBezTo>
+                <a:cubicBezTo>
+                  <a:pt x="115" y="134"/>
+                  <a:pt x="0" y="134"/>
+                  <a:pt x="0" y="57"/>
+                </a:cubicBezTo>
+                <a:close/>
+              </a:path>
+            </a:pathLst>
+          </a:custGeom>
+          <a:solidFill>
+            <a:srgbClr val="A8A8A8"/>
+          </a:solidFill>
+          <a:ln w="0">
+            <a:noFill/>
+          </a:ln>
+        </p:spPr>
+        <p:txBody>
+          <a:bodyPr lIns="0" tIns="0" rIns="0" bIns="0" anchor="t">
+            <a:noAutofit/>
+          </a:bodyPr>
+          <a:p>
+            <a:endParaRPr lang="en-US" sz="2400" b="0" u="none" strike="noStrike">
+              <a:solidFill>
+                <a:srgbClr val="000000"/>
+              </a:solidFill>
+              <a:effectLst/>
+              <a:uFillTx/>
+              <a:latin typeface="Times New Roman"/>
+            </a:endParaRPr>
+          </a:p>
+        </p:txBody>
+      </p:sp>
+      <p:sp>
+        <p:nvSpPr>
+          <p:cNvPr id="170" name=""/>
+          <p:cNvSpPr/>
+          <p:nvPr/>
+        </p:nvSpPr>
+        <p:spPr>
+          <a:xfrm>
+            <a:off x="2182680" y="3125160"/>
+            <a:ext cx="41400" cy="41400"/>
+          </a:xfrm>
+          <a:custGeom>
+            <a:avLst/>
+            <a:gdLst/>
+            <a:ahLst/>
+            <a:rect l="0" t="0" r="r" b="b"/>
+            <a:pathLst>
+              <a:path fill="none" w="115" h="115">
+                <a:moveTo>
+                  <a:pt x="115" y="57"/>
+                </a:moveTo>
+                <a:cubicBezTo>
+                  <a:pt x="115" y="134"/>
+                  <a:pt x="0" y="134"/>
+                  <a:pt x="0" y="57"/>
+                </a:cubicBezTo>
+                <a:cubicBezTo>
+                  <a:pt x="0" y="-19"/>
+                  <a:pt x="115" y="-19"/>
+                  <a:pt x="115" y="57"/>
+                </a:cubicBezTo>
+              </a:path>
+            </a:pathLst>
+          </a:custGeom>
+          <a:ln cap="rnd" w="5400">
+            <a:solidFill>
+              <a:srgbClr val="A8A8A8"/>
+            </a:solidFill>
+            <a:round/>
+          </a:ln>
+        </p:spPr>
+        <p:txBody>
+          <a:bodyPr lIns="2520" tIns="2520" rIns="2520" bIns="2520" anchor="t">
+            <a:noAutofit/>
+          </a:bodyPr>
+          <a:p>
+            <a:endParaRPr lang="en-US" sz="2400" b="0" u="none" strike="noStrike">
+              <a:solidFill>
+                <a:srgbClr val="000000"/>
+              </a:solidFill>
+              <a:effectLst/>
+              <a:uFillTx/>
+              <a:latin typeface="Times New Roman"/>
+            </a:endParaRPr>
+          </a:p>
+        </p:txBody>
+      </p:sp>
+      <p:sp>
+        <p:nvSpPr>
+          <p:cNvPr id="171" name=""/>
+          <p:cNvSpPr/>
+          <p:nvPr/>
+        </p:nvSpPr>
+        <p:spPr>
+          <a:xfrm>
+            <a:off x="2168640" y="3034440"/>
+            <a:ext cx="41040" cy="41400"/>
+          </a:xfrm>
+          <a:custGeom>
+            <a:avLst/>
+            <a:gdLst/>
+            <a:ahLst/>
+            <a:rect l="0" t="0" r="r" b="b"/>
+            <a:pathLst>
+              <a:path w="114" h="115">
+                <a:moveTo>
+                  <a:pt x="0" y="58"/>
+                </a:moveTo>
+                <a:cubicBezTo>
+                  <a:pt x="0" y="-19"/>
+                  <a:pt x="114" y="-19"/>
+                  <a:pt x="114" y="58"/>
+                </a:cubicBezTo>
+                <a:cubicBezTo>
+                  <a:pt x="114" y="134"/>
+                  <a:pt x="0" y="134"/>
+                  <a:pt x="0" y="58"/>
+                </a:cubicBezTo>
+                <a:close/>
+              </a:path>
+            </a:pathLst>
+          </a:custGeom>
+          <a:solidFill>
+            <a:srgbClr val="6E6E6E"/>
+          </a:solidFill>
+          <a:ln w="0">
+            <a:noFill/>
+          </a:ln>
+        </p:spPr>
+        <p:txBody>
+          <a:bodyPr lIns="0" tIns="0" rIns="0" bIns="0" anchor="t">
+            <a:noAutofit/>
+          </a:bodyPr>
+          <a:p>
+            <a:endParaRPr lang="en-US" sz="2400" b="0" u="none" strike="noStrike">
+              <a:solidFill>
+                <a:srgbClr val="FFFFFF"/>
+              </a:solidFill>
+              <a:effectLst/>
+              <a:uFillTx/>
+              <a:latin typeface="Times New Roman"/>
+            </a:endParaRPr>
+          </a:p>
+        </p:txBody>
+      </p:sp>
+      <p:sp>
+        <p:nvSpPr>
+          <p:cNvPr id="172" name=""/>
+          <p:cNvSpPr/>
+          <p:nvPr/>
+        </p:nvSpPr>
+        <p:spPr>
+          <a:xfrm>
+            <a:off x="2168640" y="3034440"/>
+            <a:ext cx="41040" cy="41400"/>
+          </a:xfrm>
+          <a:custGeom>
+            <a:avLst/>
+            <a:gdLst/>
+            <a:ahLst/>
+            <a:rect l="0" t="0" r="r" b="b"/>
+            <a:pathLst>
+              <a:path fill="none" w="114" h="115">
+                <a:moveTo>
+                  <a:pt x="114" y="58"/>
+                </a:moveTo>
+                <a:cubicBezTo>
+                  <a:pt x="114" y="134"/>
+                  <a:pt x="0" y="134"/>
+                  <a:pt x="0" y="58"/>
+                </a:cubicBezTo>
+                <a:cubicBezTo>
+                  <a:pt x="0" y="-19"/>
+                  <a:pt x="114" y="-19"/>
+                  <a:pt x="114" y="58"/>
+                </a:cubicBezTo>
+              </a:path>
+            </a:pathLst>
+          </a:custGeom>
+          <a:ln cap="rnd" w="5400">
+            <a:solidFill>
+              <a:srgbClr val="6E6E6E"/>
+            </a:solidFill>
+            <a:round/>
+          </a:ln>
+        </p:spPr>
+        <p:txBody>
+          <a:bodyPr lIns="2520" tIns="2520" rIns="2520" bIns="2520" anchor="t">
+            <a:noAutofit/>
+          </a:bodyPr>
+          <a:p>
+            <a:endParaRPr lang="en-US" sz="2400" b="0" u="none" strike="noStrike">
+              <a:solidFill>
+                <a:srgbClr val="000000"/>
+              </a:solidFill>
+              <a:effectLst/>
+              <a:uFillTx/>
+              <a:latin typeface="Times New Roman"/>
+            </a:endParaRPr>
+          </a:p>
+        </p:txBody>
+      </p:sp>
+      <p:sp>
+        <p:nvSpPr>
+          <p:cNvPr id="173" name=""/>
+          <p:cNvSpPr/>
+          <p:nvPr/>
+        </p:nvSpPr>
+        <p:spPr>
+          <a:xfrm>
+            <a:off x="2244960" y="3306960"/>
+            <a:ext cx="41040" cy="41040"/>
+          </a:xfrm>
+          <a:custGeom>
+            <a:avLst/>
+            <a:gdLst/>
+            <a:ahLst/>
+            <a:rect l="0" t="0" r="r" b="b"/>
+            <a:pathLst>
+              <a:path w="114" h="114">
+                <a:moveTo>
+                  <a:pt x="0" y="58"/>
+                </a:moveTo>
+                <a:cubicBezTo>
+                  <a:pt x="0" y="-19"/>
+                  <a:pt x="114" y="-19"/>
+                  <a:pt x="114" y="58"/>
+                </a:cubicBezTo>
+                <a:cubicBezTo>
+                  <a:pt x="114" y="133"/>
+                  <a:pt x="0" y="133"/>
+                  <a:pt x="0" y="58"/>
+                </a:cubicBezTo>
+                <a:close/>
+              </a:path>
+            </a:pathLst>
+          </a:custGeom>
+          <a:solidFill>
+            <a:srgbClr val="D1552C"/>
+          </a:solidFill>
+          <a:ln w="0">
+            <a:noFill/>
+          </a:ln>
+        </p:spPr>
+        <p:txBody>
+          <a:bodyPr lIns="0" tIns="0" rIns="0" bIns="0" anchor="t">
+            <a:noAutofit/>
+          </a:bodyPr>
+          <a:p>
+            <a:endParaRPr lang="en-US" sz="2400" b="0" u="none" strike="noStrike">
+              <a:solidFill>
+                <a:srgbClr val="FFFFFF"/>
+              </a:solidFill>
+              <a:effectLst/>
+              <a:uFillTx/>
+              <a:latin typeface="Times New Roman"/>
+            </a:endParaRPr>
+          </a:p>
+        </p:txBody>
+      </p:sp>
+      <p:sp>
+        <p:nvSpPr>
+          <p:cNvPr id="174" name=""/>
+          <p:cNvSpPr/>
+          <p:nvPr/>
+        </p:nvSpPr>
+        <p:spPr>
+          <a:xfrm>
+            <a:off x="2244960" y="3306960"/>
+            <a:ext cx="41040" cy="41040"/>
+          </a:xfrm>
+          <a:custGeom>
+            <a:avLst/>
+            <a:gdLst/>
+            <a:ahLst/>
+            <a:rect l="0" t="0" r="r" b="b"/>
+            <a:pathLst>
+              <a:path fill="none" w="114" h="114">
+                <a:moveTo>
+                  <a:pt x="114" y="58"/>
+                </a:moveTo>
+                <a:cubicBezTo>
+                  <a:pt x="114" y="133"/>
+                  <a:pt x="0" y="133"/>
+                  <a:pt x="0" y="58"/>
+                </a:cubicBezTo>
+                <a:cubicBezTo>
+                  <a:pt x="0" y="-19"/>
+                  <a:pt x="114" y="-19"/>
+                  <a:pt x="114" y="58"/>
+                </a:cubicBezTo>
+              </a:path>
+            </a:pathLst>
+          </a:custGeom>
+          <a:ln cap="rnd" w="5400">
+            <a:solidFill>
+              <a:srgbClr val="D1552C"/>
+            </a:solidFill>
+            <a:round/>
+          </a:ln>
+        </p:spPr>
+        <p:txBody>
+          <a:bodyPr lIns="2520" tIns="2520" rIns="2520" bIns="2520" anchor="t">
+            <a:noAutofit/>
+          </a:bodyPr>
+          <a:p>
+            <a:endParaRPr lang="en-US" sz="2400" b="0" u="none" strike="noStrike">
+              <a:solidFill>
+                <a:srgbClr val="000000"/>
+              </a:solidFill>
+              <a:effectLst/>
+              <a:uFillTx/>
+              <a:latin typeface="Times New Roman"/>
+            </a:endParaRPr>
+          </a:p>
+        </p:txBody>
+      </p:sp>
+      <p:sp>
+        <p:nvSpPr>
+          <p:cNvPr id="175" name=""/>
+          <p:cNvSpPr/>
+          <p:nvPr/>
+        </p:nvSpPr>
+        <p:spPr>
+          <a:xfrm>
+            <a:off x="2273400" y="3488400"/>
+            <a:ext cx="41040" cy="41400"/>
+          </a:xfrm>
+          <a:custGeom>
+            <a:avLst/>
+            <a:gdLst/>
+            <a:ahLst/>
+            <a:rect l="0" t="0" r="r" b="b"/>
+            <a:pathLst>
+              <a:path w="114" h="115">
+                <a:moveTo>
+                  <a:pt x="0" y="57"/>
+                </a:moveTo>
+                <a:cubicBezTo>
+                  <a:pt x="0" y="-19"/>
+                  <a:pt x="114" y="-19"/>
+                  <a:pt x="114" y="57"/>
+                </a:cubicBezTo>
+                <a:cubicBezTo>
+                  <a:pt x="114" y="134"/>
+                  <a:pt x="0" y="134"/>
+                  <a:pt x="0" y="57"/>
+                </a:cubicBezTo>
+                <a:close/>
+              </a:path>
+            </a:pathLst>
+          </a:custGeom>
+          <a:solidFill>
+            <a:srgbClr val="A8A8A8"/>
+          </a:solidFill>
+          <a:ln w="0">
+            <a:noFill/>
+          </a:ln>
+        </p:spPr>
+        <p:txBody>
+          <a:bodyPr lIns="0" tIns="0" rIns="0" bIns="0" anchor="t">
+            <a:noAutofit/>
+          </a:bodyPr>
+          <a:p>
+            <a:endParaRPr lang="en-US" sz="2400" b="0" u="none" strike="noStrike">
+              <a:solidFill>
+                <a:srgbClr val="000000"/>
+              </a:solidFill>
+              <a:effectLst/>
+              <a:uFillTx/>
+              <a:latin typeface="Times New Roman"/>
+            </a:endParaRPr>
+          </a:p>
+        </p:txBody>
+      </p:sp>
+      <p:sp>
+        <p:nvSpPr>
+          <p:cNvPr id="176" name=""/>
+          <p:cNvSpPr/>
+          <p:nvPr/>
+        </p:nvSpPr>
+        <p:spPr>
+          <a:xfrm>
+            <a:off x="2273400" y="3488400"/>
+            <a:ext cx="41040" cy="41400"/>
+          </a:xfrm>
+          <a:custGeom>
+            <a:avLst/>
+            <a:gdLst/>
+            <a:ahLst/>
+            <a:rect l="0" t="0" r="r" b="b"/>
+            <a:pathLst>
+              <a:path fill="none" w="114" h="115">
+                <a:moveTo>
+                  <a:pt x="114" y="57"/>
+                </a:moveTo>
+                <a:cubicBezTo>
+                  <a:pt x="114" y="134"/>
+                  <a:pt x="0" y="134"/>
+                  <a:pt x="0" y="57"/>
+                </a:cubicBezTo>
+                <a:cubicBezTo>
+                  <a:pt x="0" y="-19"/>
+                  <a:pt x="114" y="-19"/>
+                  <a:pt x="114" y="57"/>
+                </a:cubicBezTo>
+              </a:path>
+            </a:pathLst>
+          </a:custGeom>
+          <a:ln cap="rnd" w="5400">
+            <a:solidFill>
+              <a:srgbClr val="A8A8A8"/>
+            </a:solidFill>
+            <a:round/>
+          </a:ln>
+        </p:spPr>
+        <p:txBody>
+          <a:bodyPr lIns="2520" tIns="2520" rIns="2520" bIns="2520" anchor="t">
+            <a:noAutofit/>
+          </a:bodyPr>
+          <a:p>
+            <a:endParaRPr lang="en-US" sz="2400" b="0" u="none" strike="noStrike">
+              <a:solidFill>
+                <a:srgbClr val="000000"/>
+              </a:solidFill>
+              <a:effectLst/>
+              <a:uFillTx/>
+              <a:latin typeface="Times New Roman"/>
+            </a:endParaRPr>
+          </a:p>
+        </p:txBody>
+      </p:sp>
+      <p:sp>
+        <p:nvSpPr>
+          <p:cNvPr id="177" name=""/>
+          <p:cNvSpPr/>
+          <p:nvPr/>
+        </p:nvSpPr>
+        <p:spPr>
+          <a:xfrm>
+            <a:off x="2252880" y="3397680"/>
+            <a:ext cx="41400" cy="41760"/>
+          </a:xfrm>
+          <a:custGeom>
+            <a:avLst/>
+            <a:gdLst/>
+            <a:ahLst/>
+            <a:rect l="0" t="0" r="r" b="b"/>
+            <a:pathLst>
+              <a:path w="115" h="116">
+                <a:moveTo>
+                  <a:pt x="0" y="58"/>
+                </a:moveTo>
+                <a:cubicBezTo>
+                  <a:pt x="0" y="-19"/>
+                  <a:pt x="115" y="-19"/>
+                  <a:pt x="115" y="58"/>
+                </a:cubicBezTo>
+                <a:cubicBezTo>
+                  <a:pt x="115" y="135"/>
+                  <a:pt x="0" y="135"/>
+                  <a:pt x="0" y="58"/>
+                </a:cubicBezTo>
+                <a:close/>
+              </a:path>
+            </a:pathLst>
+          </a:custGeom>
+          <a:solidFill>
+            <a:srgbClr val="6E6E6E"/>
+          </a:solidFill>
+          <a:ln w="0">
+            <a:noFill/>
+          </a:ln>
+        </p:spPr>
+        <p:txBody>
+          <a:bodyPr lIns="0" tIns="0" rIns="0" bIns="0" anchor="t">
+            <a:noAutofit/>
+          </a:bodyPr>
+          <a:p>
+            <a:endParaRPr lang="en-US" sz="2400" b="0" u="none" strike="noStrike">
+              <a:solidFill>
+                <a:srgbClr val="FFFFFF"/>
+              </a:solidFill>
+              <a:effectLst/>
+              <a:uFillTx/>
+              <a:latin typeface="Times New Roman"/>
+            </a:endParaRPr>
+          </a:p>
+        </p:txBody>
+      </p:sp>
+      <p:sp>
+        <p:nvSpPr>
+          <p:cNvPr id="178" name=""/>
+          <p:cNvSpPr/>
+          <p:nvPr/>
+        </p:nvSpPr>
+        <p:spPr>
+          <a:xfrm>
+            <a:off x="2252880" y="3397680"/>
+            <a:ext cx="41400" cy="41760"/>
+          </a:xfrm>
+          <a:custGeom>
+            <a:avLst/>
+            <a:gdLst/>
+            <a:ahLst/>
+            <a:rect l="0" t="0" r="r" b="b"/>
+            <a:pathLst>
+              <a:path fill="none" w="115" h="116">
+                <a:moveTo>
+                  <a:pt x="115" y="58"/>
+                </a:moveTo>
+                <a:cubicBezTo>
+                  <a:pt x="115" y="135"/>
+                  <a:pt x="0" y="135"/>
+                  <a:pt x="0" y="58"/>
+                </a:cubicBezTo>
+                <a:cubicBezTo>
+                  <a:pt x="0" y="-19"/>
+                  <a:pt x="115" y="-19"/>
+                  <a:pt x="115" y="58"/>
+                </a:cubicBezTo>
+              </a:path>
+            </a:pathLst>
+          </a:custGeom>
+          <a:ln cap="rnd" w="5400">
+            <a:solidFill>
+              <a:srgbClr val="6E6E6E"/>
+            </a:solidFill>
+            <a:round/>
+          </a:ln>
+        </p:spPr>
+        <p:txBody>
+          <a:bodyPr lIns="2520" tIns="2520" rIns="2520" bIns="2520" anchor="t">
+            <a:noAutofit/>
+          </a:bodyPr>
+          <a:p>
+            <a:endParaRPr lang="en-US" sz="2400" b="0" u="none" strike="noStrike">
+              <a:solidFill>
+                <a:srgbClr val="000000"/>
+              </a:solidFill>
+              <a:effectLst/>
+              <a:uFillTx/>
+              <a:latin typeface="Times New Roman"/>
+            </a:endParaRPr>
+          </a:p>
+        </p:txBody>
+      </p:sp>
+      <p:sp>
+        <p:nvSpPr>
+          <p:cNvPr id="179" name=""/>
+          <p:cNvSpPr/>
+          <p:nvPr/>
+        </p:nvSpPr>
+        <p:spPr>
+          <a:xfrm>
+            <a:off x="2083320" y="3670200"/>
+            <a:ext cx="41400" cy="41400"/>
+          </a:xfrm>
+          <a:custGeom>
+            <a:avLst/>
+            <a:gdLst/>
+            <a:ahLst/>
+            <a:rect l="0" t="0" r="r" b="b"/>
+            <a:pathLst>
+              <a:path w="115" h="115">
+                <a:moveTo>
+                  <a:pt x="0" y="58"/>
+                </a:moveTo>
+                <a:cubicBezTo>
+                  <a:pt x="0" y="-19"/>
+                  <a:pt x="115" y="-19"/>
+                  <a:pt x="115" y="58"/>
+                </a:cubicBezTo>
+                <a:cubicBezTo>
+                  <a:pt x="115" y="134"/>
+                  <a:pt x="0" y="134"/>
+                  <a:pt x="0" y="58"/>
+                </a:cubicBezTo>
+                <a:close/>
+              </a:path>
+            </a:pathLst>
+          </a:custGeom>
+          <a:solidFill>
+            <a:srgbClr val="D1552C"/>
+          </a:solidFill>
+          <a:ln w="0">
+            <a:noFill/>
+          </a:ln>
+        </p:spPr>
+        <p:txBody>
+          <a:bodyPr lIns="0" tIns="0" rIns="0" bIns="0" anchor="t">
+            <a:noAutofit/>
+          </a:bodyPr>
+          <a:p>
+            <a:endParaRPr lang="en-US" sz="2400" b="0" u="none" strike="noStrike">
+              <a:solidFill>
+                <a:srgbClr val="FFFFFF"/>
+              </a:solidFill>
+              <a:effectLst/>
+              <a:uFillTx/>
+              <a:latin typeface="Times New Roman"/>
+            </a:endParaRPr>
+          </a:p>
+        </p:txBody>
+      </p:sp>
+      <p:sp>
+        <p:nvSpPr>
+          <p:cNvPr id="180" name=""/>
+          <p:cNvSpPr/>
+          <p:nvPr/>
+        </p:nvSpPr>
+        <p:spPr>
+          <a:xfrm>
+            <a:off x="2083320" y="3670200"/>
+            <a:ext cx="41400" cy="41400"/>
+          </a:xfrm>
+          <a:custGeom>
+            <a:avLst/>
+            <a:gdLst/>
+            <a:ahLst/>
+            <a:rect l="0" t="0" r="r" b="b"/>
+            <a:pathLst>
+              <a:path fill="none" w="115" h="115">
+                <a:moveTo>
+                  <a:pt x="115" y="58"/>
+                </a:moveTo>
+                <a:cubicBezTo>
+                  <a:pt x="115" y="134"/>
+                  <a:pt x="0" y="134"/>
+                  <a:pt x="0" y="58"/>
+                </a:cubicBezTo>
+                <a:cubicBezTo>
+                  <a:pt x="0" y="-19"/>
+                  <a:pt x="115" y="-19"/>
+                  <a:pt x="115" y="58"/>
+                </a:cubicBezTo>
+              </a:path>
+            </a:pathLst>
+          </a:custGeom>
+          <a:ln cap="rnd" w="5400">
+            <a:solidFill>
+              <a:srgbClr val="D1552C"/>
+            </a:solidFill>
+            <a:round/>
+          </a:ln>
+        </p:spPr>
+        <p:txBody>
+          <a:bodyPr lIns="2520" tIns="2520" rIns="2520" bIns="2520" anchor="t">
+            <a:noAutofit/>
+          </a:bodyPr>
+          <a:p>
+            <a:endParaRPr lang="en-US" sz="2400" b="0" u="none" strike="noStrike">
+              <a:solidFill>
+                <a:srgbClr val="000000"/>
+              </a:solidFill>
+              <a:effectLst/>
+              <a:uFillTx/>
+              <a:latin typeface="Times New Roman"/>
+            </a:endParaRPr>
+          </a:p>
+        </p:txBody>
+      </p:sp>
+      <p:sp>
+        <p:nvSpPr>
+          <p:cNvPr id="181" name=""/>
+          <p:cNvSpPr/>
+          <p:nvPr/>
+        </p:nvSpPr>
+        <p:spPr>
+          <a:xfrm>
+            <a:off x="2103120" y="3852000"/>
+            <a:ext cx="41040" cy="41040"/>
+          </a:xfrm>
+          <a:custGeom>
+            <a:avLst/>
+            <a:gdLst/>
+            <a:ahLst/>
+            <a:rect l="0" t="0" r="r" b="b"/>
+            <a:pathLst>
+              <a:path w="114" h="114">
+                <a:moveTo>
+                  <a:pt x="0" y="56"/>
+                </a:moveTo>
+                <a:cubicBezTo>
+                  <a:pt x="0" y="-19"/>
+                  <a:pt x="114" y="-19"/>
+                  <a:pt x="114" y="56"/>
+                </a:cubicBezTo>
+                <a:cubicBezTo>
+                  <a:pt x="114" y="133"/>
+                  <a:pt x="0" y="133"/>
+                  <a:pt x="0" y="56"/>
+                </a:cubicBezTo>
+                <a:close/>
+              </a:path>
+            </a:pathLst>
+          </a:custGeom>
+          <a:solidFill>
+            <a:srgbClr val="A8A8A8"/>
+          </a:solidFill>
+          <a:ln w="0">
+            <a:noFill/>
+          </a:ln>
+        </p:spPr>
+        <p:txBody>
+          <a:bodyPr lIns="0" tIns="0" rIns="0" bIns="0" anchor="t">
+            <a:noAutofit/>
+          </a:bodyPr>
+          <a:p>
+            <a:endParaRPr lang="en-US" sz="2400" b="0" u="none" strike="noStrike">
+              <a:solidFill>
+                <a:srgbClr val="000000"/>
+              </a:solidFill>
+              <a:effectLst/>
+              <a:uFillTx/>
+              <a:latin typeface="Times New Roman"/>
+            </a:endParaRPr>
+          </a:p>
+        </p:txBody>
+      </p:sp>
+      <p:sp>
+        <p:nvSpPr>
+          <p:cNvPr id="182" name=""/>
+          <p:cNvSpPr/>
+          <p:nvPr/>
+        </p:nvSpPr>
+        <p:spPr>
+          <a:xfrm>
+            <a:off x="2103120" y="3852000"/>
+            <a:ext cx="41040" cy="41040"/>
+          </a:xfrm>
+          <a:custGeom>
+            <a:avLst/>
+            <a:gdLst/>
+            <a:ahLst/>
+            <a:rect l="0" t="0" r="r" b="b"/>
+            <a:pathLst>
+              <a:path fill="none" w="114" h="114">
+                <a:moveTo>
+                  <a:pt x="114" y="56"/>
+                </a:moveTo>
+                <a:cubicBezTo>
+                  <a:pt x="114" y="133"/>
+                  <a:pt x="0" y="133"/>
+                  <a:pt x="0" y="56"/>
+                </a:cubicBezTo>
+                <a:cubicBezTo>
+                  <a:pt x="0" y="-19"/>
+                  <a:pt x="114" y="-19"/>
+                  <a:pt x="114" y="56"/>
+                </a:cubicBezTo>
+              </a:path>
+            </a:pathLst>
+          </a:custGeom>
+          <a:ln cap="rnd" w="5400">
+            <a:solidFill>
+              <a:srgbClr val="A8A8A8"/>
+            </a:solidFill>
+            <a:round/>
+          </a:ln>
+        </p:spPr>
+        <p:txBody>
+          <a:bodyPr lIns="2520" tIns="2520" rIns="2520" bIns="2520" anchor="t">
+            <a:noAutofit/>
+          </a:bodyPr>
+          <a:p>
+            <a:endParaRPr lang="en-US" sz="2400" b="0" u="none" strike="noStrike">
+              <a:solidFill>
+                <a:srgbClr val="000000"/>
+              </a:solidFill>
+              <a:effectLst/>
+              <a:uFillTx/>
+              <a:latin typeface="Times New Roman"/>
+            </a:endParaRPr>
+          </a:p>
+        </p:txBody>
+      </p:sp>
+      <p:sp>
+        <p:nvSpPr>
+          <p:cNvPr id="183" name=""/>
+          <p:cNvSpPr/>
+          <p:nvPr/>
+        </p:nvSpPr>
+        <p:spPr>
+          <a:xfrm>
+            <a:off x="2080800" y="3760920"/>
+            <a:ext cx="41040" cy="41760"/>
+          </a:xfrm>
+          <a:custGeom>
+            <a:avLst/>
+            <a:gdLst/>
+            <a:ahLst/>
+            <a:rect l="0" t="0" r="r" b="b"/>
+            <a:pathLst>
+              <a:path w="114" h="116">
+                <a:moveTo>
+                  <a:pt x="0" y="58"/>
+                </a:moveTo>
+                <a:cubicBezTo>
+                  <a:pt x="0" y="-19"/>
+                  <a:pt x="114" y="-19"/>
+                  <a:pt x="114" y="58"/>
+                </a:cubicBezTo>
+                <a:cubicBezTo>
+                  <a:pt x="114" y="135"/>
+                  <a:pt x="0" y="135"/>
+                  <a:pt x="0" y="58"/>
+                </a:cubicBezTo>
+                <a:close/>
+              </a:path>
+            </a:pathLst>
+          </a:custGeom>
+          <a:solidFill>
+            <a:srgbClr val="6E6E6E"/>
+          </a:solidFill>
+          <a:ln w="0">
+            <a:noFill/>
+          </a:ln>
+        </p:spPr>
+        <p:txBody>
+          <a:bodyPr lIns="0" tIns="0" rIns="0" bIns="0" anchor="t">
+            <a:noAutofit/>
+          </a:bodyPr>
+          <a:p>
+            <a:endParaRPr lang="en-US" sz="2400" b="0" u="none" strike="noStrike">
+              <a:solidFill>
+                <a:srgbClr val="FFFFFF"/>
+              </a:solidFill>
+              <a:effectLst/>
+              <a:uFillTx/>
+              <a:latin typeface="Times New Roman"/>
+            </a:endParaRPr>
+          </a:p>
+        </p:txBody>
+      </p:sp>
+      <p:sp>
+        <p:nvSpPr>
+          <p:cNvPr id="184" name=""/>
+          <p:cNvSpPr/>
+          <p:nvPr/>
+        </p:nvSpPr>
+        <p:spPr>
+          <a:xfrm>
+            <a:off x="2080800" y="3760920"/>
+            <a:ext cx="41040" cy="41760"/>
+          </a:xfrm>
+          <a:custGeom>
+            <a:avLst/>
+            <a:gdLst/>
+            <a:ahLst/>
+            <a:rect l="0" t="0" r="r" b="b"/>
+            <a:pathLst>
+              <a:path fill="none" w="114" h="116">
+                <a:moveTo>
+                  <a:pt x="114" y="58"/>
+                </a:moveTo>
+                <a:cubicBezTo>
+                  <a:pt x="114" y="135"/>
+                  <a:pt x="0" y="135"/>
+                  <a:pt x="0" y="58"/>
+                </a:cubicBezTo>
+                <a:cubicBezTo>
+                  <a:pt x="0" y="-19"/>
+                  <a:pt x="114" y="-19"/>
+                  <a:pt x="114" y="58"/>
+                </a:cubicBezTo>
+              </a:path>
+            </a:pathLst>
+          </a:custGeom>
+          <a:ln cap="rnd" w="5400">
+            <a:solidFill>
+              <a:srgbClr val="6E6E6E"/>
+            </a:solidFill>
+            <a:round/>
+          </a:ln>
+        </p:spPr>
+        <p:txBody>
+          <a:bodyPr lIns="2520" tIns="2520" rIns="2520" bIns="2520" anchor="t">
+            <a:noAutofit/>
+          </a:bodyPr>
+          <a:p>
+            <a:endParaRPr lang="en-US" sz="2400" b="0" u="none" strike="noStrike">
+              <a:solidFill>
+                <a:srgbClr val="000000"/>
+              </a:solidFill>
+              <a:effectLst/>
+              <a:uFillTx/>
+              <a:latin typeface="Times New Roman"/>
+            </a:endParaRPr>
+          </a:p>
+        </p:txBody>
+      </p:sp>
+      <p:sp>
+        <p:nvSpPr>
+          <p:cNvPr id="185" name=""/>
+          <p:cNvSpPr txBox="1"/>
+          <p:nvPr/>
+        </p:nvSpPr>
+        <p:spPr>
+          <a:xfrm>
+            <a:off x="3685320" y="12600"/>
+            <a:ext cx="101160" cy="114840"/>
+          </a:xfrm>
+          <a:prstGeom prst="rect">
+            <a:avLst/>
+          </a:prstGeom>
+          <a:noFill/>
+          <a:ln w="0">
+            <a:noFill/>
+          </a:ln>
+        </p:spPr>
+        <p:txBody>
+          <a:bodyPr wrap="none" lIns="0" tIns="0" rIns="0" bIns="0" anchor="t">
+            <a:spAutoFit/>
+          </a:bodyPr>
+          <a:p>
+            <a:pPr/>
+            <a:r>
+              <a:rPr lang="en-US" sz="800" b="1" u="none" strike="noStrike">
+                <a:solidFill>
+                  <a:srgbClr val="1A1A1A"/>
+                </a:solidFill>
+                <a:effectLst/>
+                <a:uFillTx/>
+                <a:latin typeface="Arial"/>
+                <a:ea typeface="Arial"/>
+              </a:rPr>
+              <a:t>b</a:t>
+            </a:r>
+            <a:endParaRPr lang="en-US" sz="800" b="0" u="none" strike="noStrike">
+              <a:solidFill>
+                <a:srgbClr val="000000"/>
+              </a:solidFill>
+              <a:effectLst/>
+              <a:uFillTx/>
+              <a:latin typeface="Times New Roman"/>
+            </a:endParaRPr>
+          </a:p>
+        </p:txBody>
+      </p:sp>
+      <p:sp>
+        <p:nvSpPr>
+          <p:cNvPr id="186" name=""/>
+          <p:cNvSpPr txBox="1"/>
+          <p:nvPr/>
+        </p:nvSpPr>
+        <p:spPr>
+          <a:xfrm>
+            <a:off x="2827800" y="2562840"/>
+            <a:ext cx="659160" cy="79560"/>
+          </a:xfrm>
+          <a:prstGeom prst="rect">
+            <a:avLst/>
+          </a:prstGeom>
+          <a:noFill/>
+          <a:ln w="0">
+            <a:noFill/>
+          </a:ln>
+        </p:spPr>
+        <p:txBody>
+          <a:bodyPr wrap="none" lIns="0" tIns="0" rIns="0" bIns="0" anchor="t">
+            <a:spAutoFit/>
+          </a:bodyPr>
+          <a:p>
+            <a:pPr/>
+            <a:r>
+              <a:rPr lang="en-US" sz="550" b="0" u="none" strike="noStrike">
+                <a:solidFill>
+                  <a:srgbClr val="D1552C"/>
+                </a:solidFill>
+                <a:effectLst/>
+                <a:uFillTx/>
+                <a:latin typeface="Arial"/>
+                <a:ea typeface="Arial"/>
+              </a:rPr>
+              <a:t>Coverage gap (main)</a:t>
+            </a:r>
+            <a:endParaRPr lang="en-US" sz="550" b="0" u="none" strike="noStrike">
+              <a:solidFill>
+                <a:srgbClr val="000000"/>
+              </a:solidFill>
+              <a:effectLst/>
+              <a:uFillTx/>
+              <a:latin typeface="Times New Roman"/>
+            </a:endParaRPr>
+          </a:p>
+        </p:txBody>
+      </p:sp>
+      <p:sp>
+        <p:nvSpPr>
+          <p:cNvPr id="187" name=""/>
+          <p:cNvSpPr txBox="1"/>
+          <p:nvPr/>
+        </p:nvSpPr>
+        <p:spPr>
+          <a:xfrm>
+            <a:off x="2846520" y="2744280"/>
+            <a:ext cx="452520" cy="79560"/>
+          </a:xfrm>
+          <a:prstGeom prst="rect">
+            <a:avLst/>
+          </a:prstGeom>
+          <a:noFill/>
+          <a:ln w="0">
+            <a:noFill/>
+          </a:ln>
+        </p:spPr>
+        <p:txBody>
+          <a:bodyPr wrap="none" lIns="0" tIns="0" rIns="0" bIns="0" anchor="t">
+            <a:spAutoFit/>
+          </a:bodyPr>
+          <a:p>
+            <a:pPr/>
+            <a:r>
+              <a:rPr lang="en-US" sz="550" b="0" u="none" strike="noStrike">
+                <a:solidFill>
+                  <a:srgbClr val="8C8C8C"/>
+                </a:solidFill>
+                <a:effectLst/>
+                <a:uFillTx/>
+                <a:latin typeface="Arial"/>
+                <a:ea typeface="Arial"/>
+              </a:rPr>
+              <a:t>Zero-filled (v1)</a:t>
+            </a:r>
+            <a:endParaRPr lang="en-US" sz="550" b="0" u="none" strike="noStrike">
+              <a:solidFill>
+                <a:srgbClr val="000000"/>
+              </a:solidFill>
+              <a:effectLst/>
+              <a:uFillTx/>
+              <a:latin typeface="Times New Roman"/>
+            </a:endParaRPr>
+          </a:p>
+        </p:txBody>
+      </p:sp>
+      <p:sp>
+        <p:nvSpPr>
+          <p:cNvPr id="188" name=""/>
+          <p:cNvSpPr/>
+          <p:nvPr/>
+        </p:nvSpPr>
+        <p:spPr>
+          <a:xfrm>
+            <a:off x="3735720" y="2502360"/>
+            <a:ext cx="2754360" cy="1468440"/>
+          </a:xfrm>
+          <a:custGeom>
+            <a:avLst/>
+            <a:gdLst/>
+            <a:ahLst/>
+            <a:rect l="0" t="0" r="r" b="b"/>
+            <a:pathLst>
+              <a:path w="7651" h="4079">
+                <a:moveTo>
+                  <a:pt x="0" y="0"/>
+                </a:moveTo>
+                <a:lnTo>
+                  <a:pt x="7651" y="0"/>
+                </a:lnTo>
+                <a:lnTo>
+                  <a:pt x="7651" y="4079"/>
+                </a:lnTo>
+                <a:lnTo>
+                  <a:pt x="0" y="4079"/>
+                </a:lnTo>
+                <a:lnTo>
+                  <a:pt x="0" y="0"/>
+                </a:lnTo>
+                <a:close/>
+              </a:path>
+            </a:pathLst>
+          </a:custGeom>
+          <a:solidFill>
+            <a:srgbClr val="FFFFFF"/>
+          </a:solidFill>
+          <a:ln w="0">
+            <a:noFill/>
+          </a:ln>
+        </p:spPr>
+        <p:txBody>
+          <a:bodyPr lIns="0" tIns="0" rIns="0" bIns="0" anchor="t">
+            <a:noAutofit/>
+          </a:bodyPr>
+          <a:p>
+            <a:endParaRPr lang="en-US" sz="2400" b="0" u="none" strike="noStrike">
+              <a:solidFill>
+                <a:srgbClr val="000000"/>
+              </a:solidFill>
+              <a:effectLst/>
+              <a:uFillTx/>
+              <a:latin typeface="Times New Roman"/>
+            </a:endParaRPr>
+          </a:p>
+        </p:txBody>
+      </p:sp>
+      <p:sp>
+        <p:nvSpPr>
+          <p:cNvPr id="189" name=""/>
+          <p:cNvSpPr/>
+          <p:nvPr/>
+        </p:nvSpPr>
+        <p:spPr>
+          <a:xfrm flipV="1">
+            <a:off x="3873600" y="2502360"/>
+            <a:ext cx="0" cy="1468080"/>
+          </a:xfrm>
+          <a:prstGeom prst="line">
+            <a:avLst/>
+          </a:prstGeom>
+          <a:ln w="5400">
+            <a:solidFill>
+              <a:srgbClr val="ECECEC"/>
+            </a:solidFill>
+            <a:round/>
+          </a:ln>
+        </p:spPr>
+        <p:style>
+          <a:lnRef idx="0"/>
+          <a:fillRef idx="0"/>
+          <a:effectRef idx="0"/>
+          <a:fontRef idx="minor"/>
+        </p:style>
+        <p:txBody>
+          <a:bodyPr lIns="2520" tIns="2520" rIns="2520" bIns="2520" anchor="t">
+            <a:noAutofit/>
+          </a:bodyPr>
+          <a:p>
+            <a:endParaRPr lang="en-US" sz="2400" b="0" u="none" strike="noStrike">
+              <a:solidFill>
+                <a:srgbClr val="000000"/>
+              </a:solidFill>
+              <a:effectLst/>
+              <a:uFillTx/>
+              <a:latin typeface="Times New Roman"/>
+            </a:endParaRPr>
+          </a:p>
+        </p:txBody>
+      </p:sp>
+      <p:sp>
+        <p:nvSpPr>
+          <p:cNvPr id="190" name=""/>
+          <p:cNvSpPr/>
+          <p:nvPr/>
+        </p:nvSpPr>
+        <p:spPr>
+          <a:xfrm flipV="1">
+            <a:off x="4561920" y="2502360"/>
+            <a:ext cx="0" cy="1468080"/>
+          </a:xfrm>
+          <a:prstGeom prst="line">
+            <a:avLst/>
+          </a:prstGeom>
+          <a:ln w="5400">
+            <a:solidFill>
+              <a:srgbClr val="ECECEC"/>
+            </a:solidFill>
+            <a:round/>
+          </a:ln>
+        </p:spPr>
+        <p:style>
+          <a:lnRef idx="0"/>
+          <a:fillRef idx="0"/>
+          <a:effectRef idx="0"/>
+          <a:fontRef idx="minor"/>
+        </p:style>
+        <p:txBody>
+          <a:bodyPr lIns="2520" tIns="2520" rIns="2520" bIns="2520" anchor="t">
+            <a:noAutofit/>
+          </a:bodyPr>
+          <a:p>
+            <a:endParaRPr lang="en-US" sz="2400" b="0" u="none" strike="noStrike">
+              <a:solidFill>
+                <a:srgbClr val="000000"/>
+              </a:solidFill>
+              <a:effectLst/>
+              <a:uFillTx/>
+              <a:latin typeface="Times New Roman"/>
+            </a:endParaRPr>
+          </a:p>
+        </p:txBody>
+      </p:sp>
+      <p:sp>
+        <p:nvSpPr>
+          <p:cNvPr id="191" name=""/>
+          <p:cNvSpPr/>
+          <p:nvPr/>
+        </p:nvSpPr>
+        <p:spPr>
+          <a:xfrm flipV="1">
+            <a:off x="5250600" y="2502360"/>
+            <a:ext cx="0" cy="1468080"/>
+          </a:xfrm>
+          <a:prstGeom prst="line">
+            <a:avLst/>
+          </a:prstGeom>
+          <a:ln w="5400">
+            <a:solidFill>
+              <a:srgbClr val="ECECEC"/>
+            </a:solidFill>
+            <a:round/>
+          </a:ln>
+        </p:spPr>
+        <p:style>
+          <a:lnRef idx="0"/>
+          <a:fillRef idx="0"/>
+          <a:effectRef idx="0"/>
+          <a:fontRef idx="minor"/>
+        </p:style>
+        <p:txBody>
+          <a:bodyPr lIns="2520" tIns="2520" rIns="2520" bIns="2520" anchor="t">
+            <a:noAutofit/>
+          </a:bodyPr>
+          <a:p>
+            <a:endParaRPr lang="en-US" sz="2400" b="0" u="none" strike="noStrike">
+              <a:solidFill>
+                <a:srgbClr val="000000"/>
+              </a:solidFill>
+              <a:effectLst/>
+              <a:uFillTx/>
+              <a:latin typeface="Times New Roman"/>
+            </a:endParaRPr>
+          </a:p>
+        </p:txBody>
+      </p:sp>
+      <p:sp>
+        <p:nvSpPr>
+          <p:cNvPr id="192" name=""/>
+          <p:cNvSpPr/>
+          <p:nvPr/>
+        </p:nvSpPr>
+        <p:spPr>
+          <a:xfrm flipV="1">
+            <a:off x="5938920" y="2502360"/>
+            <a:ext cx="0" cy="1468080"/>
+          </a:xfrm>
+          <a:prstGeom prst="line">
+            <a:avLst/>
+          </a:prstGeom>
+          <a:ln w="5400">
+            <a:solidFill>
+              <a:srgbClr val="ECECEC"/>
+            </a:solidFill>
+            <a:round/>
+          </a:ln>
+        </p:spPr>
+        <p:style>
+          <a:lnRef idx="0"/>
+          <a:fillRef idx="0"/>
+          <a:effectRef idx="0"/>
+          <a:fontRef idx="minor"/>
+        </p:style>
+        <p:txBody>
+          <a:bodyPr lIns="2520" tIns="2520" rIns="2520" bIns="2520" anchor="t">
+            <a:noAutofit/>
+          </a:bodyPr>
+          <a:p>
+            <a:endParaRPr lang="en-US" sz="2400" b="0" u="none" strike="noStrike">
+              <a:solidFill>
+                <a:srgbClr val="000000"/>
+              </a:solidFill>
+              <a:effectLst/>
+              <a:uFillTx/>
+              <a:latin typeface="Times New Roman"/>
+            </a:endParaRPr>
+          </a:p>
+        </p:txBody>
+      </p:sp>
+      <p:sp>
+        <p:nvSpPr>
+          <p:cNvPr id="193" name=""/>
+          <p:cNvSpPr/>
+          <p:nvPr/>
+        </p:nvSpPr>
+        <p:spPr>
+          <a:xfrm flipV="1">
+            <a:off x="3873600" y="2502360"/>
+            <a:ext cx="0" cy="1468080"/>
+          </a:xfrm>
+          <a:prstGeom prst="line">
+            <a:avLst/>
+          </a:prstGeom>
+          <a:ln w="6480">
+            <a:solidFill>
+              <a:srgbClr val="9A9A9A"/>
+            </a:solidFill>
+            <a:custDash>
+              <a:ds d="288889" sp="288889"/>
+            </a:custDash>
+            <a:round/>
+          </a:ln>
+        </p:spPr>
+        <p:style>
+          <a:lnRef idx="0"/>
+          <a:fillRef idx="0"/>
+          <a:effectRef idx="0"/>
+          <a:fontRef idx="minor"/>
+        </p:style>
+        <p:txBody>
+          <a:bodyPr lIns="3240" tIns="3240" rIns="3240" bIns="3240" anchor="t">
+            <a:noAutofit/>
+          </a:bodyPr>
+          <a:p>
+            <a:endParaRPr lang="en-US" sz="2400" b="0" u="none" strike="noStrike">
+              <a:solidFill>
+                <a:srgbClr val="000000"/>
+              </a:solidFill>
+              <a:effectLst/>
+              <a:uFillTx/>
+              <a:latin typeface="Times New Roman"/>
+            </a:endParaRPr>
+          </a:p>
+        </p:txBody>
+      </p:sp>
+      <p:sp>
+        <p:nvSpPr>
+          <p:cNvPr id="194" name=""/>
+          <p:cNvSpPr/>
+          <p:nvPr/>
+        </p:nvSpPr>
+        <p:spPr>
+          <a:xfrm>
+            <a:off x="4796640" y="2600640"/>
+            <a:ext cx="1180440" cy="0"/>
+          </a:xfrm>
+          <a:prstGeom prst="line">
+            <a:avLst/>
+          </a:prstGeom>
+          <a:ln w="10800">
+            <a:solidFill>
+              <a:srgbClr val="1F5F9E"/>
+            </a:solidFill>
+            <a:round/>
+          </a:ln>
+        </p:spPr>
+        <p:style>
+          <a:lnRef idx="0"/>
+          <a:fillRef idx="0"/>
+          <a:effectRef idx="0"/>
+          <a:fontRef idx="minor"/>
+        </p:style>
+        <p:txBody>
+          <a:bodyPr lIns="5400" tIns="-5400" rIns="5400" bIns="-5400" anchor="t">
+            <a:noAutofit/>
+          </a:bodyPr>
+          <a:p>
+            <a:endParaRPr lang="en-US" sz="2400" b="0" u="none" strike="noStrike">
+              <a:solidFill>
+                <a:srgbClr val="000000"/>
+              </a:solidFill>
+              <a:effectLst/>
+              <a:uFillTx/>
+              <a:latin typeface="Times New Roman"/>
+            </a:endParaRPr>
+          </a:p>
+        </p:txBody>
+      </p:sp>
+      <p:sp>
+        <p:nvSpPr>
+          <p:cNvPr id="195" name=""/>
+          <p:cNvSpPr/>
+          <p:nvPr/>
+        </p:nvSpPr>
+        <p:spPr>
+          <a:xfrm>
+            <a:off x="4933440" y="2782440"/>
+            <a:ext cx="1230840" cy="0"/>
+          </a:xfrm>
+          <a:prstGeom prst="line">
+            <a:avLst/>
+          </a:prstGeom>
+          <a:ln w="10800">
+            <a:solidFill>
+              <a:srgbClr val="A8A8A8"/>
+            </a:solidFill>
+            <a:round/>
+          </a:ln>
+        </p:spPr>
+        <p:style>
+          <a:lnRef idx="0"/>
+          <a:fillRef idx="0"/>
+          <a:effectRef idx="0"/>
+          <a:fontRef idx="minor"/>
+        </p:style>
+        <p:txBody>
+          <a:bodyPr lIns="5400" tIns="-5400" rIns="5400" bIns="-5400" anchor="t">
+            <a:noAutofit/>
+          </a:bodyPr>
+          <a:p>
+            <a:endParaRPr lang="en-US" sz="2400" b="0" u="none" strike="noStrike">
+              <a:solidFill>
+                <a:srgbClr val="000000"/>
+              </a:solidFill>
+              <a:effectLst/>
+              <a:uFillTx/>
+              <a:latin typeface="Times New Roman"/>
+            </a:endParaRPr>
+          </a:p>
+        </p:txBody>
+      </p:sp>
+      <p:sp>
+        <p:nvSpPr>
+          <p:cNvPr id="196" name=""/>
+          <p:cNvSpPr/>
+          <p:nvPr/>
+        </p:nvSpPr>
+        <p:spPr>
+          <a:xfrm>
+            <a:off x="4869000" y="2691360"/>
+            <a:ext cx="1203840" cy="0"/>
+          </a:xfrm>
+          <a:prstGeom prst="line">
+            <a:avLst/>
+          </a:prstGeom>
+          <a:ln w="10800">
+            <a:solidFill>
+              <a:srgbClr val="6E6E6E"/>
+            </a:solidFill>
+            <a:round/>
+          </a:ln>
+        </p:spPr>
+        <p:style>
+          <a:lnRef idx="0"/>
+          <a:fillRef idx="0"/>
+          <a:effectRef idx="0"/>
+          <a:fontRef idx="minor"/>
+        </p:style>
+        <p:txBody>
+          <a:bodyPr lIns="5400" tIns="-5400" rIns="5400" bIns="-5400" anchor="t">
+            <a:noAutofit/>
+          </a:bodyPr>
+          <a:p>
+            <a:endParaRPr lang="en-US" sz="2400" b="0" u="none" strike="noStrike">
+              <a:solidFill>
+                <a:srgbClr val="000000"/>
+              </a:solidFill>
+              <a:effectLst/>
+              <a:uFillTx/>
+              <a:latin typeface="Times New Roman"/>
+            </a:endParaRPr>
+          </a:p>
+        </p:txBody>
+      </p:sp>
+      <p:sp>
+        <p:nvSpPr>
+          <p:cNvPr id="197" name=""/>
+          <p:cNvSpPr/>
+          <p:nvPr/>
+        </p:nvSpPr>
+        <p:spPr>
+          <a:xfrm>
+            <a:off x="4883760" y="2963880"/>
+            <a:ext cx="1162440" cy="0"/>
+          </a:xfrm>
+          <a:prstGeom prst="line">
+            <a:avLst/>
+          </a:prstGeom>
+          <a:ln w="10800">
+            <a:solidFill>
+              <a:srgbClr val="1F5F9E"/>
+            </a:solidFill>
+            <a:round/>
+          </a:ln>
+        </p:spPr>
+        <p:style>
+          <a:lnRef idx="0"/>
+          <a:fillRef idx="0"/>
+          <a:effectRef idx="0"/>
+          <a:fontRef idx="minor"/>
+        </p:style>
+        <p:txBody>
+          <a:bodyPr lIns="5400" tIns="-5400" rIns="5400" bIns="-5400" anchor="t">
+            <a:noAutofit/>
+          </a:bodyPr>
+          <a:p>
+            <a:endParaRPr lang="en-US" sz="2400" b="0" u="none" strike="noStrike">
+              <a:solidFill>
+                <a:srgbClr val="000000"/>
+              </a:solidFill>
+              <a:effectLst/>
+              <a:uFillTx/>
+              <a:latin typeface="Times New Roman"/>
+            </a:endParaRPr>
+          </a:p>
+        </p:txBody>
+      </p:sp>
+      <p:sp>
+        <p:nvSpPr>
+          <p:cNvPr id="198" name=""/>
+          <p:cNvSpPr/>
+          <p:nvPr/>
+        </p:nvSpPr>
+        <p:spPr>
+          <a:xfrm>
+            <a:off x="5006520" y="3145680"/>
+            <a:ext cx="1207080" cy="0"/>
+          </a:xfrm>
+          <a:prstGeom prst="line">
+            <a:avLst/>
+          </a:prstGeom>
+          <a:ln w="10800">
+            <a:solidFill>
+              <a:srgbClr val="A8A8A8"/>
+            </a:solidFill>
+            <a:round/>
+          </a:ln>
+        </p:spPr>
+        <p:style>
+          <a:lnRef idx="0"/>
+          <a:fillRef idx="0"/>
+          <a:effectRef idx="0"/>
+          <a:fontRef idx="minor"/>
+        </p:style>
+        <p:txBody>
+          <a:bodyPr lIns="5400" tIns="-5400" rIns="5400" bIns="-5400" anchor="t">
+            <a:noAutofit/>
+          </a:bodyPr>
+          <a:p>
+            <a:endParaRPr lang="en-US" sz="2400" b="0" u="none" strike="noStrike">
+              <a:solidFill>
+                <a:srgbClr val="000000"/>
+              </a:solidFill>
+              <a:effectLst/>
+              <a:uFillTx/>
+              <a:latin typeface="Times New Roman"/>
+            </a:endParaRPr>
+          </a:p>
+        </p:txBody>
+      </p:sp>
+      <p:sp>
+        <p:nvSpPr>
+          <p:cNvPr id="199" name=""/>
+          <p:cNvSpPr/>
+          <p:nvPr/>
+        </p:nvSpPr>
+        <p:spPr>
+          <a:xfrm>
+            <a:off x="4952520" y="3054960"/>
+            <a:ext cx="1184040" cy="0"/>
+          </a:xfrm>
+          <a:prstGeom prst="line">
+            <a:avLst/>
+          </a:prstGeom>
+          <a:ln w="10800">
+            <a:solidFill>
+              <a:srgbClr val="6E6E6E"/>
+            </a:solidFill>
+            <a:round/>
+          </a:ln>
+        </p:spPr>
+        <p:style>
+          <a:lnRef idx="0"/>
+          <a:fillRef idx="0"/>
+          <a:effectRef idx="0"/>
+          <a:fontRef idx="minor"/>
+        </p:style>
+        <p:txBody>
+          <a:bodyPr lIns="5400" tIns="-5400" rIns="5400" bIns="-5400" anchor="t">
+            <a:noAutofit/>
+          </a:bodyPr>
+          <a:p>
+            <a:endParaRPr lang="en-US" sz="2400" b="0" u="none" strike="noStrike">
+              <a:solidFill>
+                <a:srgbClr val="000000"/>
+              </a:solidFill>
+              <a:effectLst/>
+              <a:uFillTx/>
+              <a:latin typeface="Times New Roman"/>
+            </a:endParaRPr>
+          </a:p>
+        </p:txBody>
+      </p:sp>
+      <p:sp>
+        <p:nvSpPr>
+          <p:cNvPr id="200" name=""/>
+          <p:cNvSpPr/>
+          <p:nvPr/>
+        </p:nvSpPr>
+        <p:spPr>
+          <a:xfrm>
+            <a:off x="4970880" y="3327480"/>
+            <a:ext cx="1274400" cy="0"/>
+          </a:xfrm>
+          <a:prstGeom prst="line">
+            <a:avLst/>
+          </a:prstGeom>
+          <a:ln w="10800">
+            <a:solidFill>
+              <a:srgbClr val="1F5F9E"/>
+            </a:solidFill>
+            <a:round/>
+          </a:ln>
+        </p:spPr>
+        <p:style>
+          <a:lnRef idx="0"/>
+          <a:fillRef idx="0"/>
+          <a:effectRef idx="0"/>
+          <a:fontRef idx="minor"/>
+        </p:style>
+        <p:txBody>
+          <a:bodyPr lIns="5400" tIns="-5400" rIns="5400" bIns="-5400" anchor="t">
+            <a:noAutofit/>
+          </a:bodyPr>
+          <a:p>
+            <a:endParaRPr lang="en-US" sz="2400" b="0" u="none" strike="noStrike">
+              <a:solidFill>
+                <a:srgbClr val="000000"/>
+              </a:solidFill>
+              <a:effectLst/>
+              <a:uFillTx/>
+              <a:latin typeface="Times New Roman"/>
+            </a:endParaRPr>
+          </a:p>
+        </p:txBody>
+      </p:sp>
+      <p:sp>
+        <p:nvSpPr>
+          <p:cNvPr id="201" name=""/>
+          <p:cNvSpPr/>
+          <p:nvPr/>
+        </p:nvSpPr>
+        <p:spPr>
+          <a:xfrm>
+            <a:off x="5131440" y="3508920"/>
+            <a:ext cx="1348200" cy="0"/>
+          </a:xfrm>
+          <a:prstGeom prst="line">
+            <a:avLst/>
+          </a:prstGeom>
+          <a:ln w="10800">
+            <a:solidFill>
+              <a:srgbClr val="A8A8A8"/>
+            </a:solidFill>
+            <a:round/>
+          </a:ln>
+        </p:spPr>
+        <p:style>
+          <a:lnRef idx="0"/>
+          <a:fillRef idx="0"/>
+          <a:effectRef idx="0"/>
+          <a:fontRef idx="minor"/>
+        </p:style>
+        <p:txBody>
+          <a:bodyPr lIns="5400" tIns="-5400" rIns="5400" bIns="-5400" anchor="t">
+            <a:noAutofit/>
+          </a:bodyPr>
+          <a:p>
+            <a:endParaRPr lang="en-US" sz="2400" b="0" u="none" strike="noStrike">
+              <a:solidFill>
+                <a:srgbClr val="000000"/>
+              </a:solidFill>
+              <a:effectLst/>
+              <a:uFillTx/>
+              <a:latin typeface="Times New Roman"/>
+            </a:endParaRPr>
+          </a:p>
+        </p:txBody>
+      </p:sp>
+      <p:sp>
+        <p:nvSpPr>
+          <p:cNvPr id="202" name=""/>
+          <p:cNvSpPr/>
+          <p:nvPr/>
+        </p:nvSpPr>
+        <p:spPr>
+          <a:xfrm>
+            <a:off x="5069520" y="3418200"/>
+            <a:ext cx="1308600" cy="0"/>
+          </a:xfrm>
+          <a:prstGeom prst="line">
+            <a:avLst/>
+          </a:prstGeom>
+          <a:ln w="10800">
+            <a:solidFill>
+              <a:srgbClr val="6E6E6E"/>
+            </a:solidFill>
+            <a:round/>
+          </a:ln>
+        </p:spPr>
+        <p:style>
+          <a:lnRef idx="0"/>
+          <a:fillRef idx="0"/>
+          <a:effectRef idx="0"/>
+          <a:fontRef idx="minor"/>
+        </p:style>
+        <p:txBody>
+          <a:bodyPr lIns="5400" tIns="-5400" rIns="5400" bIns="-5400" anchor="t">
+            <a:noAutofit/>
+          </a:bodyPr>
+          <a:p>
+            <a:endParaRPr lang="en-US" sz="2400" b="0" u="none" strike="noStrike">
+              <a:solidFill>
+                <a:srgbClr val="000000"/>
+              </a:solidFill>
+              <a:effectLst/>
+              <a:uFillTx/>
+              <a:latin typeface="Times New Roman"/>
+            </a:endParaRPr>
+          </a:p>
+        </p:txBody>
+      </p:sp>
+      <p:sp>
+        <p:nvSpPr>
+          <p:cNvPr id="203" name=""/>
+          <p:cNvSpPr/>
+          <p:nvPr/>
+        </p:nvSpPr>
+        <p:spPr>
+          <a:xfrm>
+            <a:off x="4264920" y="3690720"/>
+            <a:ext cx="1019880" cy="0"/>
+          </a:xfrm>
+          <a:prstGeom prst="line">
+            <a:avLst/>
+          </a:prstGeom>
+          <a:ln w="10800">
+            <a:solidFill>
+              <a:srgbClr val="1F5F9E"/>
+            </a:solidFill>
+            <a:round/>
+          </a:ln>
+        </p:spPr>
+        <p:style>
+          <a:lnRef idx="0"/>
+          <a:fillRef idx="0"/>
+          <a:effectRef idx="0"/>
+          <a:fontRef idx="minor"/>
+        </p:style>
+        <p:txBody>
+          <a:bodyPr lIns="5400" tIns="-5400" rIns="5400" bIns="-5400" anchor="t">
+            <a:noAutofit/>
+          </a:bodyPr>
+          <a:p>
+            <a:endParaRPr lang="en-US" sz="2400" b="0" u="none" strike="noStrike">
+              <a:solidFill>
+                <a:srgbClr val="000000"/>
+              </a:solidFill>
+              <a:effectLst/>
+              <a:uFillTx/>
+              <a:latin typeface="Times New Roman"/>
+            </a:endParaRPr>
+          </a:p>
+        </p:txBody>
+      </p:sp>
+      <p:sp>
+        <p:nvSpPr>
+          <p:cNvPr id="204" name=""/>
+          <p:cNvSpPr/>
+          <p:nvPr/>
+        </p:nvSpPr>
+        <p:spPr>
+          <a:xfrm>
+            <a:off x="4442040" y="3872160"/>
+            <a:ext cx="1079640" cy="0"/>
+          </a:xfrm>
+          <a:prstGeom prst="line">
+            <a:avLst/>
+          </a:prstGeom>
+          <a:ln w="10800">
+            <a:solidFill>
+              <a:srgbClr val="A8A8A8"/>
+            </a:solidFill>
+            <a:round/>
+          </a:ln>
+        </p:spPr>
+        <p:style>
+          <a:lnRef idx="0"/>
+          <a:fillRef idx="0"/>
+          <a:effectRef idx="0"/>
+          <a:fontRef idx="minor"/>
+        </p:style>
+        <p:txBody>
+          <a:bodyPr lIns="5400" tIns="-5400" rIns="5400" bIns="-5400" anchor="t">
+            <a:noAutofit/>
+          </a:bodyPr>
+          <a:p>
+            <a:endParaRPr lang="en-US" sz="2400" b="0" u="none" strike="noStrike">
+              <a:solidFill>
+                <a:srgbClr val="000000"/>
+              </a:solidFill>
+              <a:effectLst/>
+              <a:uFillTx/>
+              <a:latin typeface="Times New Roman"/>
+            </a:endParaRPr>
+          </a:p>
+        </p:txBody>
+      </p:sp>
+      <p:sp>
+        <p:nvSpPr>
+          <p:cNvPr id="205" name=""/>
+          <p:cNvSpPr/>
+          <p:nvPr/>
+        </p:nvSpPr>
+        <p:spPr>
+          <a:xfrm>
+            <a:off x="4326480" y="3781440"/>
+            <a:ext cx="1038600" cy="0"/>
+          </a:xfrm>
+          <a:prstGeom prst="line">
+            <a:avLst/>
+          </a:prstGeom>
+          <a:ln w="10800">
+            <a:solidFill>
+              <a:srgbClr val="6E6E6E"/>
+            </a:solidFill>
+            <a:round/>
+          </a:ln>
+        </p:spPr>
+        <p:style>
+          <a:lnRef idx="0"/>
+          <a:fillRef idx="0"/>
+          <a:effectRef idx="0"/>
+          <a:fontRef idx="minor"/>
+        </p:style>
+        <p:txBody>
+          <a:bodyPr lIns="5400" tIns="-5400" rIns="5400" bIns="-5400" anchor="t">
+            <a:noAutofit/>
+          </a:bodyPr>
+          <a:p>
+            <a:endParaRPr lang="en-US" sz="2400" b="0" u="none" strike="noStrike">
+              <a:solidFill>
+                <a:srgbClr val="000000"/>
+              </a:solidFill>
+              <a:effectLst/>
+              <a:uFillTx/>
+              <a:latin typeface="Times New Roman"/>
+            </a:endParaRPr>
+          </a:p>
+        </p:txBody>
+      </p:sp>
+      <p:sp>
+        <p:nvSpPr>
+          <p:cNvPr id="206" name=""/>
+          <p:cNvSpPr/>
+          <p:nvPr/>
+        </p:nvSpPr>
+        <p:spPr>
+          <a:xfrm>
+            <a:off x="5331240" y="2580120"/>
+            <a:ext cx="41040" cy="41760"/>
+          </a:xfrm>
+          <a:custGeom>
+            <a:avLst/>
+            <a:gdLst/>
+            <a:ahLst/>
+            <a:rect l="0" t="0" r="r" b="b"/>
+            <a:pathLst>
+              <a:path w="114" h="116">
+                <a:moveTo>
+                  <a:pt x="0" y="58"/>
+                </a:moveTo>
+                <a:cubicBezTo>
+                  <a:pt x="0" y="-19"/>
+                  <a:pt x="114" y="-19"/>
+                  <a:pt x="114" y="58"/>
+                </a:cubicBezTo>
+                <a:cubicBezTo>
+                  <a:pt x="114" y="135"/>
+                  <a:pt x="0" y="135"/>
+                  <a:pt x="0" y="58"/>
+                </a:cubicBezTo>
+                <a:close/>
+              </a:path>
+            </a:pathLst>
+          </a:custGeom>
+          <a:solidFill>
+            <a:srgbClr val="1F5F9E"/>
+          </a:solidFill>
+          <a:ln w="0">
+            <a:noFill/>
+          </a:ln>
+        </p:spPr>
+        <p:txBody>
+          <a:bodyPr lIns="0" tIns="0" rIns="0" bIns="0" anchor="t">
+            <a:noAutofit/>
+          </a:bodyPr>
+          <a:p>
+            <a:endParaRPr lang="en-US" sz="2400" b="0" u="none" strike="noStrike">
+              <a:solidFill>
+                <a:srgbClr val="FFFFFF"/>
+              </a:solidFill>
+              <a:effectLst/>
+              <a:uFillTx/>
+              <a:latin typeface="Times New Roman"/>
+            </a:endParaRPr>
+          </a:p>
+        </p:txBody>
+      </p:sp>
+      <p:sp>
+        <p:nvSpPr>
+          <p:cNvPr id="207" name=""/>
+          <p:cNvSpPr/>
+          <p:nvPr/>
+        </p:nvSpPr>
+        <p:spPr>
+          <a:xfrm>
+            <a:off x="5331240" y="2580120"/>
+            <a:ext cx="41040" cy="41760"/>
+          </a:xfrm>
+          <a:custGeom>
+            <a:avLst/>
+            <a:gdLst/>
+            <a:ahLst/>
+            <a:rect l="0" t="0" r="r" b="b"/>
+            <a:pathLst>
+              <a:path fill="none" w="114" h="116">
+                <a:moveTo>
+                  <a:pt x="114" y="58"/>
+                </a:moveTo>
+                <a:cubicBezTo>
+                  <a:pt x="114" y="135"/>
+                  <a:pt x="0" y="135"/>
+                  <a:pt x="0" y="58"/>
+                </a:cubicBezTo>
+                <a:cubicBezTo>
+                  <a:pt x="0" y="-19"/>
+                  <a:pt x="114" y="-19"/>
+                  <a:pt x="114" y="58"/>
+                </a:cubicBezTo>
+              </a:path>
+            </a:pathLst>
+          </a:custGeom>
+          <a:ln cap="rnd" w="5400">
+            <a:solidFill>
+              <a:srgbClr val="1F5F9E"/>
+            </a:solidFill>
+            <a:round/>
+          </a:ln>
+        </p:spPr>
+        <p:txBody>
+          <a:bodyPr lIns="2520" tIns="2520" rIns="2520" bIns="2520" anchor="t">
+            <a:noAutofit/>
+          </a:bodyPr>
+          <a:p>
+            <a:endParaRPr lang="en-US" sz="2400" b="0" u="none" strike="noStrike">
+              <a:solidFill>
+                <a:srgbClr val="000000"/>
+              </a:solidFill>
+              <a:effectLst/>
+              <a:uFillTx/>
+              <a:latin typeface="Times New Roman"/>
+            </a:endParaRPr>
+          </a:p>
+        </p:txBody>
+      </p:sp>
+      <p:sp>
+        <p:nvSpPr>
+          <p:cNvPr id="208" name=""/>
+          <p:cNvSpPr/>
+          <p:nvPr/>
+        </p:nvSpPr>
+        <p:spPr>
+          <a:xfrm>
+            <a:off x="5491080" y="2761920"/>
             <a:ext cx="41400" cy="41040"/>
           </a:xfrm>
           <a:custGeom>
@@ -8518,13 +10836,13 @@
       </p:sp>
       <p:sp>
         <p:nvSpPr>
-          <p:cNvPr id="164" name=""/>
-          <p:cNvSpPr/>
-          <p:nvPr/>
-        </p:nvSpPr>
-        <p:spPr>
-          <a:xfrm>
-            <a:off x="2211480" y="2761920"/>
+          <p:cNvPr id="209" name=""/>
+          <p:cNvSpPr/>
+          <p:nvPr/>
+        </p:nvSpPr>
+        <p:spPr>
+          <a:xfrm>
+            <a:off x="5491080" y="2761920"/>
             <a:ext cx="41400" cy="41040"/>
           </a:xfrm>
           <a:custGeom>
@@ -8575,13 +10893,1048 @@
       </p:sp>
       <p:sp>
         <p:nvSpPr>
-          <p:cNvPr id="165" name=""/>
-          <p:cNvSpPr/>
-          <p:nvPr/>
-        </p:nvSpPr>
-        <p:spPr>
-          <a:xfrm>
-            <a:off x="2198880" y="2670840"/>
+          <p:cNvPr id="210" name=""/>
+          <p:cNvSpPr/>
+          <p:nvPr/>
+        </p:nvSpPr>
+        <p:spPr>
+          <a:xfrm>
+            <a:off x="5414400" y="2670840"/>
+            <a:ext cx="41400" cy="41760"/>
+          </a:xfrm>
+          <a:custGeom>
+            <a:avLst/>
+            <a:gdLst/>
+            <a:ahLst/>
+            <a:rect l="0" t="0" r="r" b="b"/>
+            <a:pathLst>
+              <a:path w="115" h="116">
+                <a:moveTo>
+                  <a:pt x="0" y="58"/>
+                </a:moveTo>
+                <a:cubicBezTo>
+                  <a:pt x="0" y="-19"/>
+                  <a:pt x="115" y="-19"/>
+                  <a:pt x="115" y="58"/>
+                </a:cubicBezTo>
+                <a:cubicBezTo>
+                  <a:pt x="115" y="135"/>
+                  <a:pt x="0" y="135"/>
+                  <a:pt x="0" y="58"/>
+                </a:cubicBezTo>
+                <a:close/>
+              </a:path>
+            </a:pathLst>
+          </a:custGeom>
+          <a:solidFill>
+            <a:srgbClr val="6E6E6E"/>
+          </a:solidFill>
+          <a:ln w="0">
+            <a:noFill/>
+          </a:ln>
+        </p:spPr>
+        <p:txBody>
+          <a:bodyPr lIns="0" tIns="0" rIns="0" bIns="0" anchor="t">
+            <a:noAutofit/>
+          </a:bodyPr>
+          <a:p>
+            <a:endParaRPr lang="en-US" sz="2400" b="0" u="none" strike="noStrike">
+              <a:solidFill>
+                <a:srgbClr val="FFFFFF"/>
+              </a:solidFill>
+              <a:effectLst/>
+              <a:uFillTx/>
+              <a:latin typeface="Times New Roman"/>
+            </a:endParaRPr>
+          </a:p>
+        </p:txBody>
+      </p:sp>
+      <p:sp>
+        <p:nvSpPr>
+          <p:cNvPr id="211" name=""/>
+          <p:cNvSpPr/>
+          <p:nvPr/>
+        </p:nvSpPr>
+        <p:spPr>
+          <a:xfrm>
+            <a:off x="5414400" y="2670840"/>
+            <a:ext cx="41400" cy="41760"/>
+          </a:xfrm>
+          <a:custGeom>
+            <a:avLst/>
+            <a:gdLst/>
+            <a:ahLst/>
+            <a:rect l="0" t="0" r="r" b="b"/>
+            <a:pathLst>
+              <a:path fill="none" w="115" h="116">
+                <a:moveTo>
+                  <a:pt x="115" y="58"/>
+                </a:moveTo>
+                <a:cubicBezTo>
+                  <a:pt x="115" y="135"/>
+                  <a:pt x="0" y="135"/>
+                  <a:pt x="0" y="58"/>
+                </a:cubicBezTo>
+                <a:cubicBezTo>
+                  <a:pt x="0" y="-19"/>
+                  <a:pt x="115" y="-19"/>
+                  <a:pt x="115" y="58"/>
+                </a:cubicBezTo>
+              </a:path>
+            </a:pathLst>
+          </a:custGeom>
+          <a:ln cap="rnd" w="5400">
+            <a:solidFill>
+              <a:srgbClr val="6E6E6E"/>
+            </a:solidFill>
+            <a:round/>
+          </a:ln>
+        </p:spPr>
+        <p:txBody>
+          <a:bodyPr lIns="2520" tIns="2520" rIns="2520" bIns="2520" anchor="t">
+            <a:noAutofit/>
+          </a:bodyPr>
+          <a:p>
+            <a:endParaRPr lang="en-US" sz="2400" b="0" u="none" strike="noStrike">
+              <a:solidFill>
+                <a:srgbClr val="000000"/>
+              </a:solidFill>
+              <a:effectLst/>
+              <a:uFillTx/>
+              <a:latin typeface="Times New Roman"/>
+            </a:endParaRPr>
+          </a:p>
+        </p:txBody>
+      </p:sp>
+      <p:sp>
+        <p:nvSpPr>
+          <p:cNvPr id="212" name=""/>
+          <p:cNvSpPr/>
+          <p:nvPr/>
+        </p:nvSpPr>
+        <p:spPr>
+          <a:xfrm>
+            <a:off x="5410800" y="2943360"/>
+            <a:ext cx="41400" cy="41760"/>
+          </a:xfrm>
+          <a:custGeom>
+            <a:avLst/>
+            <a:gdLst/>
+            <a:ahLst/>
+            <a:rect l="0" t="0" r="r" b="b"/>
+            <a:pathLst>
+              <a:path w="115" h="116">
+                <a:moveTo>
+                  <a:pt x="0" y="58"/>
+                </a:moveTo>
+                <a:cubicBezTo>
+                  <a:pt x="0" y="-19"/>
+                  <a:pt x="115" y="-19"/>
+                  <a:pt x="115" y="58"/>
+                </a:cubicBezTo>
+                <a:cubicBezTo>
+                  <a:pt x="115" y="135"/>
+                  <a:pt x="0" y="135"/>
+                  <a:pt x="0" y="58"/>
+                </a:cubicBezTo>
+                <a:close/>
+              </a:path>
+            </a:pathLst>
+          </a:custGeom>
+          <a:solidFill>
+            <a:srgbClr val="1F5F9E"/>
+          </a:solidFill>
+          <a:ln w="0">
+            <a:noFill/>
+          </a:ln>
+        </p:spPr>
+        <p:txBody>
+          <a:bodyPr lIns="0" tIns="0" rIns="0" bIns="0" anchor="t">
+            <a:noAutofit/>
+          </a:bodyPr>
+          <a:p>
+            <a:endParaRPr lang="en-US" sz="2400" b="0" u="none" strike="noStrike">
+              <a:solidFill>
+                <a:srgbClr val="FFFFFF"/>
+              </a:solidFill>
+              <a:effectLst/>
+              <a:uFillTx/>
+              <a:latin typeface="Times New Roman"/>
+            </a:endParaRPr>
+          </a:p>
+        </p:txBody>
+      </p:sp>
+      <p:sp>
+        <p:nvSpPr>
+          <p:cNvPr id="213" name=""/>
+          <p:cNvSpPr/>
+          <p:nvPr/>
+        </p:nvSpPr>
+        <p:spPr>
+          <a:xfrm>
+            <a:off x="5410800" y="2943360"/>
+            <a:ext cx="41400" cy="41760"/>
+          </a:xfrm>
+          <a:custGeom>
+            <a:avLst/>
+            <a:gdLst/>
+            <a:ahLst/>
+            <a:rect l="0" t="0" r="r" b="b"/>
+            <a:pathLst>
+              <a:path fill="none" w="115" h="116">
+                <a:moveTo>
+                  <a:pt x="115" y="58"/>
+                </a:moveTo>
+                <a:cubicBezTo>
+                  <a:pt x="115" y="135"/>
+                  <a:pt x="0" y="135"/>
+                  <a:pt x="0" y="58"/>
+                </a:cubicBezTo>
+                <a:cubicBezTo>
+                  <a:pt x="0" y="-19"/>
+                  <a:pt x="115" y="-19"/>
+                  <a:pt x="115" y="58"/>
+                </a:cubicBezTo>
+              </a:path>
+            </a:pathLst>
+          </a:custGeom>
+          <a:ln cap="rnd" w="5400">
+            <a:solidFill>
+              <a:srgbClr val="1F5F9E"/>
+            </a:solidFill>
+            <a:round/>
+          </a:ln>
+        </p:spPr>
+        <p:txBody>
+          <a:bodyPr lIns="2520" tIns="2520" rIns="2520" bIns="2520" anchor="t">
+            <a:noAutofit/>
+          </a:bodyPr>
+          <a:p>
+            <a:endParaRPr lang="en-US" sz="2400" b="0" u="none" strike="noStrike">
+              <a:solidFill>
+                <a:srgbClr val="000000"/>
+              </a:solidFill>
+              <a:effectLst/>
+              <a:uFillTx/>
+              <a:latin typeface="Times New Roman"/>
+            </a:endParaRPr>
+          </a:p>
+        </p:txBody>
+      </p:sp>
+      <p:sp>
+        <p:nvSpPr>
+          <p:cNvPr id="214" name=""/>
+          <p:cNvSpPr/>
+          <p:nvPr/>
+        </p:nvSpPr>
+        <p:spPr>
+          <a:xfrm>
+            <a:off x="5554440" y="3125160"/>
+            <a:ext cx="41400" cy="41400"/>
+          </a:xfrm>
+          <a:custGeom>
+            <a:avLst/>
+            <a:gdLst/>
+            <a:ahLst/>
+            <a:rect l="0" t="0" r="r" b="b"/>
+            <a:pathLst>
+              <a:path w="115" h="115">
+                <a:moveTo>
+                  <a:pt x="0" y="57"/>
+                </a:moveTo>
+                <a:cubicBezTo>
+                  <a:pt x="0" y="-19"/>
+                  <a:pt x="115" y="-19"/>
+                  <a:pt x="115" y="57"/>
+                </a:cubicBezTo>
+                <a:cubicBezTo>
+                  <a:pt x="115" y="134"/>
+                  <a:pt x="0" y="134"/>
+                  <a:pt x="0" y="57"/>
+                </a:cubicBezTo>
+                <a:close/>
+              </a:path>
+            </a:pathLst>
+          </a:custGeom>
+          <a:solidFill>
+            <a:srgbClr val="A8A8A8"/>
+          </a:solidFill>
+          <a:ln w="0">
+            <a:noFill/>
+          </a:ln>
+        </p:spPr>
+        <p:txBody>
+          <a:bodyPr lIns="0" tIns="0" rIns="0" bIns="0" anchor="t">
+            <a:noAutofit/>
+          </a:bodyPr>
+          <a:p>
+            <a:endParaRPr lang="en-US" sz="2400" b="0" u="none" strike="noStrike">
+              <a:solidFill>
+                <a:srgbClr val="000000"/>
+              </a:solidFill>
+              <a:effectLst/>
+              <a:uFillTx/>
+              <a:latin typeface="Times New Roman"/>
+            </a:endParaRPr>
+          </a:p>
+        </p:txBody>
+      </p:sp>
+      <p:sp>
+        <p:nvSpPr>
+          <p:cNvPr id="215" name=""/>
+          <p:cNvSpPr/>
+          <p:nvPr/>
+        </p:nvSpPr>
+        <p:spPr>
+          <a:xfrm>
+            <a:off x="5554440" y="3125160"/>
+            <a:ext cx="41400" cy="41400"/>
+          </a:xfrm>
+          <a:custGeom>
+            <a:avLst/>
+            <a:gdLst/>
+            <a:ahLst/>
+            <a:rect l="0" t="0" r="r" b="b"/>
+            <a:pathLst>
+              <a:path fill="none" w="115" h="115">
+                <a:moveTo>
+                  <a:pt x="115" y="57"/>
+                </a:moveTo>
+                <a:cubicBezTo>
+                  <a:pt x="115" y="134"/>
+                  <a:pt x="0" y="134"/>
+                  <a:pt x="0" y="57"/>
+                </a:cubicBezTo>
+                <a:cubicBezTo>
+                  <a:pt x="0" y="-19"/>
+                  <a:pt x="115" y="-19"/>
+                  <a:pt x="115" y="57"/>
+                </a:cubicBezTo>
+              </a:path>
+            </a:pathLst>
+          </a:custGeom>
+          <a:ln cap="rnd" w="5400">
+            <a:solidFill>
+              <a:srgbClr val="A8A8A8"/>
+            </a:solidFill>
+            <a:round/>
+          </a:ln>
+        </p:spPr>
+        <p:txBody>
+          <a:bodyPr lIns="2520" tIns="2520" rIns="2520" bIns="2520" anchor="t">
+            <a:noAutofit/>
+          </a:bodyPr>
+          <a:p>
+            <a:endParaRPr lang="en-US" sz="2400" b="0" u="none" strike="noStrike">
+              <a:solidFill>
+                <a:srgbClr val="000000"/>
+              </a:solidFill>
+              <a:effectLst/>
+              <a:uFillTx/>
+              <a:latin typeface="Times New Roman"/>
+            </a:endParaRPr>
+          </a:p>
+        </p:txBody>
+      </p:sp>
+      <p:sp>
+        <p:nvSpPr>
+          <p:cNvPr id="216" name=""/>
+          <p:cNvSpPr/>
+          <p:nvPr/>
+        </p:nvSpPr>
+        <p:spPr>
+          <a:xfrm>
+            <a:off x="5489640" y="3034440"/>
+            <a:ext cx="41400" cy="41400"/>
+          </a:xfrm>
+          <a:custGeom>
+            <a:avLst/>
+            <a:gdLst/>
+            <a:ahLst/>
+            <a:rect l="0" t="0" r="r" b="b"/>
+            <a:pathLst>
+              <a:path w="115" h="115">
+                <a:moveTo>
+                  <a:pt x="0" y="58"/>
+                </a:moveTo>
+                <a:cubicBezTo>
+                  <a:pt x="0" y="-19"/>
+                  <a:pt x="115" y="-19"/>
+                  <a:pt x="115" y="58"/>
+                </a:cubicBezTo>
+                <a:cubicBezTo>
+                  <a:pt x="115" y="134"/>
+                  <a:pt x="0" y="134"/>
+                  <a:pt x="0" y="58"/>
+                </a:cubicBezTo>
+                <a:close/>
+              </a:path>
+            </a:pathLst>
+          </a:custGeom>
+          <a:solidFill>
+            <a:srgbClr val="6E6E6E"/>
+          </a:solidFill>
+          <a:ln w="0">
+            <a:noFill/>
+          </a:ln>
+        </p:spPr>
+        <p:txBody>
+          <a:bodyPr lIns="0" tIns="0" rIns="0" bIns="0" anchor="t">
+            <a:noAutofit/>
+          </a:bodyPr>
+          <a:p>
+            <a:endParaRPr lang="en-US" sz="2400" b="0" u="none" strike="noStrike">
+              <a:solidFill>
+                <a:srgbClr val="FFFFFF"/>
+              </a:solidFill>
+              <a:effectLst/>
+              <a:uFillTx/>
+              <a:latin typeface="Times New Roman"/>
+            </a:endParaRPr>
+          </a:p>
+        </p:txBody>
+      </p:sp>
+      <p:sp>
+        <p:nvSpPr>
+          <p:cNvPr id="217" name=""/>
+          <p:cNvSpPr/>
+          <p:nvPr/>
+        </p:nvSpPr>
+        <p:spPr>
+          <a:xfrm>
+            <a:off x="5489640" y="3034440"/>
+            <a:ext cx="41400" cy="41400"/>
+          </a:xfrm>
+          <a:custGeom>
+            <a:avLst/>
+            <a:gdLst/>
+            <a:ahLst/>
+            <a:rect l="0" t="0" r="r" b="b"/>
+            <a:pathLst>
+              <a:path fill="none" w="115" h="115">
+                <a:moveTo>
+                  <a:pt x="115" y="58"/>
+                </a:moveTo>
+                <a:cubicBezTo>
+                  <a:pt x="115" y="134"/>
+                  <a:pt x="0" y="134"/>
+                  <a:pt x="0" y="58"/>
+                </a:cubicBezTo>
+                <a:cubicBezTo>
+                  <a:pt x="0" y="-19"/>
+                  <a:pt x="115" y="-19"/>
+                  <a:pt x="115" y="58"/>
+                </a:cubicBezTo>
+              </a:path>
+            </a:pathLst>
+          </a:custGeom>
+          <a:ln cap="rnd" w="5400">
+            <a:solidFill>
+              <a:srgbClr val="6E6E6E"/>
+            </a:solidFill>
+            <a:round/>
+          </a:ln>
+        </p:spPr>
+        <p:txBody>
+          <a:bodyPr lIns="2520" tIns="2520" rIns="2520" bIns="2520" anchor="t">
+            <a:noAutofit/>
+          </a:bodyPr>
+          <a:p>
+            <a:endParaRPr lang="en-US" sz="2400" b="0" u="none" strike="noStrike">
+              <a:solidFill>
+                <a:srgbClr val="000000"/>
+              </a:solidFill>
+              <a:effectLst/>
+              <a:uFillTx/>
+              <a:latin typeface="Times New Roman"/>
+            </a:endParaRPr>
+          </a:p>
+        </p:txBody>
+      </p:sp>
+      <p:sp>
+        <p:nvSpPr>
+          <p:cNvPr id="218" name=""/>
+          <p:cNvSpPr/>
+          <p:nvPr/>
+        </p:nvSpPr>
+        <p:spPr>
+          <a:xfrm>
+            <a:off x="5547960" y="3306960"/>
+            <a:ext cx="41400" cy="41040"/>
+          </a:xfrm>
+          <a:custGeom>
+            <a:avLst/>
+            <a:gdLst/>
+            <a:ahLst/>
+            <a:rect l="0" t="0" r="r" b="b"/>
+            <a:pathLst>
+              <a:path w="115" h="114">
+                <a:moveTo>
+                  <a:pt x="0" y="58"/>
+                </a:moveTo>
+                <a:cubicBezTo>
+                  <a:pt x="0" y="-19"/>
+                  <a:pt x="115" y="-19"/>
+                  <a:pt x="115" y="58"/>
+                </a:cubicBezTo>
+                <a:cubicBezTo>
+                  <a:pt x="115" y="133"/>
+                  <a:pt x="0" y="133"/>
+                  <a:pt x="0" y="58"/>
+                </a:cubicBezTo>
+                <a:close/>
+              </a:path>
+            </a:pathLst>
+          </a:custGeom>
+          <a:solidFill>
+            <a:srgbClr val="1F5F9E"/>
+          </a:solidFill>
+          <a:ln w="0">
+            <a:noFill/>
+          </a:ln>
+        </p:spPr>
+        <p:txBody>
+          <a:bodyPr lIns="0" tIns="0" rIns="0" bIns="0" anchor="t">
+            <a:noAutofit/>
+          </a:bodyPr>
+          <a:p>
+            <a:endParaRPr lang="en-US" sz="2400" b="0" u="none" strike="noStrike">
+              <a:solidFill>
+                <a:srgbClr val="FFFFFF"/>
+              </a:solidFill>
+              <a:effectLst/>
+              <a:uFillTx/>
+              <a:latin typeface="Times New Roman"/>
+            </a:endParaRPr>
+          </a:p>
+        </p:txBody>
+      </p:sp>
+      <p:sp>
+        <p:nvSpPr>
+          <p:cNvPr id="219" name=""/>
+          <p:cNvSpPr/>
+          <p:nvPr/>
+        </p:nvSpPr>
+        <p:spPr>
+          <a:xfrm>
+            <a:off x="5547960" y="3306960"/>
+            <a:ext cx="41400" cy="41040"/>
+          </a:xfrm>
+          <a:custGeom>
+            <a:avLst/>
+            <a:gdLst/>
+            <a:ahLst/>
+            <a:rect l="0" t="0" r="r" b="b"/>
+            <a:pathLst>
+              <a:path fill="none" w="115" h="114">
+                <a:moveTo>
+                  <a:pt x="115" y="58"/>
+                </a:moveTo>
+                <a:cubicBezTo>
+                  <a:pt x="115" y="133"/>
+                  <a:pt x="0" y="133"/>
+                  <a:pt x="0" y="58"/>
+                </a:cubicBezTo>
+                <a:cubicBezTo>
+                  <a:pt x="0" y="-19"/>
+                  <a:pt x="115" y="-19"/>
+                  <a:pt x="115" y="58"/>
+                </a:cubicBezTo>
+              </a:path>
+            </a:pathLst>
+          </a:custGeom>
+          <a:ln cap="rnd" w="5400">
+            <a:solidFill>
+              <a:srgbClr val="1F5F9E"/>
+            </a:solidFill>
+            <a:round/>
+          </a:ln>
+        </p:spPr>
+        <p:txBody>
+          <a:bodyPr lIns="2520" tIns="2520" rIns="2520" bIns="2520" anchor="t">
+            <a:noAutofit/>
+          </a:bodyPr>
+          <a:p>
+            <a:endParaRPr lang="en-US" sz="2400" b="0" u="none" strike="noStrike">
+              <a:solidFill>
+                <a:srgbClr val="000000"/>
+              </a:solidFill>
+              <a:effectLst/>
+              <a:uFillTx/>
+              <a:latin typeface="Times New Roman"/>
+            </a:endParaRPr>
+          </a:p>
+        </p:txBody>
+      </p:sp>
+      <p:sp>
+        <p:nvSpPr>
+          <p:cNvPr id="220" name=""/>
+          <p:cNvSpPr/>
+          <p:nvPr/>
+        </p:nvSpPr>
+        <p:spPr>
+          <a:xfrm>
+            <a:off x="5742720" y="3488400"/>
+            <a:ext cx="41040" cy="41400"/>
+          </a:xfrm>
+          <a:custGeom>
+            <a:avLst/>
+            <a:gdLst/>
+            <a:ahLst/>
+            <a:rect l="0" t="0" r="r" b="b"/>
+            <a:pathLst>
+              <a:path w="114" h="115">
+                <a:moveTo>
+                  <a:pt x="0" y="57"/>
+                </a:moveTo>
+                <a:cubicBezTo>
+                  <a:pt x="0" y="-19"/>
+                  <a:pt x="114" y="-19"/>
+                  <a:pt x="114" y="57"/>
+                </a:cubicBezTo>
+                <a:cubicBezTo>
+                  <a:pt x="114" y="134"/>
+                  <a:pt x="0" y="134"/>
+                  <a:pt x="0" y="57"/>
+                </a:cubicBezTo>
+                <a:close/>
+              </a:path>
+            </a:pathLst>
+          </a:custGeom>
+          <a:solidFill>
+            <a:srgbClr val="A8A8A8"/>
+          </a:solidFill>
+          <a:ln w="0">
+            <a:noFill/>
+          </a:ln>
+        </p:spPr>
+        <p:txBody>
+          <a:bodyPr lIns="0" tIns="0" rIns="0" bIns="0" anchor="t">
+            <a:noAutofit/>
+          </a:bodyPr>
+          <a:p>
+            <a:endParaRPr lang="en-US" sz="2400" b="0" u="none" strike="noStrike">
+              <a:solidFill>
+                <a:srgbClr val="000000"/>
+              </a:solidFill>
+              <a:effectLst/>
+              <a:uFillTx/>
+              <a:latin typeface="Times New Roman"/>
+            </a:endParaRPr>
+          </a:p>
+        </p:txBody>
+      </p:sp>
+      <p:sp>
+        <p:nvSpPr>
+          <p:cNvPr id="221" name=""/>
+          <p:cNvSpPr/>
+          <p:nvPr/>
+        </p:nvSpPr>
+        <p:spPr>
+          <a:xfrm>
+            <a:off x="5742720" y="3488400"/>
+            <a:ext cx="41040" cy="41400"/>
+          </a:xfrm>
+          <a:custGeom>
+            <a:avLst/>
+            <a:gdLst/>
+            <a:ahLst/>
+            <a:rect l="0" t="0" r="r" b="b"/>
+            <a:pathLst>
+              <a:path fill="none" w="114" h="115">
+                <a:moveTo>
+                  <a:pt x="114" y="57"/>
+                </a:moveTo>
+                <a:cubicBezTo>
+                  <a:pt x="114" y="134"/>
+                  <a:pt x="0" y="134"/>
+                  <a:pt x="0" y="57"/>
+                </a:cubicBezTo>
+                <a:cubicBezTo>
+                  <a:pt x="0" y="-19"/>
+                  <a:pt x="114" y="-19"/>
+                  <a:pt x="114" y="57"/>
+                </a:cubicBezTo>
+              </a:path>
+            </a:pathLst>
+          </a:custGeom>
+          <a:ln cap="rnd" w="5400">
+            <a:solidFill>
+              <a:srgbClr val="A8A8A8"/>
+            </a:solidFill>
+            <a:round/>
+          </a:ln>
+        </p:spPr>
+        <p:txBody>
+          <a:bodyPr lIns="2520" tIns="2520" rIns="2520" bIns="2520" anchor="t">
+            <a:noAutofit/>
+          </a:bodyPr>
+          <a:p>
+            <a:endParaRPr lang="en-US" sz="2400" b="0" u="none" strike="noStrike">
+              <a:solidFill>
+                <a:srgbClr val="000000"/>
+              </a:solidFill>
+              <a:effectLst/>
+              <a:uFillTx/>
+              <a:latin typeface="Times New Roman"/>
+            </a:endParaRPr>
+          </a:p>
+        </p:txBody>
+      </p:sp>
+      <p:sp>
+        <p:nvSpPr>
+          <p:cNvPr id="222" name=""/>
+          <p:cNvSpPr/>
+          <p:nvPr/>
+        </p:nvSpPr>
+        <p:spPr>
+          <a:xfrm>
+            <a:off x="5662800" y="3397680"/>
+            <a:ext cx="41400" cy="41760"/>
+          </a:xfrm>
+          <a:custGeom>
+            <a:avLst/>
+            <a:gdLst/>
+            <a:ahLst/>
+            <a:rect l="0" t="0" r="r" b="b"/>
+            <a:pathLst>
+              <a:path w="115" h="116">
+                <a:moveTo>
+                  <a:pt x="0" y="58"/>
+                </a:moveTo>
+                <a:cubicBezTo>
+                  <a:pt x="0" y="-19"/>
+                  <a:pt x="115" y="-19"/>
+                  <a:pt x="115" y="58"/>
+                </a:cubicBezTo>
+                <a:cubicBezTo>
+                  <a:pt x="115" y="135"/>
+                  <a:pt x="0" y="135"/>
+                  <a:pt x="0" y="58"/>
+                </a:cubicBezTo>
+                <a:close/>
+              </a:path>
+            </a:pathLst>
+          </a:custGeom>
+          <a:solidFill>
+            <a:srgbClr val="6E6E6E"/>
+          </a:solidFill>
+          <a:ln w="0">
+            <a:noFill/>
+          </a:ln>
+        </p:spPr>
+        <p:txBody>
+          <a:bodyPr lIns="0" tIns="0" rIns="0" bIns="0" anchor="t">
+            <a:noAutofit/>
+          </a:bodyPr>
+          <a:p>
+            <a:endParaRPr lang="en-US" sz="2400" b="0" u="none" strike="noStrike">
+              <a:solidFill>
+                <a:srgbClr val="FFFFFF"/>
+              </a:solidFill>
+              <a:effectLst/>
+              <a:uFillTx/>
+              <a:latin typeface="Times New Roman"/>
+            </a:endParaRPr>
+          </a:p>
+        </p:txBody>
+      </p:sp>
+      <p:sp>
+        <p:nvSpPr>
+          <p:cNvPr id="223" name=""/>
+          <p:cNvSpPr/>
+          <p:nvPr/>
+        </p:nvSpPr>
+        <p:spPr>
+          <a:xfrm>
+            <a:off x="5662800" y="3397680"/>
+            <a:ext cx="41400" cy="41760"/>
+          </a:xfrm>
+          <a:custGeom>
+            <a:avLst/>
+            <a:gdLst/>
+            <a:ahLst/>
+            <a:rect l="0" t="0" r="r" b="b"/>
+            <a:pathLst>
+              <a:path fill="none" w="115" h="116">
+                <a:moveTo>
+                  <a:pt x="115" y="58"/>
+                </a:moveTo>
+                <a:cubicBezTo>
+                  <a:pt x="115" y="135"/>
+                  <a:pt x="0" y="135"/>
+                  <a:pt x="0" y="58"/>
+                </a:cubicBezTo>
+                <a:cubicBezTo>
+                  <a:pt x="0" y="-19"/>
+                  <a:pt x="115" y="-19"/>
+                  <a:pt x="115" y="58"/>
+                </a:cubicBezTo>
+              </a:path>
+            </a:pathLst>
+          </a:custGeom>
+          <a:ln cap="rnd" w="5400">
+            <a:solidFill>
+              <a:srgbClr val="6E6E6E"/>
+            </a:solidFill>
+            <a:round/>
+          </a:ln>
+        </p:spPr>
+        <p:txBody>
+          <a:bodyPr lIns="2520" tIns="2520" rIns="2520" bIns="2520" anchor="t">
+            <a:noAutofit/>
+          </a:bodyPr>
+          <a:p>
+            <a:endParaRPr lang="en-US" sz="2400" b="0" u="none" strike="noStrike">
+              <a:solidFill>
+                <a:srgbClr val="000000"/>
+              </a:solidFill>
+              <a:effectLst/>
+              <a:uFillTx/>
+              <a:latin typeface="Times New Roman"/>
+            </a:endParaRPr>
+          </a:p>
+        </p:txBody>
+      </p:sp>
+      <p:sp>
+        <p:nvSpPr>
+          <p:cNvPr id="224" name=""/>
+          <p:cNvSpPr/>
+          <p:nvPr/>
+        </p:nvSpPr>
+        <p:spPr>
+          <a:xfrm>
+            <a:off x="4724280" y="3670200"/>
+            <a:ext cx="41400" cy="41400"/>
+          </a:xfrm>
+          <a:custGeom>
+            <a:avLst/>
+            <a:gdLst/>
+            <a:ahLst/>
+            <a:rect l="0" t="0" r="r" b="b"/>
+            <a:pathLst>
+              <a:path w="115" h="115">
+                <a:moveTo>
+                  <a:pt x="0" y="58"/>
+                </a:moveTo>
+                <a:cubicBezTo>
+                  <a:pt x="0" y="-19"/>
+                  <a:pt x="115" y="-19"/>
+                  <a:pt x="115" y="58"/>
+                </a:cubicBezTo>
+                <a:cubicBezTo>
+                  <a:pt x="115" y="134"/>
+                  <a:pt x="0" y="134"/>
+                  <a:pt x="0" y="58"/>
+                </a:cubicBezTo>
+                <a:close/>
+              </a:path>
+            </a:pathLst>
+          </a:custGeom>
+          <a:solidFill>
+            <a:srgbClr val="1F5F9E"/>
+          </a:solidFill>
+          <a:ln w="0">
+            <a:noFill/>
+          </a:ln>
+        </p:spPr>
+        <p:txBody>
+          <a:bodyPr lIns="0" tIns="0" rIns="0" bIns="0" anchor="t">
+            <a:noAutofit/>
+          </a:bodyPr>
+          <a:p>
+            <a:endParaRPr lang="en-US" sz="2400" b="0" u="none" strike="noStrike">
+              <a:solidFill>
+                <a:srgbClr val="FFFFFF"/>
+              </a:solidFill>
+              <a:effectLst/>
+              <a:uFillTx/>
+              <a:latin typeface="Times New Roman"/>
+            </a:endParaRPr>
+          </a:p>
+        </p:txBody>
+      </p:sp>
+      <p:sp>
+        <p:nvSpPr>
+          <p:cNvPr id="225" name=""/>
+          <p:cNvSpPr/>
+          <p:nvPr/>
+        </p:nvSpPr>
+        <p:spPr>
+          <a:xfrm>
+            <a:off x="4724280" y="3670200"/>
+            <a:ext cx="41400" cy="41400"/>
+          </a:xfrm>
+          <a:custGeom>
+            <a:avLst/>
+            <a:gdLst/>
+            <a:ahLst/>
+            <a:rect l="0" t="0" r="r" b="b"/>
+            <a:pathLst>
+              <a:path fill="none" w="115" h="115">
+                <a:moveTo>
+                  <a:pt x="115" y="58"/>
+                </a:moveTo>
+                <a:cubicBezTo>
+                  <a:pt x="115" y="134"/>
+                  <a:pt x="0" y="134"/>
+                  <a:pt x="0" y="58"/>
+                </a:cubicBezTo>
+                <a:cubicBezTo>
+                  <a:pt x="0" y="-19"/>
+                  <a:pt x="115" y="-19"/>
+                  <a:pt x="115" y="58"/>
+                </a:cubicBezTo>
+              </a:path>
+            </a:pathLst>
+          </a:custGeom>
+          <a:ln cap="rnd" w="5400">
+            <a:solidFill>
+              <a:srgbClr val="1F5F9E"/>
+            </a:solidFill>
+            <a:round/>
+          </a:ln>
+        </p:spPr>
+        <p:txBody>
+          <a:bodyPr lIns="2520" tIns="2520" rIns="2520" bIns="2520" anchor="t">
+            <a:noAutofit/>
+          </a:bodyPr>
+          <a:p>
+            <a:endParaRPr lang="en-US" sz="2400" b="0" u="none" strike="noStrike">
+              <a:solidFill>
+                <a:srgbClr val="000000"/>
+              </a:solidFill>
+              <a:effectLst/>
+              <a:uFillTx/>
+              <a:latin typeface="Times New Roman"/>
+            </a:endParaRPr>
+          </a:p>
+        </p:txBody>
+      </p:sp>
+      <p:sp>
+        <p:nvSpPr>
+          <p:cNvPr id="226" name=""/>
+          <p:cNvSpPr/>
+          <p:nvPr/>
+        </p:nvSpPr>
+        <p:spPr>
+          <a:xfrm>
+            <a:off x="4929120" y="3852000"/>
+            <a:ext cx="41400" cy="41040"/>
+          </a:xfrm>
+          <a:custGeom>
+            <a:avLst/>
+            <a:gdLst/>
+            <a:ahLst/>
+            <a:rect l="0" t="0" r="r" b="b"/>
+            <a:pathLst>
+              <a:path w="115" h="114">
+                <a:moveTo>
+                  <a:pt x="0" y="56"/>
+                </a:moveTo>
+                <a:cubicBezTo>
+                  <a:pt x="0" y="-19"/>
+                  <a:pt x="115" y="-19"/>
+                  <a:pt x="115" y="56"/>
+                </a:cubicBezTo>
+                <a:cubicBezTo>
+                  <a:pt x="115" y="133"/>
+                  <a:pt x="0" y="133"/>
+                  <a:pt x="0" y="56"/>
+                </a:cubicBezTo>
+                <a:close/>
+              </a:path>
+            </a:pathLst>
+          </a:custGeom>
+          <a:solidFill>
+            <a:srgbClr val="A8A8A8"/>
+          </a:solidFill>
+          <a:ln w="0">
+            <a:noFill/>
+          </a:ln>
+        </p:spPr>
+        <p:txBody>
+          <a:bodyPr lIns="0" tIns="0" rIns="0" bIns="0" anchor="t">
+            <a:noAutofit/>
+          </a:bodyPr>
+          <a:p>
+            <a:endParaRPr lang="en-US" sz="2400" b="0" u="none" strike="noStrike">
+              <a:solidFill>
+                <a:srgbClr val="000000"/>
+              </a:solidFill>
+              <a:effectLst/>
+              <a:uFillTx/>
+              <a:latin typeface="Times New Roman"/>
+            </a:endParaRPr>
+          </a:p>
+        </p:txBody>
+      </p:sp>
+      <p:sp>
+        <p:nvSpPr>
+          <p:cNvPr id="227" name=""/>
+          <p:cNvSpPr/>
+          <p:nvPr/>
+        </p:nvSpPr>
+        <p:spPr>
+          <a:xfrm>
+            <a:off x="4929120" y="3852000"/>
+            <a:ext cx="41400" cy="41040"/>
+          </a:xfrm>
+          <a:custGeom>
+            <a:avLst/>
+            <a:gdLst/>
+            <a:ahLst/>
+            <a:rect l="0" t="0" r="r" b="b"/>
+            <a:pathLst>
+              <a:path fill="none" w="115" h="114">
+                <a:moveTo>
+                  <a:pt x="115" y="56"/>
+                </a:moveTo>
+                <a:cubicBezTo>
+                  <a:pt x="115" y="133"/>
+                  <a:pt x="0" y="133"/>
+                  <a:pt x="0" y="56"/>
+                </a:cubicBezTo>
+                <a:cubicBezTo>
+                  <a:pt x="0" y="-19"/>
+                  <a:pt x="115" y="-19"/>
+                  <a:pt x="115" y="56"/>
+                </a:cubicBezTo>
+              </a:path>
+            </a:pathLst>
+          </a:custGeom>
+          <a:ln cap="rnd" w="5400">
+            <a:solidFill>
+              <a:srgbClr val="A8A8A8"/>
+            </a:solidFill>
+            <a:round/>
+          </a:ln>
+        </p:spPr>
+        <p:txBody>
+          <a:bodyPr lIns="2520" tIns="2520" rIns="2520" bIns="2520" anchor="t">
+            <a:noAutofit/>
+          </a:bodyPr>
+          <a:p>
+            <a:endParaRPr lang="en-US" sz="2400" b="0" u="none" strike="noStrike">
+              <a:solidFill>
+                <a:srgbClr val="000000"/>
+              </a:solidFill>
+              <a:effectLst/>
+              <a:uFillTx/>
+              <a:latin typeface="Times New Roman"/>
+            </a:endParaRPr>
+          </a:p>
+        </p:txBody>
+      </p:sp>
+      <p:sp>
+        <p:nvSpPr>
+          <p:cNvPr id="228" name=""/>
+          <p:cNvSpPr/>
+          <p:nvPr/>
+        </p:nvSpPr>
+        <p:spPr>
+          <a:xfrm>
+            <a:off x="4794840" y="3760920"/>
             <a:ext cx="41040" cy="41760"/>
           </a:xfrm>
           <a:custGeom>
@@ -8633,13 +11986,13 @@
       </p:sp>
       <p:sp>
         <p:nvSpPr>
-          <p:cNvPr id="166" name=""/>
-          <p:cNvSpPr/>
-          <p:nvPr/>
-        </p:nvSpPr>
-        <p:spPr>
-          <a:xfrm>
-            <a:off x="2198880" y="2670840"/>
+          <p:cNvPr id="229" name=""/>
+          <p:cNvSpPr/>
+          <p:nvPr/>
+        </p:nvSpPr>
+        <p:spPr>
+          <a:xfrm>
+            <a:off x="4794840" y="3760920"/>
             <a:ext cx="41040" cy="41760"/>
           </a:xfrm>
           <a:custGeom>
@@ -8690,3366 +12043,13 @@
       </p:sp>
       <p:sp>
         <p:nvSpPr>
-          <p:cNvPr id="167" name=""/>
-          <p:cNvSpPr/>
-          <p:nvPr/>
-        </p:nvSpPr>
-        <p:spPr>
-          <a:xfrm>
-            <a:off x="2159280" y="2943360"/>
-            <a:ext cx="41040" cy="41760"/>
-          </a:xfrm>
-          <a:custGeom>
-            <a:avLst/>
-            <a:gdLst/>
-            <a:ahLst/>
-            <a:rect l="0" t="0" r="r" b="b"/>
-            <a:pathLst>
-              <a:path w="114" h="116">
-                <a:moveTo>
-                  <a:pt x="0" y="58"/>
-                </a:moveTo>
-                <a:cubicBezTo>
-                  <a:pt x="0" y="-19"/>
-                  <a:pt x="114" y="-19"/>
-                  <a:pt x="114" y="58"/>
-                </a:cubicBezTo>
-                <a:cubicBezTo>
-                  <a:pt x="114" y="135"/>
-                  <a:pt x="0" y="135"/>
-                  <a:pt x="0" y="58"/>
-                </a:cubicBezTo>
-                <a:close/>
-              </a:path>
-            </a:pathLst>
-          </a:custGeom>
-          <a:solidFill>
-            <a:srgbClr val="D1552C"/>
-          </a:solidFill>
-          <a:ln w="0">
-            <a:noFill/>
-          </a:ln>
-        </p:spPr>
-        <p:txBody>
-          <a:bodyPr lIns="0" tIns="0" rIns="0" bIns="0" anchor="t">
-            <a:noAutofit/>
-          </a:bodyPr>
-          <a:p>
-            <a:endParaRPr lang="en-US" sz="2400" b="0" u="none" strike="noStrike">
-              <a:solidFill>
-                <a:srgbClr val="FFFFFF"/>
-              </a:solidFill>
-              <a:effectLst/>
-              <a:uFillTx/>
-              <a:latin typeface="Times New Roman"/>
-            </a:endParaRPr>
-          </a:p>
-        </p:txBody>
-      </p:sp>
-      <p:sp>
-        <p:nvSpPr>
-          <p:cNvPr id="168" name=""/>
-          <p:cNvSpPr/>
-          <p:nvPr/>
-        </p:nvSpPr>
-        <p:spPr>
-          <a:xfrm>
-            <a:off x="2159280" y="2943360"/>
-            <a:ext cx="41040" cy="41760"/>
-          </a:xfrm>
-          <a:custGeom>
-            <a:avLst/>
-            <a:gdLst/>
-            <a:ahLst/>
-            <a:rect l="0" t="0" r="r" b="b"/>
-            <a:pathLst>
-              <a:path fill="none" w="114" h="116">
-                <a:moveTo>
-                  <a:pt x="114" y="58"/>
-                </a:moveTo>
-                <a:cubicBezTo>
-                  <a:pt x="114" y="135"/>
-                  <a:pt x="0" y="135"/>
-                  <a:pt x="0" y="58"/>
-                </a:cubicBezTo>
-                <a:cubicBezTo>
-                  <a:pt x="0" y="-19"/>
-                  <a:pt x="114" y="-19"/>
-                  <a:pt x="114" y="58"/>
-                </a:cubicBezTo>
-              </a:path>
-            </a:pathLst>
-          </a:custGeom>
-          <a:ln cap="rnd" w="5400">
-            <a:solidFill>
-              <a:srgbClr val="D1552C"/>
-            </a:solidFill>
-            <a:round/>
-          </a:ln>
-        </p:spPr>
-        <p:txBody>
-          <a:bodyPr lIns="2520" tIns="2520" rIns="2520" bIns="2520" anchor="t">
-            <a:noAutofit/>
-          </a:bodyPr>
-          <a:p>
-            <a:endParaRPr lang="en-US" sz="2400" b="0" u="none" strike="noStrike">
-              <a:solidFill>
-                <a:srgbClr val="000000"/>
-              </a:solidFill>
-              <a:effectLst/>
-              <a:uFillTx/>
-              <a:latin typeface="Times New Roman"/>
-            </a:endParaRPr>
-          </a:p>
-        </p:txBody>
-      </p:sp>
-      <p:sp>
-        <p:nvSpPr>
-          <p:cNvPr id="169" name=""/>
-          <p:cNvSpPr/>
-          <p:nvPr/>
-        </p:nvSpPr>
-        <p:spPr>
-          <a:xfrm>
-            <a:off x="2171880" y="3125160"/>
-            <a:ext cx="41400" cy="41400"/>
-          </a:xfrm>
-          <a:custGeom>
-            <a:avLst/>
-            <a:gdLst/>
-            <a:ahLst/>
-            <a:rect l="0" t="0" r="r" b="b"/>
-            <a:pathLst>
-              <a:path w="115" h="115">
-                <a:moveTo>
-                  <a:pt x="0" y="57"/>
-                </a:moveTo>
-                <a:cubicBezTo>
-                  <a:pt x="0" y="-19"/>
-                  <a:pt x="115" y="-19"/>
-                  <a:pt x="115" y="57"/>
-                </a:cubicBezTo>
-                <a:cubicBezTo>
-                  <a:pt x="115" y="134"/>
-                  <a:pt x="0" y="134"/>
-                  <a:pt x="0" y="57"/>
-                </a:cubicBezTo>
-                <a:close/>
-              </a:path>
-            </a:pathLst>
-          </a:custGeom>
-          <a:solidFill>
-            <a:srgbClr val="A8A8A8"/>
-          </a:solidFill>
-          <a:ln w="0">
-            <a:noFill/>
-          </a:ln>
-        </p:spPr>
-        <p:txBody>
-          <a:bodyPr lIns="0" tIns="0" rIns="0" bIns="0" anchor="t">
-            <a:noAutofit/>
-          </a:bodyPr>
-          <a:p>
-            <a:endParaRPr lang="en-US" sz="2400" b="0" u="none" strike="noStrike">
-              <a:solidFill>
-                <a:srgbClr val="000000"/>
-              </a:solidFill>
-              <a:effectLst/>
-              <a:uFillTx/>
-              <a:latin typeface="Times New Roman"/>
-            </a:endParaRPr>
-          </a:p>
-        </p:txBody>
-      </p:sp>
-      <p:sp>
-        <p:nvSpPr>
-          <p:cNvPr id="170" name=""/>
-          <p:cNvSpPr/>
-          <p:nvPr/>
-        </p:nvSpPr>
-        <p:spPr>
-          <a:xfrm>
-            <a:off x="2171880" y="3125160"/>
-            <a:ext cx="41400" cy="41400"/>
-          </a:xfrm>
-          <a:custGeom>
-            <a:avLst/>
-            <a:gdLst/>
-            <a:ahLst/>
-            <a:rect l="0" t="0" r="r" b="b"/>
-            <a:pathLst>
-              <a:path fill="none" w="115" h="115">
-                <a:moveTo>
-                  <a:pt x="115" y="57"/>
-                </a:moveTo>
-                <a:cubicBezTo>
-                  <a:pt x="115" y="134"/>
-                  <a:pt x="0" y="134"/>
-                  <a:pt x="0" y="57"/>
-                </a:cubicBezTo>
-                <a:cubicBezTo>
-                  <a:pt x="0" y="-19"/>
-                  <a:pt x="115" y="-19"/>
-                  <a:pt x="115" y="57"/>
-                </a:cubicBezTo>
-              </a:path>
-            </a:pathLst>
-          </a:custGeom>
-          <a:ln cap="rnd" w="5400">
-            <a:solidFill>
-              <a:srgbClr val="A8A8A8"/>
-            </a:solidFill>
-            <a:round/>
-          </a:ln>
-        </p:spPr>
-        <p:txBody>
-          <a:bodyPr lIns="2520" tIns="2520" rIns="2520" bIns="2520" anchor="t">
-            <a:noAutofit/>
-          </a:bodyPr>
-          <a:p>
-            <a:endParaRPr lang="en-US" sz="2400" b="0" u="none" strike="noStrike">
-              <a:solidFill>
-                <a:srgbClr val="000000"/>
-              </a:solidFill>
-              <a:effectLst/>
-              <a:uFillTx/>
-              <a:latin typeface="Times New Roman"/>
-            </a:endParaRPr>
-          </a:p>
-        </p:txBody>
-      </p:sp>
-      <p:sp>
-        <p:nvSpPr>
-          <p:cNvPr id="171" name=""/>
-          <p:cNvSpPr/>
-          <p:nvPr/>
-        </p:nvSpPr>
-        <p:spPr>
-          <a:xfrm>
-            <a:off x="2161080" y="3034440"/>
-            <a:ext cx="41040" cy="41400"/>
-          </a:xfrm>
-          <a:custGeom>
-            <a:avLst/>
-            <a:gdLst/>
-            <a:ahLst/>
-            <a:rect l="0" t="0" r="r" b="b"/>
-            <a:pathLst>
-              <a:path w="114" h="115">
-                <a:moveTo>
-                  <a:pt x="0" y="58"/>
-                </a:moveTo>
-                <a:cubicBezTo>
-                  <a:pt x="0" y="-19"/>
-                  <a:pt x="114" y="-19"/>
-                  <a:pt x="114" y="58"/>
-                </a:cubicBezTo>
-                <a:cubicBezTo>
-                  <a:pt x="114" y="134"/>
-                  <a:pt x="0" y="134"/>
-                  <a:pt x="0" y="58"/>
-                </a:cubicBezTo>
-                <a:close/>
-              </a:path>
-            </a:pathLst>
-          </a:custGeom>
-          <a:solidFill>
-            <a:srgbClr val="6E6E6E"/>
-          </a:solidFill>
-          <a:ln w="0">
-            <a:noFill/>
-          </a:ln>
-        </p:spPr>
-        <p:txBody>
-          <a:bodyPr lIns="0" tIns="0" rIns="0" bIns="0" anchor="t">
-            <a:noAutofit/>
-          </a:bodyPr>
-          <a:p>
-            <a:endParaRPr lang="en-US" sz="2400" b="0" u="none" strike="noStrike">
-              <a:solidFill>
-                <a:srgbClr val="FFFFFF"/>
-              </a:solidFill>
-              <a:effectLst/>
-              <a:uFillTx/>
-              <a:latin typeface="Times New Roman"/>
-            </a:endParaRPr>
-          </a:p>
-        </p:txBody>
-      </p:sp>
-      <p:sp>
-        <p:nvSpPr>
-          <p:cNvPr id="172" name=""/>
-          <p:cNvSpPr/>
-          <p:nvPr/>
-        </p:nvSpPr>
-        <p:spPr>
-          <a:xfrm>
-            <a:off x="2161080" y="3034440"/>
-            <a:ext cx="41040" cy="41400"/>
-          </a:xfrm>
-          <a:custGeom>
-            <a:avLst/>
-            <a:gdLst/>
-            <a:ahLst/>
-            <a:rect l="0" t="0" r="r" b="b"/>
-            <a:pathLst>
-              <a:path fill="none" w="114" h="115">
-                <a:moveTo>
-                  <a:pt x="114" y="58"/>
-                </a:moveTo>
-                <a:cubicBezTo>
-                  <a:pt x="114" y="134"/>
-                  <a:pt x="0" y="134"/>
-                  <a:pt x="0" y="58"/>
-                </a:cubicBezTo>
-                <a:cubicBezTo>
-                  <a:pt x="0" y="-19"/>
-                  <a:pt x="114" y="-19"/>
-                  <a:pt x="114" y="58"/>
-                </a:cubicBezTo>
-              </a:path>
-            </a:pathLst>
-          </a:custGeom>
-          <a:ln cap="rnd" w="5400">
-            <a:solidFill>
-              <a:srgbClr val="6E6E6E"/>
-            </a:solidFill>
-            <a:round/>
-          </a:ln>
-        </p:spPr>
-        <p:txBody>
-          <a:bodyPr lIns="2520" tIns="2520" rIns="2520" bIns="2520" anchor="t">
-            <a:noAutofit/>
-          </a:bodyPr>
-          <a:p>
-            <a:endParaRPr lang="en-US" sz="2400" b="0" u="none" strike="noStrike">
-              <a:solidFill>
-                <a:srgbClr val="000000"/>
-              </a:solidFill>
-              <a:effectLst/>
-              <a:uFillTx/>
-              <a:latin typeface="Times New Roman"/>
-            </a:endParaRPr>
-          </a:p>
-        </p:txBody>
-      </p:sp>
-      <p:sp>
-        <p:nvSpPr>
-          <p:cNvPr id="173" name=""/>
-          <p:cNvSpPr/>
-          <p:nvPr/>
-        </p:nvSpPr>
-        <p:spPr>
-          <a:xfrm>
-            <a:off x="2230920" y="3306960"/>
-            <a:ext cx="41400" cy="41040"/>
-          </a:xfrm>
-          <a:custGeom>
-            <a:avLst/>
-            <a:gdLst/>
-            <a:ahLst/>
-            <a:rect l="0" t="0" r="r" b="b"/>
-            <a:pathLst>
-              <a:path w="115" h="114">
-                <a:moveTo>
-                  <a:pt x="0" y="58"/>
-                </a:moveTo>
-                <a:cubicBezTo>
-                  <a:pt x="0" y="-19"/>
-                  <a:pt x="115" y="-19"/>
-                  <a:pt x="115" y="58"/>
-                </a:cubicBezTo>
-                <a:cubicBezTo>
-                  <a:pt x="115" y="133"/>
-                  <a:pt x="0" y="133"/>
-                  <a:pt x="0" y="58"/>
-                </a:cubicBezTo>
-                <a:close/>
-              </a:path>
-            </a:pathLst>
-          </a:custGeom>
-          <a:solidFill>
-            <a:srgbClr val="D1552C"/>
-          </a:solidFill>
-          <a:ln w="0">
-            <a:noFill/>
-          </a:ln>
-        </p:spPr>
-        <p:txBody>
-          <a:bodyPr lIns="0" tIns="0" rIns="0" bIns="0" anchor="t">
-            <a:noAutofit/>
-          </a:bodyPr>
-          <a:p>
-            <a:endParaRPr lang="en-US" sz="2400" b="0" u="none" strike="noStrike">
-              <a:solidFill>
-                <a:srgbClr val="FFFFFF"/>
-              </a:solidFill>
-              <a:effectLst/>
-              <a:uFillTx/>
-              <a:latin typeface="Times New Roman"/>
-            </a:endParaRPr>
-          </a:p>
-        </p:txBody>
-      </p:sp>
-      <p:sp>
-        <p:nvSpPr>
-          <p:cNvPr id="174" name=""/>
-          <p:cNvSpPr/>
-          <p:nvPr/>
-        </p:nvSpPr>
-        <p:spPr>
-          <a:xfrm>
-            <a:off x="2230920" y="3306960"/>
-            <a:ext cx="41400" cy="41040"/>
-          </a:xfrm>
-          <a:custGeom>
-            <a:avLst/>
-            <a:gdLst/>
-            <a:ahLst/>
-            <a:rect l="0" t="0" r="r" b="b"/>
-            <a:pathLst>
-              <a:path fill="none" w="115" h="114">
-                <a:moveTo>
-                  <a:pt x="115" y="58"/>
-                </a:moveTo>
-                <a:cubicBezTo>
-                  <a:pt x="115" y="133"/>
-                  <a:pt x="0" y="133"/>
-                  <a:pt x="0" y="58"/>
-                </a:cubicBezTo>
-                <a:cubicBezTo>
-                  <a:pt x="0" y="-19"/>
-                  <a:pt x="115" y="-19"/>
-                  <a:pt x="115" y="58"/>
-                </a:cubicBezTo>
-              </a:path>
-            </a:pathLst>
-          </a:custGeom>
-          <a:ln cap="rnd" w="5400">
-            <a:solidFill>
-              <a:srgbClr val="D1552C"/>
-            </a:solidFill>
-            <a:round/>
-          </a:ln>
-        </p:spPr>
-        <p:txBody>
-          <a:bodyPr lIns="2520" tIns="2520" rIns="2520" bIns="2520" anchor="t">
-            <a:noAutofit/>
-          </a:bodyPr>
-          <a:p>
-            <a:endParaRPr lang="en-US" sz="2400" b="0" u="none" strike="noStrike">
-              <a:solidFill>
-                <a:srgbClr val="000000"/>
-              </a:solidFill>
-              <a:effectLst/>
-              <a:uFillTx/>
-              <a:latin typeface="Times New Roman"/>
-            </a:endParaRPr>
-          </a:p>
-        </p:txBody>
-      </p:sp>
-      <p:sp>
-        <p:nvSpPr>
-          <p:cNvPr id="175" name=""/>
-          <p:cNvSpPr/>
-          <p:nvPr/>
-        </p:nvSpPr>
-        <p:spPr>
-          <a:xfrm>
-            <a:off x="2257200" y="3488400"/>
-            <a:ext cx="41400" cy="41400"/>
-          </a:xfrm>
-          <a:custGeom>
-            <a:avLst/>
-            <a:gdLst/>
-            <a:ahLst/>
-            <a:rect l="0" t="0" r="r" b="b"/>
-            <a:pathLst>
-              <a:path w="115" h="115">
-                <a:moveTo>
-                  <a:pt x="0" y="57"/>
-                </a:moveTo>
-                <a:cubicBezTo>
-                  <a:pt x="0" y="-19"/>
-                  <a:pt x="115" y="-19"/>
-                  <a:pt x="115" y="57"/>
-                </a:cubicBezTo>
-                <a:cubicBezTo>
-                  <a:pt x="115" y="134"/>
-                  <a:pt x="0" y="134"/>
-                  <a:pt x="0" y="57"/>
-                </a:cubicBezTo>
-                <a:close/>
-              </a:path>
-            </a:pathLst>
-          </a:custGeom>
-          <a:solidFill>
-            <a:srgbClr val="A8A8A8"/>
-          </a:solidFill>
-          <a:ln w="0">
-            <a:noFill/>
-          </a:ln>
-        </p:spPr>
-        <p:txBody>
-          <a:bodyPr lIns="0" tIns="0" rIns="0" bIns="0" anchor="t">
-            <a:noAutofit/>
-          </a:bodyPr>
-          <a:p>
-            <a:endParaRPr lang="en-US" sz="2400" b="0" u="none" strike="noStrike">
-              <a:solidFill>
-                <a:srgbClr val="000000"/>
-              </a:solidFill>
-              <a:effectLst/>
-              <a:uFillTx/>
-              <a:latin typeface="Times New Roman"/>
-            </a:endParaRPr>
-          </a:p>
-        </p:txBody>
-      </p:sp>
-      <p:sp>
-        <p:nvSpPr>
-          <p:cNvPr id="176" name=""/>
-          <p:cNvSpPr/>
-          <p:nvPr/>
-        </p:nvSpPr>
-        <p:spPr>
-          <a:xfrm>
-            <a:off x="2257200" y="3488400"/>
-            <a:ext cx="41400" cy="41400"/>
-          </a:xfrm>
-          <a:custGeom>
-            <a:avLst/>
-            <a:gdLst/>
-            <a:ahLst/>
-            <a:rect l="0" t="0" r="r" b="b"/>
-            <a:pathLst>
-              <a:path fill="none" w="115" h="115">
-                <a:moveTo>
-                  <a:pt x="115" y="57"/>
-                </a:moveTo>
-                <a:cubicBezTo>
-                  <a:pt x="115" y="134"/>
-                  <a:pt x="0" y="134"/>
-                  <a:pt x="0" y="57"/>
-                </a:cubicBezTo>
-                <a:cubicBezTo>
-                  <a:pt x="0" y="-19"/>
-                  <a:pt x="115" y="-19"/>
-                  <a:pt x="115" y="57"/>
-                </a:cubicBezTo>
-              </a:path>
-            </a:pathLst>
-          </a:custGeom>
-          <a:ln cap="rnd" w="5400">
-            <a:solidFill>
-              <a:srgbClr val="A8A8A8"/>
-            </a:solidFill>
-            <a:round/>
-          </a:ln>
-        </p:spPr>
-        <p:txBody>
-          <a:bodyPr lIns="2520" tIns="2520" rIns="2520" bIns="2520" anchor="t">
-            <a:noAutofit/>
-          </a:bodyPr>
-          <a:p>
-            <a:endParaRPr lang="en-US" sz="2400" b="0" u="none" strike="noStrike">
-              <a:solidFill>
-                <a:srgbClr val="000000"/>
-              </a:solidFill>
-              <a:effectLst/>
-              <a:uFillTx/>
-              <a:latin typeface="Times New Roman"/>
-            </a:endParaRPr>
-          </a:p>
-        </p:txBody>
-      </p:sp>
-      <p:sp>
-        <p:nvSpPr>
-          <p:cNvPr id="177" name=""/>
-          <p:cNvSpPr/>
-          <p:nvPr/>
-        </p:nvSpPr>
-        <p:spPr>
-          <a:xfrm>
-            <a:off x="2239560" y="3397680"/>
-            <a:ext cx="41400" cy="41760"/>
-          </a:xfrm>
-          <a:custGeom>
-            <a:avLst/>
-            <a:gdLst/>
-            <a:ahLst/>
-            <a:rect l="0" t="0" r="r" b="b"/>
-            <a:pathLst>
-              <a:path w="115" h="116">
-                <a:moveTo>
-                  <a:pt x="0" y="58"/>
-                </a:moveTo>
-                <a:cubicBezTo>
-                  <a:pt x="0" y="-19"/>
-                  <a:pt x="115" y="-19"/>
-                  <a:pt x="115" y="58"/>
-                </a:cubicBezTo>
-                <a:cubicBezTo>
-                  <a:pt x="115" y="135"/>
-                  <a:pt x="0" y="135"/>
-                  <a:pt x="0" y="58"/>
-                </a:cubicBezTo>
-                <a:close/>
-              </a:path>
-            </a:pathLst>
-          </a:custGeom>
-          <a:solidFill>
-            <a:srgbClr val="6E6E6E"/>
-          </a:solidFill>
-          <a:ln w="0">
-            <a:noFill/>
-          </a:ln>
-        </p:spPr>
-        <p:txBody>
-          <a:bodyPr lIns="0" tIns="0" rIns="0" bIns="0" anchor="t">
-            <a:noAutofit/>
-          </a:bodyPr>
-          <a:p>
-            <a:endParaRPr lang="en-US" sz="2400" b="0" u="none" strike="noStrike">
-              <a:solidFill>
-                <a:srgbClr val="FFFFFF"/>
-              </a:solidFill>
-              <a:effectLst/>
-              <a:uFillTx/>
-              <a:latin typeface="Times New Roman"/>
-            </a:endParaRPr>
-          </a:p>
-        </p:txBody>
-      </p:sp>
-      <p:sp>
-        <p:nvSpPr>
-          <p:cNvPr id="178" name=""/>
-          <p:cNvSpPr/>
-          <p:nvPr/>
-        </p:nvSpPr>
-        <p:spPr>
-          <a:xfrm>
-            <a:off x="2239560" y="3397680"/>
-            <a:ext cx="41400" cy="41760"/>
-          </a:xfrm>
-          <a:custGeom>
-            <a:avLst/>
-            <a:gdLst/>
-            <a:ahLst/>
-            <a:rect l="0" t="0" r="r" b="b"/>
-            <a:pathLst>
-              <a:path fill="none" w="115" h="116">
-                <a:moveTo>
-                  <a:pt x="115" y="58"/>
-                </a:moveTo>
-                <a:cubicBezTo>
-                  <a:pt x="115" y="135"/>
-                  <a:pt x="0" y="135"/>
-                  <a:pt x="0" y="58"/>
-                </a:cubicBezTo>
-                <a:cubicBezTo>
-                  <a:pt x="0" y="-19"/>
-                  <a:pt x="115" y="-19"/>
-                  <a:pt x="115" y="58"/>
-                </a:cubicBezTo>
-              </a:path>
-            </a:pathLst>
-          </a:custGeom>
-          <a:ln cap="rnd" w="5400">
-            <a:solidFill>
-              <a:srgbClr val="6E6E6E"/>
-            </a:solidFill>
-            <a:round/>
-          </a:ln>
-        </p:spPr>
-        <p:txBody>
-          <a:bodyPr lIns="2520" tIns="2520" rIns="2520" bIns="2520" anchor="t">
-            <a:noAutofit/>
-          </a:bodyPr>
-          <a:p>
-            <a:endParaRPr lang="en-US" sz="2400" b="0" u="none" strike="noStrike">
-              <a:solidFill>
-                <a:srgbClr val="000000"/>
-              </a:solidFill>
-              <a:effectLst/>
-              <a:uFillTx/>
-              <a:latin typeface="Times New Roman"/>
-            </a:endParaRPr>
-          </a:p>
-        </p:txBody>
-      </p:sp>
-      <p:sp>
-        <p:nvSpPr>
-          <p:cNvPr id="179" name=""/>
-          <p:cNvSpPr/>
-          <p:nvPr/>
-        </p:nvSpPr>
-        <p:spPr>
-          <a:xfrm>
-            <a:off x="2081520" y="3670200"/>
-            <a:ext cx="41400" cy="41400"/>
-          </a:xfrm>
-          <a:custGeom>
-            <a:avLst/>
-            <a:gdLst/>
-            <a:ahLst/>
-            <a:rect l="0" t="0" r="r" b="b"/>
-            <a:pathLst>
-              <a:path w="115" h="115">
-                <a:moveTo>
-                  <a:pt x="0" y="58"/>
-                </a:moveTo>
-                <a:cubicBezTo>
-                  <a:pt x="0" y="-19"/>
-                  <a:pt x="115" y="-19"/>
-                  <a:pt x="115" y="58"/>
-                </a:cubicBezTo>
-                <a:cubicBezTo>
-                  <a:pt x="115" y="134"/>
-                  <a:pt x="0" y="134"/>
-                  <a:pt x="0" y="58"/>
-                </a:cubicBezTo>
-                <a:close/>
-              </a:path>
-            </a:pathLst>
-          </a:custGeom>
-          <a:solidFill>
-            <a:srgbClr val="D1552C"/>
-          </a:solidFill>
-          <a:ln w="0">
-            <a:noFill/>
-          </a:ln>
-        </p:spPr>
-        <p:txBody>
-          <a:bodyPr lIns="0" tIns="0" rIns="0" bIns="0" anchor="t">
-            <a:noAutofit/>
-          </a:bodyPr>
-          <a:p>
-            <a:endParaRPr lang="en-US" sz="2400" b="0" u="none" strike="noStrike">
-              <a:solidFill>
-                <a:srgbClr val="FFFFFF"/>
-              </a:solidFill>
-              <a:effectLst/>
-              <a:uFillTx/>
-              <a:latin typeface="Times New Roman"/>
-            </a:endParaRPr>
-          </a:p>
-        </p:txBody>
-      </p:sp>
-      <p:sp>
-        <p:nvSpPr>
-          <p:cNvPr id="180" name=""/>
-          <p:cNvSpPr/>
-          <p:nvPr/>
-        </p:nvSpPr>
-        <p:spPr>
-          <a:xfrm>
-            <a:off x="2081520" y="3670200"/>
-            <a:ext cx="41400" cy="41400"/>
-          </a:xfrm>
-          <a:custGeom>
-            <a:avLst/>
-            <a:gdLst/>
-            <a:ahLst/>
-            <a:rect l="0" t="0" r="r" b="b"/>
-            <a:pathLst>
-              <a:path fill="none" w="115" h="115">
-                <a:moveTo>
-                  <a:pt x="115" y="58"/>
-                </a:moveTo>
-                <a:cubicBezTo>
-                  <a:pt x="115" y="134"/>
-                  <a:pt x="0" y="134"/>
-                  <a:pt x="0" y="58"/>
-                </a:cubicBezTo>
-                <a:cubicBezTo>
-                  <a:pt x="0" y="-19"/>
-                  <a:pt x="115" y="-19"/>
-                  <a:pt x="115" y="58"/>
-                </a:cubicBezTo>
-              </a:path>
-            </a:pathLst>
-          </a:custGeom>
-          <a:ln cap="rnd" w="5400">
-            <a:solidFill>
-              <a:srgbClr val="D1552C"/>
-            </a:solidFill>
-            <a:round/>
-          </a:ln>
-        </p:spPr>
-        <p:txBody>
-          <a:bodyPr lIns="2520" tIns="2520" rIns="2520" bIns="2520" anchor="t">
-            <a:noAutofit/>
-          </a:bodyPr>
-          <a:p>
-            <a:endParaRPr lang="en-US" sz="2400" b="0" u="none" strike="noStrike">
-              <a:solidFill>
-                <a:srgbClr val="000000"/>
-              </a:solidFill>
-              <a:effectLst/>
-              <a:uFillTx/>
-              <a:latin typeface="Times New Roman"/>
-            </a:endParaRPr>
-          </a:p>
-        </p:txBody>
-      </p:sp>
-      <p:sp>
-        <p:nvSpPr>
-          <p:cNvPr id="181" name=""/>
-          <p:cNvSpPr/>
-          <p:nvPr/>
-        </p:nvSpPr>
-        <p:spPr>
-          <a:xfrm>
-            <a:off x="2100960" y="3852000"/>
-            <a:ext cx="41400" cy="41040"/>
-          </a:xfrm>
-          <a:custGeom>
-            <a:avLst/>
-            <a:gdLst/>
-            <a:ahLst/>
-            <a:rect l="0" t="0" r="r" b="b"/>
-            <a:pathLst>
-              <a:path w="115" h="114">
-                <a:moveTo>
-                  <a:pt x="0" y="56"/>
-                </a:moveTo>
-                <a:cubicBezTo>
-                  <a:pt x="0" y="-19"/>
-                  <a:pt x="115" y="-19"/>
-                  <a:pt x="115" y="56"/>
-                </a:cubicBezTo>
-                <a:cubicBezTo>
-                  <a:pt x="115" y="133"/>
-                  <a:pt x="0" y="133"/>
-                  <a:pt x="0" y="56"/>
-                </a:cubicBezTo>
-                <a:close/>
-              </a:path>
-            </a:pathLst>
-          </a:custGeom>
-          <a:solidFill>
-            <a:srgbClr val="A8A8A8"/>
-          </a:solidFill>
-          <a:ln w="0">
-            <a:noFill/>
-          </a:ln>
-        </p:spPr>
-        <p:txBody>
-          <a:bodyPr lIns="0" tIns="0" rIns="0" bIns="0" anchor="t">
-            <a:noAutofit/>
-          </a:bodyPr>
-          <a:p>
-            <a:endParaRPr lang="en-US" sz="2400" b="0" u="none" strike="noStrike">
-              <a:solidFill>
-                <a:srgbClr val="000000"/>
-              </a:solidFill>
-              <a:effectLst/>
-              <a:uFillTx/>
-              <a:latin typeface="Times New Roman"/>
-            </a:endParaRPr>
-          </a:p>
-        </p:txBody>
-      </p:sp>
-      <p:sp>
-        <p:nvSpPr>
-          <p:cNvPr id="182" name=""/>
-          <p:cNvSpPr/>
-          <p:nvPr/>
-        </p:nvSpPr>
-        <p:spPr>
-          <a:xfrm>
-            <a:off x="2100960" y="3852000"/>
-            <a:ext cx="41400" cy="41040"/>
-          </a:xfrm>
-          <a:custGeom>
-            <a:avLst/>
-            <a:gdLst/>
-            <a:ahLst/>
-            <a:rect l="0" t="0" r="r" b="b"/>
-            <a:pathLst>
-              <a:path fill="none" w="115" h="114">
-                <a:moveTo>
-                  <a:pt x="115" y="56"/>
-                </a:moveTo>
-                <a:cubicBezTo>
-                  <a:pt x="115" y="133"/>
-                  <a:pt x="0" y="133"/>
-                  <a:pt x="0" y="56"/>
-                </a:cubicBezTo>
-                <a:cubicBezTo>
-                  <a:pt x="0" y="-19"/>
-                  <a:pt x="115" y="-19"/>
-                  <a:pt x="115" y="56"/>
-                </a:cubicBezTo>
-              </a:path>
-            </a:pathLst>
-          </a:custGeom>
-          <a:ln cap="rnd" w="5400">
-            <a:solidFill>
-              <a:srgbClr val="A8A8A8"/>
-            </a:solidFill>
-            <a:round/>
-          </a:ln>
-        </p:spPr>
-        <p:txBody>
-          <a:bodyPr lIns="2520" tIns="2520" rIns="2520" bIns="2520" anchor="t">
-            <a:noAutofit/>
-          </a:bodyPr>
-          <a:p>
-            <a:endParaRPr lang="en-US" sz="2400" b="0" u="none" strike="noStrike">
-              <a:solidFill>
-                <a:srgbClr val="000000"/>
-              </a:solidFill>
-              <a:effectLst/>
-              <a:uFillTx/>
-              <a:latin typeface="Times New Roman"/>
-            </a:endParaRPr>
-          </a:p>
-        </p:txBody>
-      </p:sp>
-      <p:sp>
-        <p:nvSpPr>
-          <p:cNvPr id="183" name=""/>
-          <p:cNvSpPr/>
-          <p:nvPr/>
-        </p:nvSpPr>
-        <p:spPr>
-          <a:xfrm>
-            <a:off x="2080800" y="3760920"/>
-            <a:ext cx="41040" cy="41760"/>
-          </a:xfrm>
-          <a:custGeom>
-            <a:avLst/>
-            <a:gdLst/>
-            <a:ahLst/>
-            <a:rect l="0" t="0" r="r" b="b"/>
-            <a:pathLst>
-              <a:path w="114" h="116">
-                <a:moveTo>
-                  <a:pt x="0" y="58"/>
-                </a:moveTo>
-                <a:cubicBezTo>
-                  <a:pt x="0" y="-19"/>
-                  <a:pt x="114" y="-19"/>
-                  <a:pt x="114" y="58"/>
-                </a:cubicBezTo>
-                <a:cubicBezTo>
-                  <a:pt x="114" y="135"/>
-                  <a:pt x="0" y="135"/>
-                  <a:pt x="0" y="58"/>
-                </a:cubicBezTo>
-                <a:close/>
-              </a:path>
-            </a:pathLst>
-          </a:custGeom>
-          <a:solidFill>
-            <a:srgbClr val="6E6E6E"/>
-          </a:solidFill>
-          <a:ln w="0">
-            <a:noFill/>
-          </a:ln>
-        </p:spPr>
-        <p:txBody>
-          <a:bodyPr lIns="0" tIns="0" rIns="0" bIns="0" anchor="t">
-            <a:noAutofit/>
-          </a:bodyPr>
-          <a:p>
-            <a:endParaRPr lang="en-US" sz="2400" b="0" u="none" strike="noStrike">
-              <a:solidFill>
-                <a:srgbClr val="FFFFFF"/>
-              </a:solidFill>
-              <a:effectLst/>
-              <a:uFillTx/>
-              <a:latin typeface="Times New Roman"/>
-            </a:endParaRPr>
-          </a:p>
-        </p:txBody>
-      </p:sp>
-      <p:sp>
-        <p:nvSpPr>
-          <p:cNvPr id="184" name=""/>
-          <p:cNvSpPr/>
-          <p:nvPr/>
-        </p:nvSpPr>
-        <p:spPr>
-          <a:xfrm>
-            <a:off x="2080800" y="3760920"/>
-            <a:ext cx="41040" cy="41760"/>
-          </a:xfrm>
-          <a:custGeom>
-            <a:avLst/>
-            <a:gdLst/>
-            <a:ahLst/>
-            <a:rect l="0" t="0" r="r" b="b"/>
-            <a:pathLst>
-              <a:path fill="none" w="114" h="116">
-                <a:moveTo>
-                  <a:pt x="114" y="58"/>
-                </a:moveTo>
-                <a:cubicBezTo>
-                  <a:pt x="114" y="135"/>
-                  <a:pt x="0" y="135"/>
-                  <a:pt x="0" y="58"/>
-                </a:cubicBezTo>
-                <a:cubicBezTo>
-                  <a:pt x="0" y="-19"/>
-                  <a:pt x="114" y="-19"/>
-                  <a:pt x="114" y="58"/>
-                </a:cubicBezTo>
-              </a:path>
-            </a:pathLst>
-          </a:custGeom>
-          <a:ln cap="rnd" w="5400">
-            <a:solidFill>
-              <a:srgbClr val="6E6E6E"/>
-            </a:solidFill>
-            <a:round/>
-          </a:ln>
-        </p:spPr>
-        <p:txBody>
-          <a:bodyPr lIns="2520" tIns="2520" rIns="2520" bIns="2520" anchor="t">
-            <a:noAutofit/>
-          </a:bodyPr>
-          <a:p>
-            <a:endParaRPr lang="en-US" sz="2400" b="0" u="none" strike="noStrike">
-              <a:solidFill>
-                <a:srgbClr val="000000"/>
-              </a:solidFill>
-              <a:effectLst/>
-              <a:uFillTx/>
-              <a:latin typeface="Times New Roman"/>
-            </a:endParaRPr>
-          </a:p>
-        </p:txBody>
-      </p:sp>
-      <p:sp>
-        <p:nvSpPr>
-          <p:cNvPr id="185" name=""/>
-          <p:cNvSpPr txBox="1"/>
-          <p:nvPr/>
-        </p:nvSpPr>
-        <p:spPr>
-          <a:xfrm>
-            <a:off x="3685320" y="12600"/>
-            <a:ext cx="101160" cy="114840"/>
-          </a:xfrm>
-          <a:prstGeom prst="rect">
-            <a:avLst/>
-          </a:prstGeom>
-          <a:noFill/>
-          <a:ln w="0">
-            <a:noFill/>
-          </a:ln>
-        </p:spPr>
-        <p:txBody>
-          <a:bodyPr wrap="none" lIns="0" tIns="0" rIns="0" bIns="0" anchor="t">
-            <a:spAutoFit/>
-          </a:bodyPr>
-          <a:p>
-            <a:pPr/>
-            <a:r>
-              <a:rPr lang="en-US" sz="800" b="1" u="none" strike="noStrike">
-                <a:solidFill>
-                  <a:srgbClr val="1A1A1A"/>
-                </a:solidFill>
-                <a:effectLst/>
-                <a:uFillTx/>
-                <a:latin typeface="Arial"/>
-                <a:ea typeface="Arial"/>
-              </a:rPr>
-              <a:t>b</a:t>
-            </a:r>
-            <a:endParaRPr lang="en-US" sz="800" b="0" u="none" strike="noStrike">
-              <a:solidFill>
-                <a:srgbClr val="000000"/>
-              </a:solidFill>
-              <a:effectLst/>
-              <a:uFillTx/>
-              <a:latin typeface="Times New Roman"/>
-            </a:endParaRPr>
-          </a:p>
-        </p:txBody>
-      </p:sp>
-      <p:sp>
-        <p:nvSpPr>
-          <p:cNvPr id="186" name=""/>
-          <p:cNvSpPr txBox="1"/>
-          <p:nvPr/>
-        </p:nvSpPr>
-        <p:spPr>
-          <a:xfrm>
-            <a:off x="2814480" y="2562840"/>
-            <a:ext cx="659160" cy="79560"/>
-          </a:xfrm>
-          <a:prstGeom prst="rect">
-            <a:avLst/>
-          </a:prstGeom>
-          <a:noFill/>
-          <a:ln w="0">
-            <a:noFill/>
-          </a:ln>
-        </p:spPr>
-        <p:txBody>
-          <a:bodyPr wrap="none" lIns="0" tIns="0" rIns="0" bIns="0" anchor="t">
-            <a:spAutoFit/>
-          </a:bodyPr>
-          <a:p>
-            <a:pPr/>
-            <a:r>
-              <a:rPr lang="en-US" sz="550" b="0" u="none" strike="noStrike">
-                <a:solidFill>
-                  <a:srgbClr val="D1552C"/>
-                </a:solidFill>
-                <a:effectLst/>
-                <a:uFillTx/>
-                <a:latin typeface="Arial"/>
-                <a:ea typeface="Arial"/>
-              </a:rPr>
-              <a:t>Coverage gap (main)</a:t>
-            </a:r>
-            <a:endParaRPr lang="en-US" sz="550" b="0" u="none" strike="noStrike">
-              <a:solidFill>
-                <a:srgbClr val="000000"/>
-              </a:solidFill>
-              <a:effectLst/>
-              <a:uFillTx/>
-              <a:latin typeface="Times New Roman"/>
-            </a:endParaRPr>
-          </a:p>
-        </p:txBody>
-      </p:sp>
-      <p:sp>
-        <p:nvSpPr>
-          <p:cNvPr id="187" name=""/>
-          <p:cNvSpPr txBox="1"/>
-          <p:nvPr/>
-        </p:nvSpPr>
-        <p:spPr>
-          <a:xfrm>
-            <a:off x="2830680" y="2744280"/>
-            <a:ext cx="452520" cy="79560"/>
-          </a:xfrm>
-          <a:prstGeom prst="rect">
-            <a:avLst/>
-          </a:prstGeom>
-          <a:noFill/>
-          <a:ln w="0">
-            <a:noFill/>
-          </a:ln>
-        </p:spPr>
-        <p:txBody>
-          <a:bodyPr wrap="none" lIns="0" tIns="0" rIns="0" bIns="0" anchor="t">
-            <a:spAutoFit/>
-          </a:bodyPr>
-          <a:p>
-            <a:pPr/>
-            <a:r>
-              <a:rPr lang="en-US" sz="550" b="0" u="none" strike="noStrike">
-                <a:solidFill>
-                  <a:srgbClr val="8C8C8C"/>
-                </a:solidFill>
-                <a:effectLst/>
-                <a:uFillTx/>
-                <a:latin typeface="Arial"/>
-                <a:ea typeface="Arial"/>
-              </a:rPr>
-              <a:t>Zero-filled (v1)</a:t>
-            </a:r>
-            <a:endParaRPr lang="en-US" sz="550" b="0" u="none" strike="noStrike">
-              <a:solidFill>
-                <a:srgbClr val="000000"/>
-              </a:solidFill>
-              <a:effectLst/>
-              <a:uFillTx/>
-              <a:latin typeface="Times New Roman"/>
-            </a:endParaRPr>
-          </a:p>
-        </p:txBody>
-      </p:sp>
-      <p:sp>
-        <p:nvSpPr>
-          <p:cNvPr id="188" name=""/>
-          <p:cNvSpPr/>
-          <p:nvPr/>
-        </p:nvSpPr>
-        <p:spPr>
-          <a:xfrm>
-            <a:off x="3735720" y="2502360"/>
-            <a:ext cx="2754360" cy="1468440"/>
-          </a:xfrm>
-          <a:custGeom>
-            <a:avLst/>
-            <a:gdLst/>
-            <a:ahLst/>
-            <a:rect l="0" t="0" r="r" b="b"/>
-            <a:pathLst>
-              <a:path w="7651" h="4079">
-                <a:moveTo>
-                  <a:pt x="0" y="0"/>
-                </a:moveTo>
-                <a:lnTo>
-                  <a:pt x="7651" y="0"/>
-                </a:lnTo>
-                <a:lnTo>
-                  <a:pt x="7651" y="4079"/>
-                </a:lnTo>
-                <a:lnTo>
-                  <a:pt x="0" y="4079"/>
-                </a:lnTo>
-                <a:lnTo>
-                  <a:pt x="0" y="0"/>
-                </a:lnTo>
-                <a:close/>
-              </a:path>
-            </a:pathLst>
-          </a:custGeom>
-          <a:solidFill>
-            <a:srgbClr val="FFFFFF"/>
-          </a:solidFill>
-          <a:ln w="0">
-            <a:noFill/>
-          </a:ln>
-        </p:spPr>
-        <p:txBody>
-          <a:bodyPr lIns="0" tIns="0" rIns="0" bIns="0" anchor="t">
-            <a:noAutofit/>
-          </a:bodyPr>
-          <a:p>
-            <a:endParaRPr lang="en-US" sz="2400" b="0" u="none" strike="noStrike">
-              <a:solidFill>
-                <a:srgbClr val="000000"/>
-              </a:solidFill>
-              <a:effectLst/>
-              <a:uFillTx/>
-              <a:latin typeface="Times New Roman"/>
-            </a:endParaRPr>
-          </a:p>
-        </p:txBody>
-      </p:sp>
-      <p:sp>
-        <p:nvSpPr>
-          <p:cNvPr id="189" name=""/>
-          <p:cNvSpPr/>
-          <p:nvPr/>
-        </p:nvSpPr>
-        <p:spPr>
-          <a:xfrm flipV="1">
-            <a:off x="3873600" y="2502360"/>
-            <a:ext cx="0" cy="1468080"/>
-          </a:xfrm>
-          <a:prstGeom prst="line">
-            <a:avLst/>
-          </a:prstGeom>
-          <a:ln w="5400">
-            <a:solidFill>
-              <a:srgbClr val="ECECEC"/>
-            </a:solidFill>
-            <a:round/>
-          </a:ln>
-        </p:spPr>
-        <p:style>
-          <a:lnRef idx="0"/>
-          <a:fillRef idx="0"/>
-          <a:effectRef idx="0"/>
-          <a:fontRef idx="minor"/>
-        </p:style>
-        <p:txBody>
-          <a:bodyPr lIns="2520" tIns="2520" rIns="2520" bIns="2520" anchor="t">
-            <a:noAutofit/>
-          </a:bodyPr>
-          <a:p>
-            <a:endParaRPr lang="en-US" sz="2400" b="0" u="none" strike="noStrike">
-              <a:solidFill>
-                <a:srgbClr val="000000"/>
-              </a:solidFill>
-              <a:effectLst/>
-              <a:uFillTx/>
-              <a:latin typeface="Times New Roman"/>
-            </a:endParaRPr>
-          </a:p>
-        </p:txBody>
-      </p:sp>
-      <p:sp>
-        <p:nvSpPr>
-          <p:cNvPr id="190" name=""/>
-          <p:cNvSpPr/>
-          <p:nvPr/>
-        </p:nvSpPr>
-        <p:spPr>
-          <a:xfrm flipV="1">
-            <a:off x="4561920" y="2502360"/>
-            <a:ext cx="0" cy="1468080"/>
-          </a:xfrm>
-          <a:prstGeom prst="line">
-            <a:avLst/>
-          </a:prstGeom>
-          <a:ln w="5400">
-            <a:solidFill>
-              <a:srgbClr val="ECECEC"/>
-            </a:solidFill>
-            <a:round/>
-          </a:ln>
-        </p:spPr>
-        <p:style>
-          <a:lnRef idx="0"/>
-          <a:fillRef idx="0"/>
-          <a:effectRef idx="0"/>
-          <a:fontRef idx="minor"/>
-        </p:style>
-        <p:txBody>
-          <a:bodyPr lIns="2520" tIns="2520" rIns="2520" bIns="2520" anchor="t">
-            <a:noAutofit/>
-          </a:bodyPr>
-          <a:p>
-            <a:endParaRPr lang="en-US" sz="2400" b="0" u="none" strike="noStrike">
-              <a:solidFill>
-                <a:srgbClr val="000000"/>
-              </a:solidFill>
-              <a:effectLst/>
-              <a:uFillTx/>
-              <a:latin typeface="Times New Roman"/>
-            </a:endParaRPr>
-          </a:p>
-        </p:txBody>
-      </p:sp>
-      <p:sp>
-        <p:nvSpPr>
-          <p:cNvPr id="191" name=""/>
-          <p:cNvSpPr/>
-          <p:nvPr/>
-        </p:nvSpPr>
-        <p:spPr>
-          <a:xfrm flipV="1">
-            <a:off x="5250600" y="2502360"/>
-            <a:ext cx="0" cy="1468080"/>
-          </a:xfrm>
-          <a:prstGeom prst="line">
-            <a:avLst/>
-          </a:prstGeom>
-          <a:ln w="5400">
-            <a:solidFill>
-              <a:srgbClr val="ECECEC"/>
-            </a:solidFill>
-            <a:round/>
-          </a:ln>
-        </p:spPr>
-        <p:style>
-          <a:lnRef idx="0"/>
-          <a:fillRef idx="0"/>
-          <a:effectRef idx="0"/>
-          <a:fontRef idx="minor"/>
-        </p:style>
-        <p:txBody>
-          <a:bodyPr lIns="2520" tIns="2520" rIns="2520" bIns="2520" anchor="t">
-            <a:noAutofit/>
-          </a:bodyPr>
-          <a:p>
-            <a:endParaRPr lang="en-US" sz="2400" b="0" u="none" strike="noStrike">
-              <a:solidFill>
-                <a:srgbClr val="000000"/>
-              </a:solidFill>
-              <a:effectLst/>
-              <a:uFillTx/>
-              <a:latin typeface="Times New Roman"/>
-            </a:endParaRPr>
-          </a:p>
-        </p:txBody>
-      </p:sp>
-      <p:sp>
-        <p:nvSpPr>
-          <p:cNvPr id="192" name=""/>
-          <p:cNvSpPr/>
-          <p:nvPr/>
-        </p:nvSpPr>
-        <p:spPr>
-          <a:xfrm flipV="1">
-            <a:off x="5938920" y="2502360"/>
-            <a:ext cx="0" cy="1468080"/>
-          </a:xfrm>
-          <a:prstGeom prst="line">
-            <a:avLst/>
-          </a:prstGeom>
-          <a:ln w="5400">
-            <a:solidFill>
-              <a:srgbClr val="ECECEC"/>
-            </a:solidFill>
-            <a:round/>
-          </a:ln>
-        </p:spPr>
-        <p:style>
-          <a:lnRef idx="0"/>
-          <a:fillRef idx="0"/>
-          <a:effectRef idx="0"/>
-          <a:fontRef idx="minor"/>
-        </p:style>
-        <p:txBody>
-          <a:bodyPr lIns="2520" tIns="2520" rIns="2520" bIns="2520" anchor="t">
-            <a:noAutofit/>
-          </a:bodyPr>
-          <a:p>
-            <a:endParaRPr lang="en-US" sz="2400" b="0" u="none" strike="noStrike">
-              <a:solidFill>
-                <a:srgbClr val="000000"/>
-              </a:solidFill>
-              <a:effectLst/>
-              <a:uFillTx/>
-              <a:latin typeface="Times New Roman"/>
-            </a:endParaRPr>
-          </a:p>
-        </p:txBody>
-      </p:sp>
-      <p:sp>
-        <p:nvSpPr>
-          <p:cNvPr id="193" name=""/>
-          <p:cNvSpPr/>
-          <p:nvPr/>
-        </p:nvSpPr>
-        <p:spPr>
-          <a:xfrm flipV="1">
-            <a:off x="3873600" y="2502360"/>
-            <a:ext cx="0" cy="1468080"/>
-          </a:xfrm>
-          <a:prstGeom prst="line">
-            <a:avLst/>
-          </a:prstGeom>
-          <a:ln w="6480">
-            <a:solidFill>
-              <a:srgbClr val="9A9A9A"/>
-            </a:solidFill>
-            <a:custDash>
-              <a:ds d="288889" sp="288889"/>
-            </a:custDash>
-            <a:round/>
-          </a:ln>
-        </p:spPr>
-        <p:style>
-          <a:lnRef idx="0"/>
-          <a:fillRef idx="0"/>
-          <a:effectRef idx="0"/>
-          <a:fontRef idx="minor"/>
-        </p:style>
-        <p:txBody>
-          <a:bodyPr lIns="3240" tIns="3240" rIns="3240" bIns="3240" anchor="t">
-            <a:noAutofit/>
-          </a:bodyPr>
-          <a:p>
-            <a:endParaRPr lang="en-US" sz="2400" b="0" u="none" strike="noStrike">
-              <a:solidFill>
-                <a:srgbClr val="000000"/>
-              </a:solidFill>
-              <a:effectLst/>
-              <a:uFillTx/>
-              <a:latin typeface="Times New Roman"/>
-            </a:endParaRPr>
-          </a:p>
-        </p:txBody>
-      </p:sp>
-      <p:sp>
-        <p:nvSpPr>
-          <p:cNvPr id="194" name=""/>
-          <p:cNvSpPr/>
-          <p:nvPr/>
-        </p:nvSpPr>
-        <p:spPr>
-          <a:xfrm>
-            <a:off x="4717800" y="2600640"/>
-            <a:ext cx="1161360" cy="0"/>
-          </a:xfrm>
-          <a:prstGeom prst="line">
-            <a:avLst/>
-          </a:prstGeom>
-          <a:ln w="10800">
-            <a:solidFill>
-              <a:srgbClr val="1F5F9E"/>
-            </a:solidFill>
-            <a:round/>
-          </a:ln>
-        </p:spPr>
-        <p:style>
-          <a:lnRef idx="0"/>
-          <a:fillRef idx="0"/>
-          <a:effectRef idx="0"/>
-          <a:fontRef idx="minor"/>
-        </p:style>
-        <p:txBody>
-          <a:bodyPr lIns="5400" tIns="-5400" rIns="5400" bIns="-5400" anchor="t">
-            <a:noAutofit/>
-          </a:bodyPr>
-          <a:p>
-            <a:endParaRPr lang="en-US" sz="2400" b="0" u="none" strike="noStrike">
-              <a:solidFill>
-                <a:srgbClr val="000000"/>
-              </a:solidFill>
-              <a:effectLst/>
-              <a:uFillTx/>
-              <a:latin typeface="Times New Roman"/>
-            </a:endParaRPr>
-          </a:p>
-        </p:txBody>
-      </p:sp>
-      <p:sp>
-        <p:nvSpPr>
-          <p:cNvPr id="195" name=""/>
-          <p:cNvSpPr/>
-          <p:nvPr/>
-        </p:nvSpPr>
-        <p:spPr>
-          <a:xfrm>
-            <a:off x="4854600" y="2782440"/>
-            <a:ext cx="1211040" cy="0"/>
-          </a:xfrm>
-          <a:prstGeom prst="line">
-            <a:avLst/>
-          </a:prstGeom>
-          <a:ln w="10800">
-            <a:solidFill>
-              <a:srgbClr val="A8A8A8"/>
-            </a:solidFill>
-            <a:round/>
-          </a:ln>
-        </p:spPr>
-        <p:style>
-          <a:lnRef idx="0"/>
-          <a:fillRef idx="0"/>
-          <a:effectRef idx="0"/>
-          <a:fontRef idx="minor"/>
-        </p:style>
-        <p:txBody>
-          <a:bodyPr lIns="5400" tIns="-5400" rIns="5400" bIns="-5400" anchor="t">
-            <a:noAutofit/>
-          </a:bodyPr>
-          <a:p>
-            <a:endParaRPr lang="en-US" sz="2400" b="0" u="none" strike="noStrike">
-              <a:solidFill>
-                <a:srgbClr val="000000"/>
-              </a:solidFill>
-              <a:effectLst/>
-              <a:uFillTx/>
-              <a:latin typeface="Times New Roman"/>
-            </a:endParaRPr>
-          </a:p>
-        </p:txBody>
-      </p:sp>
-      <p:sp>
-        <p:nvSpPr>
-          <p:cNvPr id="196" name=""/>
-          <p:cNvSpPr/>
-          <p:nvPr/>
-        </p:nvSpPr>
-        <p:spPr>
-          <a:xfrm>
-            <a:off x="4800960" y="2691360"/>
-            <a:ext cx="1183320" cy="0"/>
-          </a:xfrm>
-          <a:prstGeom prst="line">
-            <a:avLst/>
-          </a:prstGeom>
-          <a:ln w="10800">
-            <a:solidFill>
-              <a:srgbClr val="6E6E6E"/>
-            </a:solidFill>
-            <a:round/>
-          </a:ln>
-        </p:spPr>
-        <p:style>
-          <a:lnRef idx="0"/>
-          <a:fillRef idx="0"/>
-          <a:effectRef idx="0"/>
-          <a:fontRef idx="minor"/>
-        </p:style>
-        <p:txBody>
-          <a:bodyPr lIns="5400" tIns="-5400" rIns="5400" bIns="-5400" anchor="t">
-            <a:noAutofit/>
-          </a:bodyPr>
-          <a:p>
-            <a:endParaRPr lang="en-US" sz="2400" b="0" u="none" strike="noStrike">
-              <a:solidFill>
-                <a:srgbClr val="000000"/>
-              </a:solidFill>
-              <a:effectLst/>
-              <a:uFillTx/>
-              <a:latin typeface="Times New Roman"/>
-            </a:endParaRPr>
-          </a:p>
-        </p:txBody>
-      </p:sp>
-      <p:sp>
-        <p:nvSpPr>
-          <p:cNvPr id="197" name=""/>
-          <p:cNvSpPr/>
-          <p:nvPr/>
-        </p:nvSpPr>
-        <p:spPr>
-          <a:xfrm>
-            <a:off x="4826520" y="2963880"/>
-            <a:ext cx="1155240" cy="0"/>
-          </a:xfrm>
-          <a:prstGeom prst="line">
-            <a:avLst/>
-          </a:prstGeom>
-          <a:ln w="10800">
-            <a:solidFill>
-              <a:srgbClr val="1F5F9E"/>
-            </a:solidFill>
-            <a:round/>
-          </a:ln>
-        </p:spPr>
-        <p:style>
-          <a:lnRef idx="0"/>
-          <a:fillRef idx="0"/>
-          <a:effectRef idx="0"/>
-          <a:fontRef idx="minor"/>
-        </p:style>
-        <p:txBody>
-          <a:bodyPr lIns="5400" tIns="-5400" rIns="5400" bIns="-5400" anchor="t">
-            <a:noAutofit/>
-          </a:bodyPr>
-          <a:p>
-            <a:endParaRPr lang="en-US" sz="2400" b="0" u="none" strike="noStrike">
-              <a:solidFill>
-                <a:srgbClr val="000000"/>
-              </a:solidFill>
-              <a:effectLst/>
-              <a:uFillTx/>
-              <a:latin typeface="Times New Roman"/>
-            </a:endParaRPr>
-          </a:p>
-        </p:txBody>
-      </p:sp>
-      <p:sp>
-        <p:nvSpPr>
-          <p:cNvPr id="198" name=""/>
-          <p:cNvSpPr/>
-          <p:nvPr/>
-        </p:nvSpPr>
-        <p:spPr>
-          <a:xfrm>
-            <a:off x="4950000" y="3145680"/>
-            <a:ext cx="1199880" cy="0"/>
-          </a:xfrm>
-          <a:prstGeom prst="line">
-            <a:avLst/>
-          </a:prstGeom>
-          <a:ln w="10800">
-            <a:solidFill>
-              <a:srgbClr val="A8A8A8"/>
-            </a:solidFill>
-            <a:round/>
-          </a:ln>
-        </p:spPr>
-        <p:style>
-          <a:lnRef idx="0"/>
-          <a:fillRef idx="0"/>
-          <a:effectRef idx="0"/>
-          <a:fontRef idx="minor"/>
-        </p:style>
-        <p:txBody>
-          <a:bodyPr lIns="5400" tIns="-5400" rIns="5400" bIns="-5400" anchor="t">
-            <a:noAutofit/>
-          </a:bodyPr>
-          <a:p>
-            <a:endParaRPr lang="en-US" sz="2400" b="0" u="none" strike="noStrike">
-              <a:solidFill>
-                <a:srgbClr val="000000"/>
-              </a:solidFill>
-              <a:effectLst/>
-              <a:uFillTx/>
-              <a:latin typeface="Times New Roman"/>
-            </a:endParaRPr>
-          </a:p>
-        </p:txBody>
-      </p:sp>
-      <p:sp>
-        <p:nvSpPr>
-          <p:cNvPr id="199" name=""/>
-          <p:cNvSpPr/>
-          <p:nvPr/>
-        </p:nvSpPr>
-        <p:spPr>
-          <a:xfrm>
-            <a:off x="4906080" y="3054960"/>
-            <a:ext cx="1176120" cy="0"/>
-          </a:xfrm>
-          <a:prstGeom prst="line">
-            <a:avLst/>
-          </a:prstGeom>
-          <a:ln w="10800">
-            <a:solidFill>
-              <a:srgbClr val="6E6E6E"/>
-            </a:solidFill>
-            <a:round/>
-          </a:ln>
-        </p:spPr>
-        <p:style>
-          <a:lnRef idx="0"/>
-          <a:fillRef idx="0"/>
-          <a:effectRef idx="0"/>
-          <a:fontRef idx="minor"/>
-        </p:style>
-        <p:txBody>
-          <a:bodyPr lIns="5400" tIns="-5400" rIns="5400" bIns="-5400" anchor="t">
-            <a:noAutofit/>
-          </a:bodyPr>
-          <a:p>
-            <a:endParaRPr lang="en-US" sz="2400" b="0" u="none" strike="noStrike">
-              <a:solidFill>
-                <a:srgbClr val="000000"/>
-              </a:solidFill>
-              <a:effectLst/>
-              <a:uFillTx/>
-              <a:latin typeface="Times New Roman"/>
-            </a:endParaRPr>
-          </a:p>
-        </p:txBody>
-      </p:sp>
-      <p:sp>
-        <p:nvSpPr>
-          <p:cNvPr id="200" name=""/>
-          <p:cNvSpPr/>
-          <p:nvPr/>
-        </p:nvSpPr>
-        <p:spPr>
-          <a:xfrm>
-            <a:off x="4885200" y="3327480"/>
-            <a:ext cx="1242360" cy="0"/>
-          </a:xfrm>
-          <a:prstGeom prst="line">
-            <a:avLst/>
-          </a:prstGeom>
-          <a:ln w="10800">
-            <a:solidFill>
-              <a:srgbClr val="1F5F9E"/>
-            </a:solidFill>
-            <a:round/>
-          </a:ln>
-        </p:spPr>
-        <p:style>
-          <a:lnRef idx="0"/>
-          <a:fillRef idx="0"/>
-          <a:effectRef idx="0"/>
-          <a:fontRef idx="minor"/>
-        </p:style>
-        <p:txBody>
-          <a:bodyPr lIns="5400" tIns="-5400" rIns="5400" bIns="-5400" anchor="t">
-            <a:noAutofit/>
-          </a:bodyPr>
-          <a:p>
-            <a:endParaRPr lang="en-US" sz="2400" b="0" u="none" strike="noStrike">
-              <a:solidFill>
-                <a:srgbClr val="000000"/>
-              </a:solidFill>
-              <a:effectLst/>
-              <a:uFillTx/>
-              <a:latin typeface="Times New Roman"/>
-            </a:endParaRPr>
-          </a:p>
-        </p:txBody>
-      </p:sp>
-      <p:sp>
-        <p:nvSpPr>
-          <p:cNvPr id="201" name=""/>
-          <p:cNvSpPr/>
-          <p:nvPr/>
-        </p:nvSpPr>
-        <p:spPr>
-          <a:xfrm>
-            <a:off x="5045040" y="3508920"/>
-            <a:ext cx="1313640" cy="0"/>
-          </a:xfrm>
-          <a:prstGeom prst="line">
-            <a:avLst/>
-          </a:prstGeom>
-          <a:ln w="10800">
-            <a:solidFill>
-              <a:srgbClr val="A8A8A8"/>
-            </a:solidFill>
-            <a:round/>
-          </a:ln>
-        </p:spPr>
-        <p:style>
-          <a:lnRef idx="0"/>
-          <a:fillRef idx="0"/>
-          <a:effectRef idx="0"/>
-          <a:fontRef idx="minor"/>
-        </p:style>
-        <p:txBody>
-          <a:bodyPr lIns="5400" tIns="-5400" rIns="5400" bIns="-5400" anchor="t">
-            <a:noAutofit/>
-          </a:bodyPr>
-          <a:p>
-            <a:endParaRPr lang="en-US" sz="2400" b="0" u="none" strike="noStrike">
-              <a:solidFill>
-                <a:srgbClr val="000000"/>
-              </a:solidFill>
-              <a:effectLst/>
-              <a:uFillTx/>
-              <a:latin typeface="Times New Roman"/>
-            </a:endParaRPr>
-          </a:p>
-        </p:txBody>
-      </p:sp>
-      <p:sp>
-        <p:nvSpPr>
-          <p:cNvPr id="202" name=""/>
-          <p:cNvSpPr/>
-          <p:nvPr/>
-        </p:nvSpPr>
-        <p:spPr>
-          <a:xfrm>
-            <a:off x="4987440" y="3418200"/>
-            <a:ext cx="1274760" cy="0"/>
-          </a:xfrm>
-          <a:prstGeom prst="line">
-            <a:avLst/>
-          </a:prstGeom>
-          <a:ln w="10800">
-            <a:solidFill>
-              <a:srgbClr val="6E6E6E"/>
-            </a:solidFill>
-            <a:round/>
-          </a:ln>
-        </p:spPr>
-        <p:style>
-          <a:lnRef idx="0"/>
-          <a:fillRef idx="0"/>
-          <a:effectRef idx="0"/>
-          <a:fontRef idx="minor"/>
-        </p:style>
-        <p:txBody>
-          <a:bodyPr lIns="5400" tIns="-5400" rIns="5400" bIns="-5400" anchor="t">
-            <a:noAutofit/>
-          </a:bodyPr>
-          <a:p>
-            <a:endParaRPr lang="en-US" sz="2400" b="0" u="none" strike="noStrike">
-              <a:solidFill>
-                <a:srgbClr val="000000"/>
-              </a:solidFill>
-              <a:effectLst/>
-              <a:uFillTx/>
-              <a:latin typeface="Times New Roman"/>
-            </a:endParaRPr>
-          </a:p>
-        </p:txBody>
-      </p:sp>
-      <p:sp>
-        <p:nvSpPr>
-          <p:cNvPr id="203" name=""/>
-          <p:cNvSpPr/>
-          <p:nvPr/>
-        </p:nvSpPr>
-        <p:spPr>
-          <a:xfrm>
-            <a:off x="4254840" y="3690720"/>
-            <a:ext cx="1022040" cy="0"/>
-          </a:xfrm>
-          <a:prstGeom prst="line">
-            <a:avLst/>
-          </a:prstGeom>
-          <a:ln w="10800">
-            <a:solidFill>
-              <a:srgbClr val="1F5F9E"/>
-            </a:solidFill>
-            <a:round/>
-          </a:ln>
-        </p:spPr>
-        <p:style>
-          <a:lnRef idx="0"/>
-          <a:fillRef idx="0"/>
-          <a:effectRef idx="0"/>
-          <a:fontRef idx="minor"/>
-        </p:style>
-        <p:txBody>
-          <a:bodyPr lIns="5400" tIns="-5400" rIns="5400" bIns="-5400" anchor="t">
-            <a:noAutofit/>
-          </a:bodyPr>
-          <a:p>
-            <a:endParaRPr lang="en-US" sz="2400" b="0" u="none" strike="noStrike">
-              <a:solidFill>
-                <a:srgbClr val="000000"/>
-              </a:solidFill>
-              <a:effectLst/>
-              <a:uFillTx/>
-              <a:latin typeface="Times New Roman"/>
-            </a:endParaRPr>
-          </a:p>
-        </p:txBody>
-      </p:sp>
-      <p:sp>
-        <p:nvSpPr>
-          <p:cNvPr id="204" name=""/>
-          <p:cNvSpPr/>
-          <p:nvPr/>
-        </p:nvSpPr>
-        <p:spPr>
-          <a:xfrm>
-            <a:off x="4431600" y="3872160"/>
-            <a:ext cx="1081080" cy="0"/>
-          </a:xfrm>
-          <a:prstGeom prst="line">
-            <a:avLst/>
-          </a:prstGeom>
-          <a:ln w="10800">
-            <a:solidFill>
-              <a:srgbClr val="A8A8A8"/>
-            </a:solidFill>
-            <a:round/>
-          </a:ln>
-        </p:spPr>
-        <p:style>
-          <a:lnRef idx="0"/>
-          <a:fillRef idx="0"/>
-          <a:effectRef idx="0"/>
-          <a:fontRef idx="minor"/>
-        </p:style>
-        <p:txBody>
-          <a:bodyPr lIns="5400" tIns="-5400" rIns="5400" bIns="-5400" anchor="t">
-            <a:noAutofit/>
-          </a:bodyPr>
-          <a:p>
-            <a:endParaRPr lang="en-US" sz="2400" b="0" u="none" strike="noStrike">
-              <a:solidFill>
-                <a:srgbClr val="000000"/>
-              </a:solidFill>
-              <a:effectLst/>
-              <a:uFillTx/>
-              <a:latin typeface="Times New Roman"/>
-            </a:endParaRPr>
-          </a:p>
-        </p:txBody>
-      </p:sp>
-      <p:sp>
-        <p:nvSpPr>
-          <p:cNvPr id="205" name=""/>
-          <p:cNvSpPr/>
-          <p:nvPr/>
-        </p:nvSpPr>
-        <p:spPr>
-          <a:xfrm>
-            <a:off x="4326840" y="3781440"/>
-            <a:ext cx="1038240" cy="0"/>
-          </a:xfrm>
-          <a:prstGeom prst="line">
-            <a:avLst/>
-          </a:prstGeom>
-          <a:ln w="10800">
-            <a:solidFill>
-              <a:srgbClr val="6E6E6E"/>
-            </a:solidFill>
-            <a:round/>
-          </a:ln>
-        </p:spPr>
-        <p:style>
-          <a:lnRef idx="0"/>
-          <a:fillRef idx="0"/>
-          <a:effectRef idx="0"/>
-          <a:fontRef idx="minor"/>
-        </p:style>
-        <p:txBody>
-          <a:bodyPr lIns="5400" tIns="-5400" rIns="5400" bIns="-5400" anchor="t">
-            <a:noAutofit/>
-          </a:bodyPr>
-          <a:p>
-            <a:endParaRPr lang="en-US" sz="2400" b="0" u="none" strike="noStrike">
-              <a:solidFill>
-                <a:srgbClr val="000000"/>
-              </a:solidFill>
-              <a:effectLst/>
-              <a:uFillTx/>
-              <a:latin typeface="Times New Roman"/>
-            </a:endParaRPr>
-          </a:p>
-        </p:txBody>
-      </p:sp>
-      <p:sp>
-        <p:nvSpPr>
-          <p:cNvPr id="206" name=""/>
-          <p:cNvSpPr/>
-          <p:nvPr/>
-        </p:nvSpPr>
-        <p:spPr>
-          <a:xfrm>
-            <a:off x="5243400" y="2580120"/>
-            <a:ext cx="41040" cy="41760"/>
-          </a:xfrm>
-          <a:custGeom>
-            <a:avLst/>
-            <a:gdLst/>
-            <a:ahLst/>
-            <a:rect l="0" t="0" r="r" b="b"/>
-            <a:pathLst>
-              <a:path w="114" h="116">
-                <a:moveTo>
-                  <a:pt x="0" y="58"/>
-                </a:moveTo>
-                <a:cubicBezTo>
-                  <a:pt x="0" y="-19"/>
-                  <a:pt x="114" y="-19"/>
-                  <a:pt x="114" y="58"/>
-                </a:cubicBezTo>
-                <a:cubicBezTo>
-                  <a:pt x="114" y="135"/>
-                  <a:pt x="0" y="135"/>
-                  <a:pt x="0" y="58"/>
-                </a:cubicBezTo>
-                <a:close/>
-              </a:path>
-            </a:pathLst>
-          </a:custGeom>
-          <a:solidFill>
-            <a:srgbClr val="1F5F9E"/>
-          </a:solidFill>
-          <a:ln w="0">
-            <a:noFill/>
-          </a:ln>
-        </p:spPr>
-        <p:txBody>
-          <a:bodyPr lIns="0" tIns="0" rIns="0" bIns="0" anchor="t">
-            <a:noAutofit/>
-          </a:bodyPr>
-          <a:p>
-            <a:endParaRPr lang="en-US" sz="2400" b="0" u="none" strike="noStrike">
-              <a:solidFill>
-                <a:srgbClr val="FFFFFF"/>
-              </a:solidFill>
-              <a:effectLst/>
-              <a:uFillTx/>
-              <a:latin typeface="Times New Roman"/>
-            </a:endParaRPr>
-          </a:p>
-        </p:txBody>
-      </p:sp>
-      <p:sp>
-        <p:nvSpPr>
-          <p:cNvPr id="207" name=""/>
-          <p:cNvSpPr/>
-          <p:nvPr/>
-        </p:nvSpPr>
-        <p:spPr>
-          <a:xfrm>
-            <a:off x="5243400" y="2580120"/>
-            <a:ext cx="41040" cy="41760"/>
-          </a:xfrm>
-          <a:custGeom>
-            <a:avLst/>
-            <a:gdLst/>
-            <a:ahLst/>
-            <a:rect l="0" t="0" r="r" b="b"/>
-            <a:pathLst>
-              <a:path fill="none" w="114" h="116">
-                <a:moveTo>
-                  <a:pt x="114" y="58"/>
-                </a:moveTo>
-                <a:cubicBezTo>
-                  <a:pt x="114" y="135"/>
-                  <a:pt x="0" y="135"/>
-                  <a:pt x="0" y="58"/>
-                </a:cubicBezTo>
-                <a:cubicBezTo>
-                  <a:pt x="0" y="-19"/>
-                  <a:pt x="114" y="-19"/>
-                  <a:pt x="114" y="58"/>
-                </a:cubicBezTo>
-              </a:path>
-            </a:pathLst>
-          </a:custGeom>
-          <a:ln cap="rnd" w="5400">
-            <a:solidFill>
-              <a:srgbClr val="1F5F9E"/>
-            </a:solidFill>
-            <a:round/>
-          </a:ln>
-        </p:spPr>
-        <p:txBody>
-          <a:bodyPr lIns="2520" tIns="2520" rIns="2520" bIns="2520" anchor="t">
-            <a:noAutofit/>
-          </a:bodyPr>
-          <a:p>
-            <a:endParaRPr lang="en-US" sz="2400" b="0" u="none" strike="noStrike">
-              <a:solidFill>
-                <a:srgbClr val="000000"/>
-              </a:solidFill>
-              <a:effectLst/>
-              <a:uFillTx/>
-              <a:latin typeface="Times New Roman"/>
-            </a:endParaRPr>
-          </a:p>
-        </p:txBody>
-      </p:sp>
-      <p:sp>
-        <p:nvSpPr>
-          <p:cNvPr id="208" name=""/>
-          <p:cNvSpPr/>
-          <p:nvPr/>
-        </p:nvSpPr>
-        <p:spPr>
-          <a:xfrm>
-            <a:off x="5403240" y="2761920"/>
-            <a:ext cx="41040" cy="41040"/>
-          </a:xfrm>
-          <a:custGeom>
-            <a:avLst/>
-            <a:gdLst/>
-            <a:ahLst/>
-            <a:rect l="0" t="0" r="r" b="b"/>
-            <a:pathLst>
-              <a:path w="114" h="114">
-                <a:moveTo>
-                  <a:pt x="0" y="57"/>
-                </a:moveTo>
-                <a:cubicBezTo>
-                  <a:pt x="0" y="-19"/>
-                  <a:pt x="114" y="-19"/>
-                  <a:pt x="114" y="57"/>
-                </a:cubicBezTo>
-                <a:cubicBezTo>
-                  <a:pt x="114" y="133"/>
-                  <a:pt x="0" y="133"/>
-                  <a:pt x="0" y="57"/>
-                </a:cubicBezTo>
-                <a:close/>
-              </a:path>
-            </a:pathLst>
-          </a:custGeom>
-          <a:solidFill>
-            <a:srgbClr val="A8A8A8"/>
-          </a:solidFill>
-          <a:ln w="0">
-            <a:noFill/>
-          </a:ln>
-        </p:spPr>
-        <p:txBody>
-          <a:bodyPr lIns="0" tIns="0" rIns="0" bIns="0" anchor="t">
-            <a:noAutofit/>
-          </a:bodyPr>
-          <a:p>
-            <a:endParaRPr lang="en-US" sz="2400" b="0" u="none" strike="noStrike">
-              <a:solidFill>
-                <a:srgbClr val="000000"/>
-              </a:solidFill>
-              <a:effectLst/>
-              <a:uFillTx/>
-              <a:latin typeface="Times New Roman"/>
-            </a:endParaRPr>
-          </a:p>
-        </p:txBody>
-      </p:sp>
-      <p:sp>
-        <p:nvSpPr>
-          <p:cNvPr id="209" name=""/>
-          <p:cNvSpPr/>
-          <p:nvPr/>
-        </p:nvSpPr>
-        <p:spPr>
-          <a:xfrm>
-            <a:off x="5403240" y="2761920"/>
-            <a:ext cx="41040" cy="41040"/>
-          </a:xfrm>
-          <a:custGeom>
-            <a:avLst/>
-            <a:gdLst/>
-            <a:ahLst/>
-            <a:rect l="0" t="0" r="r" b="b"/>
-            <a:pathLst>
-              <a:path fill="none" w="114" h="114">
-                <a:moveTo>
-                  <a:pt x="114" y="57"/>
-                </a:moveTo>
-                <a:cubicBezTo>
-                  <a:pt x="114" y="133"/>
-                  <a:pt x="0" y="133"/>
-                  <a:pt x="0" y="57"/>
-                </a:cubicBezTo>
-                <a:cubicBezTo>
-                  <a:pt x="0" y="-19"/>
-                  <a:pt x="114" y="-19"/>
-                  <a:pt x="114" y="57"/>
-                </a:cubicBezTo>
-              </a:path>
-            </a:pathLst>
-          </a:custGeom>
-          <a:ln cap="rnd" w="5400">
-            <a:solidFill>
-              <a:srgbClr val="A8A8A8"/>
-            </a:solidFill>
-            <a:round/>
-          </a:ln>
-        </p:spPr>
-        <p:txBody>
-          <a:bodyPr lIns="2520" tIns="2520" rIns="2520" bIns="2520" anchor="t">
-            <a:noAutofit/>
-          </a:bodyPr>
-          <a:p>
-            <a:endParaRPr lang="en-US" sz="2400" b="0" u="none" strike="noStrike">
-              <a:solidFill>
-                <a:srgbClr val="000000"/>
-              </a:solidFill>
-              <a:effectLst/>
-              <a:uFillTx/>
-              <a:latin typeface="Times New Roman"/>
-            </a:endParaRPr>
-          </a:p>
-        </p:txBody>
-      </p:sp>
-      <p:sp>
-        <p:nvSpPr>
-          <p:cNvPr id="210" name=""/>
-          <p:cNvSpPr/>
-          <p:nvPr/>
-        </p:nvSpPr>
-        <p:spPr>
-          <a:xfrm>
-            <a:off x="5336640" y="2670840"/>
-            <a:ext cx="41400" cy="41760"/>
-          </a:xfrm>
-          <a:custGeom>
-            <a:avLst/>
-            <a:gdLst/>
-            <a:ahLst/>
-            <a:rect l="0" t="0" r="r" b="b"/>
-            <a:pathLst>
-              <a:path w="115" h="116">
-                <a:moveTo>
-                  <a:pt x="0" y="58"/>
-                </a:moveTo>
-                <a:cubicBezTo>
-                  <a:pt x="0" y="-19"/>
-                  <a:pt x="115" y="-19"/>
-                  <a:pt x="115" y="58"/>
-                </a:cubicBezTo>
-                <a:cubicBezTo>
-                  <a:pt x="115" y="135"/>
-                  <a:pt x="0" y="135"/>
-                  <a:pt x="0" y="58"/>
-                </a:cubicBezTo>
-                <a:close/>
-              </a:path>
-            </a:pathLst>
-          </a:custGeom>
-          <a:solidFill>
-            <a:srgbClr val="6E6E6E"/>
-          </a:solidFill>
-          <a:ln w="0">
-            <a:noFill/>
-          </a:ln>
-        </p:spPr>
-        <p:txBody>
-          <a:bodyPr lIns="0" tIns="0" rIns="0" bIns="0" anchor="t">
-            <a:noAutofit/>
-          </a:bodyPr>
-          <a:p>
-            <a:endParaRPr lang="en-US" sz="2400" b="0" u="none" strike="noStrike">
-              <a:solidFill>
-                <a:srgbClr val="FFFFFF"/>
-              </a:solidFill>
-              <a:effectLst/>
-              <a:uFillTx/>
-              <a:latin typeface="Times New Roman"/>
-            </a:endParaRPr>
-          </a:p>
-        </p:txBody>
-      </p:sp>
-      <p:sp>
-        <p:nvSpPr>
-          <p:cNvPr id="211" name=""/>
-          <p:cNvSpPr/>
-          <p:nvPr/>
-        </p:nvSpPr>
-        <p:spPr>
-          <a:xfrm>
-            <a:off x="5336640" y="2670840"/>
-            <a:ext cx="41400" cy="41760"/>
-          </a:xfrm>
-          <a:custGeom>
-            <a:avLst/>
-            <a:gdLst/>
-            <a:ahLst/>
-            <a:rect l="0" t="0" r="r" b="b"/>
-            <a:pathLst>
-              <a:path fill="none" w="115" h="116">
-                <a:moveTo>
-                  <a:pt x="115" y="58"/>
-                </a:moveTo>
-                <a:cubicBezTo>
-                  <a:pt x="115" y="135"/>
-                  <a:pt x="0" y="135"/>
-                  <a:pt x="0" y="58"/>
-                </a:cubicBezTo>
-                <a:cubicBezTo>
-                  <a:pt x="0" y="-19"/>
-                  <a:pt x="115" y="-19"/>
-                  <a:pt x="115" y="58"/>
-                </a:cubicBezTo>
-              </a:path>
-            </a:pathLst>
-          </a:custGeom>
-          <a:ln cap="rnd" w="5400">
-            <a:solidFill>
-              <a:srgbClr val="6E6E6E"/>
-            </a:solidFill>
-            <a:round/>
-          </a:ln>
-        </p:spPr>
-        <p:txBody>
-          <a:bodyPr lIns="2520" tIns="2520" rIns="2520" bIns="2520" anchor="t">
-            <a:noAutofit/>
-          </a:bodyPr>
-          <a:p>
-            <a:endParaRPr lang="en-US" sz="2400" b="0" u="none" strike="noStrike">
-              <a:solidFill>
-                <a:srgbClr val="000000"/>
-              </a:solidFill>
-              <a:effectLst/>
-              <a:uFillTx/>
-              <a:latin typeface="Times New Roman"/>
-            </a:endParaRPr>
-          </a:p>
-        </p:txBody>
-      </p:sp>
-      <p:sp>
-        <p:nvSpPr>
-          <p:cNvPr id="212" name=""/>
-          <p:cNvSpPr/>
-          <p:nvPr/>
-        </p:nvSpPr>
-        <p:spPr>
-          <a:xfrm>
-            <a:off x="5349960" y="2943360"/>
-            <a:ext cx="41400" cy="41760"/>
-          </a:xfrm>
-          <a:custGeom>
-            <a:avLst/>
-            <a:gdLst/>
-            <a:ahLst/>
-            <a:rect l="0" t="0" r="r" b="b"/>
-            <a:pathLst>
-              <a:path w="115" h="116">
-                <a:moveTo>
-                  <a:pt x="0" y="58"/>
-                </a:moveTo>
-                <a:cubicBezTo>
-                  <a:pt x="0" y="-19"/>
-                  <a:pt x="115" y="-19"/>
-                  <a:pt x="115" y="58"/>
-                </a:cubicBezTo>
-                <a:cubicBezTo>
-                  <a:pt x="115" y="135"/>
-                  <a:pt x="0" y="135"/>
-                  <a:pt x="0" y="58"/>
-                </a:cubicBezTo>
-                <a:close/>
-              </a:path>
-            </a:pathLst>
-          </a:custGeom>
-          <a:solidFill>
-            <a:srgbClr val="1F5F9E"/>
-          </a:solidFill>
-          <a:ln w="0">
-            <a:noFill/>
-          </a:ln>
-        </p:spPr>
-        <p:txBody>
-          <a:bodyPr lIns="0" tIns="0" rIns="0" bIns="0" anchor="t">
-            <a:noAutofit/>
-          </a:bodyPr>
-          <a:p>
-            <a:endParaRPr lang="en-US" sz="2400" b="0" u="none" strike="noStrike">
-              <a:solidFill>
-                <a:srgbClr val="FFFFFF"/>
-              </a:solidFill>
-              <a:effectLst/>
-              <a:uFillTx/>
-              <a:latin typeface="Times New Roman"/>
-            </a:endParaRPr>
-          </a:p>
-        </p:txBody>
-      </p:sp>
-      <p:sp>
-        <p:nvSpPr>
-          <p:cNvPr id="213" name=""/>
-          <p:cNvSpPr/>
-          <p:nvPr/>
-        </p:nvSpPr>
-        <p:spPr>
-          <a:xfrm>
-            <a:off x="5349960" y="2943360"/>
-            <a:ext cx="41400" cy="41760"/>
-          </a:xfrm>
-          <a:custGeom>
-            <a:avLst/>
-            <a:gdLst/>
-            <a:ahLst/>
-            <a:rect l="0" t="0" r="r" b="b"/>
-            <a:pathLst>
-              <a:path fill="none" w="115" h="116">
-                <a:moveTo>
-                  <a:pt x="115" y="58"/>
-                </a:moveTo>
-                <a:cubicBezTo>
-                  <a:pt x="115" y="135"/>
-                  <a:pt x="0" y="135"/>
-                  <a:pt x="0" y="58"/>
-                </a:cubicBezTo>
-                <a:cubicBezTo>
-                  <a:pt x="0" y="-19"/>
-                  <a:pt x="115" y="-19"/>
-                  <a:pt x="115" y="58"/>
-                </a:cubicBezTo>
-              </a:path>
-            </a:pathLst>
-          </a:custGeom>
-          <a:ln cap="rnd" w="5400">
-            <a:solidFill>
-              <a:srgbClr val="1F5F9E"/>
-            </a:solidFill>
-            <a:round/>
-          </a:ln>
-        </p:spPr>
-        <p:txBody>
-          <a:bodyPr lIns="2520" tIns="2520" rIns="2520" bIns="2520" anchor="t">
-            <a:noAutofit/>
-          </a:bodyPr>
-          <a:p>
-            <a:endParaRPr lang="en-US" sz="2400" b="0" u="none" strike="noStrike">
-              <a:solidFill>
-                <a:srgbClr val="000000"/>
-              </a:solidFill>
-              <a:effectLst/>
-              <a:uFillTx/>
-              <a:latin typeface="Times New Roman"/>
-            </a:endParaRPr>
-          </a:p>
-        </p:txBody>
-      </p:sp>
-      <p:sp>
-        <p:nvSpPr>
-          <p:cNvPr id="214" name=""/>
-          <p:cNvSpPr/>
-          <p:nvPr/>
-        </p:nvSpPr>
-        <p:spPr>
-          <a:xfrm>
-            <a:off x="5494320" y="3125160"/>
-            <a:ext cx="41040" cy="41400"/>
-          </a:xfrm>
-          <a:custGeom>
-            <a:avLst/>
-            <a:gdLst/>
-            <a:ahLst/>
-            <a:rect l="0" t="0" r="r" b="b"/>
-            <a:pathLst>
-              <a:path w="114" h="115">
-                <a:moveTo>
-                  <a:pt x="0" y="57"/>
-                </a:moveTo>
-                <a:cubicBezTo>
-                  <a:pt x="0" y="-19"/>
-                  <a:pt x="114" y="-19"/>
-                  <a:pt x="114" y="57"/>
-                </a:cubicBezTo>
-                <a:cubicBezTo>
-                  <a:pt x="114" y="134"/>
-                  <a:pt x="0" y="134"/>
-                  <a:pt x="0" y="57"/>
-                </a:cubicBezTo>
-                <a:close/>
-              </a:path>
-            </a:pathLst>
-          </a:custGeom>
-          <a:solidFill>
-            <a:srgbClr val="A8A8A8"/>
-          </a:solidFill>
-          <a:ln w="0">
-            <a:noFill/>
-          </a:ln>
-        </p:spPr>
-        <p:txBody>
-          <a:bodyPr lIns="0" tIns="0" rIns="0" bIns="0" anchor="t">
-            <a:noAutofit/>
-          </a:bodyPr>
-          <a:p>
-            <a:endParaRPr lang="en-US" sz="2400" b="0" u="none" strike="noStrike">
-              <a:solidFill>
-                <a:srgbClr val="000000"/>
-              </a:solidFill>
-              <a:effectLst/>
-              <a:uFillTx/>
-              <a:latin typeface="Times New Roman"/>
-            </a:endParaRPr>
-          </a:p>
-        </p:txBody>
-      </p:sp>
-      <p:sp>
-        <p:nvSpPr>
-          <p:cNvPr id="215" name=""/>
-          <p:cNvSpPr/>
-          <p:nvPr/>
-        </p:nvSpPr>
-        <p:spPr>
-          <a:xfrm>
-            <a:off x="5494320" y="3125160"/>
-            <a:ext cx="41040" cy="41400"/>
-          </a:xfrm>
-          <a:custGeom>
-            <a:avLst/>
-            <a:gdLst/>
-            <a:ahLst/>
-            <a:rect l="0" t="0" r="r" b="b"/>
-            <a:pathLst>
-              <a:path fill="none" w="114" h="115">
-                <a:moveTo>
-                  <a:pt x="114" y="57"/>
-                </a:moveTo>
-                <a:cubicBezTo>
-                  <a:pt x="114" y="134"/>
-                  <a:pt x="0" y="134"/>
-                  <a:pt x="0" y="57"/>
-                </a:cubicBezTo>
-                <a:cubicBezTo>
-                  <a:pt x="0" y="-19"/>
-                  <a:pt x="114" y="-19"/>
-                  <a:pt x="114" y="57"/>
-                </a:cubicBezTo>
-              </a:path>
-            </a:pathLst>
-          </a:custGeom>
-          <a:ln cap="rnd" w="5400">
-            <a:solidFill>
-              <a:srgbClr val="A8A8A8"/>
-            </a:solidFill>
-            <a:round/>
-          </a:ln>
-        </p:spPr>
-        <p:txBody>
-          <a:bodyPr lIns="2520" tIns="2520" rIns="2520" bIns="2520" anchor="t">
-            <a:noAutofit/>
-          </a:bodyPr>
-          <a:p>
-            <a:endParaRPr lang="en-US" sz="2400" b="0" u="none" strike="noStrike">
-              <a:solidFill>
-                <a:srgbClr val="000000"/>
-              </a:solidFill>
-              <a:effectLst/>
-              <a:uFillTx/>
-              <a:latin typeface="Times New Roman"/>
-            </a:endParaRPr>
-          </a:p>
-        </p:txBody>
-      </p:sp>
-      <p:sp>
-        <p:nvSpPr>
-          <p:cNvPr id="216" name=""/>
-          <p:cNvSpPr/>
-          <p:nvPr/>
-        </p:nvSpPr>
-        <p:spPr>
-          <a:xfrm>
-            <a:off x="5439600" y="3034440"/>
-            <a:ext cx="41040" cy="41400"/>
-          </a:xfrm>
-          <a:custGeom>
-            <a:avLst/>
-            <a:gdLst/>
-            <a:ahLst/>
-            <a:rect l="0" t="0" r="r" b="b"/>
-            <a:pathLst>
-              <a:path w="114" h="115">
-                <a:moveTo>
-                  <a:pt x="0" y="58"/>
-                </a:moveTo>
-                <a:cubicBezTo>
-                  <a:pt x="0" y="-19"/>
-                  <a:pt x="114" y="-19"/>
-                  <a:pt x="114" y="58"/>
-                </a:cubicBezTo>
-                <a:cubicBezTo>
-                  <a:pt x="114" y="134"/>
-                  <a:pt x="0" y="134"/>
-                  <a:pt x="0" y="58"/>
-                </a:cubicBezTo>
-                <a:close/>
-              </a:path>
-            </a:pathLst>
-          </a:custGeom>
-          <a:solidFill>
-            <a:srgbClr val="6E6E6E"/>
-          </a:solidFill>
-          <a:ln w="0">
-            <a:noFill/>
-          </a:ln>
-        </p:spPr>
-        <p:txBody>
-          <a:bodyPr lIns="0" tIns="0" rIns="0" bIns="0" anchor="t">
-            <a:noAutofit/>
-          </a:bodyPr>
-          <a:p>
-            <a:endParaRPr lang="en-US" sz="2400" b="0" u="none" strike="noStrike">
-              <a:solidFill>
-                <a:srgbClr val="FFFFFF"/>
-              </a:solidFill>
-              <a:effectLst/>
-              <a:uFillTx/>
-              <a:latin typeface="Times New Roman"/>
-            </a:endParaRPr>
-          </a:p>
-        </p:txBody>
-      </p:sp>
-      <p:sp>
-        <p:nvSpPr>
-          <p:cNvPr id="217" name=""/>
-          <p:cNvSpPr/>
-          <p:nvPr/>
-        </p:nvSpPr>
-        <p:spPr>
-          <a:xfrm>
-            <a:off x="5439600" y="3034440"/>
-            <a:ext cx="41040" cy="41400"/>
-          </a:xfrm>
-          <a:custGeom>
-            <a:avLst/>
-            <a:gdLst/>
-            <a:ahLst/>
-            <a:rect l="0" t="0" r="r" b="b"/>
-            <a:pathLst>
-              <a:path fill="none" w="114" h="115">
-                <a:moveTo>
-                  <a:pt x="114" y="58"/>
-                </a:moveTo>
-                <a:cubicBezTo>
-                  <a:pt x="114" y="134"/>
-                  <a:pt x="0" y="134"/>
-                  <a:pt x="0" y="58"/>
-                </a:cubicBezTo>
-                <a:cubicBezTo>
-                  <a:pt x="0" y="-19"/>
-                  <a:pt x="114" y="-19"/>
-                  <a:pt x="114" y="58"/>
-                </a:cubicBezTo>
-              </a:path>
-            </a:pathLst>
-          </a:custGeom>
-          <a:ln cap="rnd" w="5400">
-            <a:solidFill>
-              <a:srgbClr val="6E6E6E"/>
-            </a:solidFill>
-            <a:round/>
-          </a:ln>
-        </p:spPr>
-        <p:txBody>
-          <a:bodyPr lIns="2520" tIns="2520" rIns="2520" bIns="2520" anchor="t">
-            <a:noAutofit/>
-          </a:bodyPr>
-          <a:p>
-            <a:endParaRPr lang="en-US" sz="2400" b="0" u="none" strike="noStrike">
-              <a:solidFill>
-                <a:srgbClr val="000000"/>
-              </a:solidFill>
-              <a:effectLst/>
-              <a:uFillTx/>
-              <a:latin typeface="Times New Roman"/>
-            </a:endParaRPr>
-          </a:p>
-        </p:txBody>
-      </p:sp>
-      <p:sp>
-        <p:nvSpPr>
-          <p:cNvPr id="218" name=""/>
-          <p:cNvSpPr/>
-          <p:nvPr/>
-        </p:nvSpPr>
-        <p:spPr>
-          <a:xfrm>
-            <a:off x="5447880" y="3306960"/>
-            <a:ext cx="41400" cy="41040"/>
-          </a:xfrm>
-          <a:custGeom>
-            <a:avLst/>
-            <a:gdLst/>
-            <a:ahLst/>
-            <a:rect l="0" t="0" r="r" b="b"/>
-            <a:pathLst>
-              <a:path w="115" h="114">
-                <a:moveTo>
-                  <a:pt x="0" y="58"/>
-                </a:moveTo>
-                <a:cubicBezTo>
-                  <a:pt x="0" y="-19"/>
-                  <a:pt x="115" y="-19"/>
-                  <a:pt x="115" y="58"/>
-                </a:cubicBezTo>
-                <a:cubicBezTo>
-                  <a:pt x="115" y="133"/>
-                  <a:pt x="0" y="133"/>
-                  <a:pt x="0" y="58"/>
-                </a:cubicBezTo>
-                <a:close/>
-              </a:path>
-            </a:pathLst>
-          </a:custGeom>
-          <a:solidFill>
-            <a:srgbClr val="1F5F9E"/>
-          </a:solidFill>
-          <a:ln w="0">
-            <a:noFill/>
-          </a:ln>
-        </p:spPr>
-        <p:txBody>
-          <a:bodyPr lIns="0" tIns="0" rIns="0" bIns="0" anchor="t">
-            <a:noAutofit/>
-          </a:bodyPr>
-          <a:p>
-            <a:endParaRPr lang="en-US" sz="2400" b="0" u="none" strike="noStrike">
-              <a:solidFill>
-                <a:srgbClr val="FFFFFF"/>
-              </a:solidFill>
-              <a:effectLst/>
-              <a:uFillTx/>
-              <a:latin typeface="Times New Roman"/>
-            </a:endParaRPr>
-          </a:p>
-        </p:txBody>
-      </p:sp>
-      <p:sp>
-        <p:nvSpPr>
-          <p:cNvPr id="219" name=""/>
-          <p:cNvSpPr/>
-          <p:nvPr/>
-        </p:nvSpPr>
-        <p:spPr>
-          <a:xfrm>
-            <a:off x="5447880" y="3306960"/>
-            <a:ext cx="41400" cy="41040"/>
-          </a:xfrm>
-          <a:custGeom>
-            <a:avLst/>
-            <a:gdLst/>
-            <a:ahLst/>
-            <a:rect l="0" t="0" r="r" b="b"/>
-            <a:pathLst>
-              <a:path fill="none" w="115" h="114">
-                <a:moveTo>
-                  <a:pt x="115" y="58"/>
-                </a:moveTo>
-                <a:cubicBezTo>
-                  <a:pt x="115" y="133"/>
-                  <a:pt x="0" y="133"/>
-                  <a:pt x="0" y="58"/>
-                </a:cubicBezTo>
-                <a:cubicBezTo>
-                  <a:pt x="0" y="-19"/>
-                  <a:pt x="115" y="-19"/>
-                  <a:pt x="115" y="58"/>
-                </a:cubicBezTo>
-              </a:path>
-            </a:pathLst>
-          </a:custGeom>
-          <a:ln cap="rnd" w="5400">
-            <a:solidFill>
-              <a:srgbClr val="1F5F9E"/>
-            </a:solidFill>
-            <a:round/>
-          </a:ln>
-        </p:spPr>
-        <p:txBody>
-          <a:bodyPr lIns="2520" tIns="2520" rIns="2520" bIns="2520" anchor="t">
-            <a:noAutofit/>
-          </a:bodyPr>
-          <a:p>
-            <a:endParaRPr lang="en-US" sz="2400" b="0" u="none" strike="noStrike">
-              <a:solidFill>
-                <a:srgbClr val="000000"/>
-              </a:solidFill>
-              <a:effectLst/>
-              <a:uFillTx/>
-              <a:latin typeface="Times New Roman"/>
-            </a:endParaRPr>
-          </a:p>
-        </p:txBody>
-      </p:sp>
-      <p:sp>
-        <p:nvSpPr>
-          <p:cNvPr id="220" name=""/>
-          <p:cNvSpPr/>
-          <p:nvPr/>
-        </p:nvSpPr>
-        <p:spPr>
-          <a:xfrm>
-            <a:off x="5640120" y="3488400"/>
-            <a:ext cx="41400" cy="41400"/>
-          </a:xfrm>
-          <a:custGeom>
-            <a:avLst/>
-            <a:gdLst/>
-            <a:ahLst/>
-            <a:rect l="0" t="0" r="r" b="b"/>
-            <a:pathLst>
-              <a:path w="115" h="115">
-                <a:moveTo>
-                  <a:pt x="0" y="57"/>
-                </a:moveTo>
-                <a:cubicBezTo>
-                  <a:pt x="0" y="-19"/>
-                  <a:pt x="115" y="-19"/>
-                  <a:pt x="115" y="57"/>
-                </a:cubicBezTo>
-                <a:cubicBezTo>
-                  <a:pt x="115" y="134"/>
-                  <a:pt x="0" y="134"/>
-                  <a:pt x="0" y="57"/>
-                </a:cubicBezTo>
-                <a:close/>
-              </a:path>
-            </a:pathLst>
-          </a:custGeom>
-          <a:solidFill>
-            <a:srgbClr val="A8A8A8"/>
-          </a:solidFill>
-          <a:ln w="0">
-            <a:noFill/>
-          </a:ln>
-        </p:spPr>
-        <p:txBody>
-          <a:bodyPr lIns="0" tIns="0" rIns="0" bIns="0" anchor="t">
-            <a:noAutofit/>
-          </a:bodyPr>
-          <a:p>
-            <a:endParaRPr lang="en-US" sz="2400" b="0" u="none" strike="noStrike">
-              <a:solidFill>
-                <a:srgbClr val="000000"/>
-              </a:solidFill>
-              <a:effectLst/>
-              <a:uFillTx/>
-              <a:latin typeface="Times New Roman"/>
-            </a:endParaRPr>
-          </a:p>
-        </p:txBody>
-      </p:sp>
-      <p:sp>
-        <p:nvSpPr>
-          <p:cNvPr id="221" name=""/>
-          <p:cNvSpPr/>
-          <p:nvPr/>
-        </p:nvSpPr>
-        <p:spPr>
-          <a:xfrm>
-            <a:off x="5640120" y="3488400"/>
-            <a:ext cx="41400" cy="41400"/>
-          </a:xfrm>
-          <a:custGeom>
-            <a:avLst/>
-            <a:gdLst/>
-            <a:ahLst/>
-            <a:rect l="0" t="0" r="r" b="b"/>
-            <a:pathLst>
-              <a:path fill="none" w="115" h="115">
-                <a:moveTo>
-                  <a:pt x="115" y="57"/>
-                </a:moveTo>
-                <a:cubicBezTo>
-                  <a:pt x="115" y="134"/>
-                  <a:pt x="0" y="134"/>
-                  <a:pt x="0" y="57"/>
-                </a:cubicBezTo>
-                <a:cubicBezTo>
-                  <a:pt x="0" y="-19"/>
-                  <a:pt x="115" y="-19"/>
-                  <a:pt x="115" y="57"/>
-                </a:cubicBezTo>
-              </a:path>
-            </a:pathLst>
-          </a:custGeom>
-          <a:ln cap="rnd" w="5400">
-            <a:solidFill>
-              <a:srgbClr val="A8A8A8"/>
-            </a:solidFill>
-            <a:round/>
-          </a:ln>
-        </p:spPr>
-        <p:txBody>
-          <a:bodyPr lIns="2520" tIns="2520" rIns="2520" bIns="2520" anchor="t">
-            <a:noAutofit/>
-          </a:bodyPr>
-          <a:p>
-            <a:endParaRPr lang="en-US" sz="2400" b="0" u="none" strike="noStrike">
-              <a:solidFill>
-                <a:srgbClr val="000000"/>
-              </a:solidFill>
-              <a:effectLst/>
-              <a:uFillTx/>
-              <a:latin typeface="Times New Roman"/>
-            </a:endParaRPr>
-          </a:p>
-        </p:txBody>
-      </p:sp>
-      <p:sp>
-        <p:nvSpPr>
-          <p:cNvPr id="222" name=""/>
-          <p:cNvSpPr/>
-          <p:nvPr/>
-        </p:nvSpPr>
-        <p:spPr>
-          <a:xfrm>
-            <a:off x="5565240" y="3397680"/>
-            <a:ext cx="41400" cy="41760"/>
-          </a:xfrm>
-          <a:custGeom>
-            <a:avLst/>
-            <a:gdLst/>
-            <a:ahLst/>
-            <a:rect l="0" t="0" r="r" b="b"/>
-            <a:pathLst>
-              <a:path w="115" h="116">
-                <a:moveTo>
-                  <a:pt x="0" y="58"/>
-                </a:moveTo>
-                <a:cubicBezTo>
-                  <a:pt x="0" y="-19"/>
-                  <a:pt x="115" y="-19"/>
-                  <a:pt x="115" y="58"/>
-                </a:cubicBezTo>
-                <a:cubicBezTo>
-                  <a:pt x="115" y="135"/>
-                  <a:pt x="0" y="135"/>
-                  <a:pt x="0" y="58"/>
-                </a:cubicBezTo>
-                <a:close/>
-              </a:path>
-            </a:pathLst>
-          </a:custGeom>
-          <a:solidFill>
-            <a:srgbClr val="6E6E6E"/>
-          </a:solidFill>
-          <a:ln w="0">
-            <a:noFill/>
-          </a:ln>
-        </p:spPr>
-        <p:txBody>
-          <a:bodyPr lIns="0" tIns="0" rIns="0" bIns="0" anchor="t">
-            <a:noAutofit/>
-          </a:bodyPr>
-          <a:p>
-            <a:endParaRPr lang="en-US" sz="2400" b="0" u="none" strike="noStrike">
-              <a:solidFill>
-                <a:srgbClr val="FFFFFF"/>
-              </a:solidFill>
-              <a:effectLst/>
-              <a:uFillTx/>
-              <a:latin typeface="Times New Roman"/>
-            </a:endParaRPr>
-          </a:p>
-        </p:txBody>
-      </p:sp>
-      <p:sp>
-        <p:nvSpPr>
-          <p:cNvPr id="223" name=""/>
-          <p:cNvSpPr/>
-          <p:nvPr/>
-        </p:nvSpPr>
-        <p:spPr>
-          <a:xfrm>
-            <a:off x="5565240" y="3397680"/>
-            <a:ext cx="41400" cy="41760"/>
-          </a:xfrm>
-          <a:custGeom>
-            <a:avLst/>
-            <a:gdLst/>
-            <a:ahLst/>
-            <a:rect l="0" t="0" r="r" b="b"/>
-            <a:pathLst>
-              <a:path fill="none" w="115" h="116">
-                <a:moveTo>
-                  <a:pt x="115" y="58"/>
-                </a:moveTo>
-                <a:cubicBezTo>
-                  <a:pt x="115" y="135"/>
-                  <a:pt x="0" y="135"/>
-                  <a:pt x="0" y="58"/>
-                </a:cubicBezTo>
-                <a:cubicBezTo>
-                  <a:pt x="0" y="-19"/>
-                  <a:pt x="115" y="-19"/>
-                  <a:pt x="115" y="58"/>
-                </a:cubicBezTo>
-              </a:path>
-            </a:pathLst>
-          </a:custGeom>
-          <a:ln cap="rnd" w="5400">
-            <a:solidFill>
-              <a:srgbClr val="6E6E6E"/>
-            </a:solidFill>
-            <a:round/>
-          </a:ln>
-        </p:spPr>
-        <p:txBody>
-          <a:bodyPr lIns="2520" tIns="2520" rIns="2520" bIns="2520" anchor="t">
-            <a:noAutofit/>
-          </a:bodyPr>
-          <a:p>
-            <a:endParaRPr lang="en-US" sz="2400" b="0" u="none" strike="noStrike">
-              <a:solidFill>
-                <a:srgbClr val="000000"/>
-              </a:solidFill>
-              <a:effectLst/>
-              <a:uFillTx/>
-              <a:latin typeface="Times New Roman"/>
-            </a:endParaRPr>
-          </a:p>
-        </p:txBody>
-      </p:sp>
-      <p:sp>
-        <p:nvSpPr>
-          <p:cNvPr id="224" name=""/>
-          <p:cNvSpPr/>
-          <p:nvPr/>
-        </p:nvSpPr>
-        <p:spPr>
-          <a:xfrm>
-            <a:off x="4714920" y="3670200"/>
-            <a:ext cx="41400" cy="41400"/>
-          </a:xfrm>
-          <a:custGeom>
-            <a:avLst/>
-            <a:gdLst/>
-            <a:ahLst/>
-            <a:rect l="0" t="0" r="r" b="b"/>
-            <a:pathLst>
-              <a:path w="115" h="115">
-                <a:moveTo>
-                  <a:pt x="0" y="58"/>
-                </a:moveTo>
-                <a:cubicBezTo>
-                  <a:pt x="0" y="-19"/>
-                  <a:pt x="115" y="-19"/>
-                  <a:pt x="115" y="58"/>
-                </a:cubicBezTo>
-                <a:cubicBezTo>
-                  <a:pt x="115" y="134"/>
-                  <a:pt x="0" y="134"/>
-                  <a:pt x="0" y="58"/>
-                </a:cubicBezTo>
-                <a:close/>
-              </a:path>
-            </a:pathLst>
-          </a:custGeom>
-          <a:solidFill>
-            <a:srgbClr val="1F5F9E"/>
-          </a:solidFill>
-          <a:ln w="0">
-            <a:noFill/>
-          </a:ln>
-        </p:spPr>
-        <p:txBody>
-          <a:bodyPr lIns="0" tIns="0" rIns="0" bIns="0" anchor="t">
-            <a:noAutofit/>
-          </a:bodyPr>
-          <a:p>
-            <a:endParaRPr lang="en-US" sz="2400" b="0" u="none" strike="noStrike">
-              <a:solidFill>
-                <a:srgbClr val="FFFFFF"/>
-              </a:solidFill>
-              <a:effectLst/>
-              <a:uFillTx/>
-              <a:latin typeface="Times New Roman"/>
-            </a:endParaRPr>
-          </a:p>
-        </p:txBody>
-      </p:sp>
-      <p:sp>
-        <p:nvSpPr>
-          <p:cNvPr id="225" name=""/>
-          <p:cNvSpPr/>
-          <p:nvPr/>
-        </p:nvSpPr>
-        <p:spPr>
-          <a:xfrm>
-            <a:off x="4714920" y="3670200"/>
-            <a:ext cx="41400" cy="41400"/>
-          </a:xfrm>
-          <a:custGeom>
-            <a:avLst/>
-            <a:gdLst/>
-            <a:ahLst/>
-            <a:rect l="0" t="0" r="r" b="b"/>
-            <a:pathLst>
-              <a:path fill="none" w="115" h="115">
-                <a:moveTo>
-                  <a:pt x="115" y="58"/>
-                </a:moveTo>
-                <a:cubicBezTo>
-                  <a:pt x="115" y="134"/>
-                  <a:pt x="0" y="134"/>
-                  <a:pt x="0" y="58"/>
-                </a:cubicBezTo>
-                <a:cubicBezTo>
-                  <a:pt x="0" y="-19"/>
-                  <a:pt x="115" y="-19"/>
-                  <a:pt x="115" y="58"/>
-                </a:cubicBezTo>
-              </a:path>
-            </a:pathLst>
-          </a:custGeom>
-          <a:ln cap="rnd" w="5400">
-            <a:solidFill>
-              <a:srgbClr val="1F5F9E"/>
-            </a:solidFill>
-            <a:round/>
-          </a:ln>
-        </p:spPr>
-        <p:txBody>
-          <a:bodyPr lIns="2520" tIns="2520" rIns="2520" bIns="2520" anchor="t">
-            <a:noAutofit/>
-          </a:bodyPr>
-          <a:p>
-            <a:endParaRPr lang="en-US" sz="2400" b="0" u="none" strike="noStrike">
-              <a:solidFill>
-                <a:srgbClr val="000000"/>
-              </a:solidFill>
-              <a:effectLst/>
-              <a:uFillTx/>
-              <a:latin typeface="Times New Roman"/>
-            </a:endParaRPr>
-          </a:p>
-        </p:txBody>
-      </p:sp>
-      <p:sp>
-        <p:nvSpPr>
-          <p:cNvPr id="226" name=""/>
-          <p:cNvSpPr/>
-          <p:nvPr/>
-        </p:nvSpPr>
-        <p:spPr>
-          <a:xfrm>
-            <a:off x="4919400" y="3852000"/>
-            <a:ext cx="41040" cy="41040"/>
-          </a:xfrm>
-          <a:custGeom>
-            <a:avLst/>
-            <a:gdLst/>
-            <a:ahLst/>
-            <a:rect l="0" t="0" r="r" b="b"/>
-            <a:pathLst>
-              <a:path w="114" h="114">
-                <a:moveTo>
-                  <a:pt x="0" y="56"/>
-                </a:moveTo>
-                <a:cubicBezTo>
-                  <a:pt x="0" y="-19"/>
-                  <a:pt x="114" y="-19"/>
-                  <a:pt x="114" y="56"/>
-                </a:cubicBezTo>
-                <a:cubicBezTo>
-                  <a:pt x="114" y="133"/>
-                  <a:pt x="0" y="133"/>
-                  <a:pt x="0" y="56"/>
-                </a:cubicBezTo>
-                <a:close/>
-              </a:path>
-            </a:pathLst>
-          </a:custGeom>
-          <a:solidFill>
-            <a:srgbClr val="A8A8A8"/>
-          </a:solidFill>
-          <a:ln w="0">
-            <a:noFill/>
-          </a:ln>
-        </p:spPr>
-        <p:txBody>
-          <a:bodyPr lIns="0" tIns="0" rIns="0" bIns="0" anchor="t">
-            <a:noAutofit/>
-          </a:bodyPr>
-          <a:p>
-            <a:endParaRPr lang="en-US" sz="2400" b="0" u="none" strike="noStrike">
-              <a:solidFill>
-                <a:srgbClr val="000000"/>
-              </a:solidFill>
-              <a:effectLst/>
-              <a:uFillTx/>
-              <a:latin typeface="Times New Roman"/>
-            </a:endParaRPr>
-          </a:p>
-        </p:txBody>
-      </p:sp>
-      <p:sp>
-        <p:nvSpPr>
-          <p:cNvPr id="227" name=""/>
-          <p:cNvSpPr/>
-          <p:nvPr/>
-        </p:nvSpPr>
-        <p:spPr>
-          <a:xfrm>
-            <a:off x="4919400" y="3852000"/>
-            <a:ext cx="41040" cy="41040"/>
-          </a:xfrm>
-          <a:custGeom>
-            <a:avLst/>
-            <a:gdLst/>
-            <a:ahLst/>
-            <a:rect l="0" t="0" r="r" b="b"/>
-            <a:pathLst>
-              <a:path fill="none" w="114" h="114">
-                <a:moveTo>
-                  <a:pt x="114" y="56"/>
-                </a:moveTo>
-                <a:cubicBezTo>
-                  <a:pt x="114" y="133"/>
-                  <a:pt x="0" y="133"/>
-                  <a:pt x="0" y="56"/>
-                </a:cubicBezTo>
-                <a:cubicBezTo>
-                  <a:pt x="0" y="-19"/>
-                  <a:pt x="114" y="-19"/>
-                  <a:pt x="114" y="56"/>
-                </a:cubicBezTo>
-              </a:path>
-            </a:pathLst>
-          </a:custGeom>
-          <a:ln cap="rnd" w="5400">
-            <a:solidFill>
-              <a:srgbClr val="A8A8A8"/>
-            </a:solidFill>
-            <a:round/>
-          </a:ln>
-        </p:spPr>
-        <p:txBody>
-          <a:bodyPr lIns="2520" tIns="2520" rIns="2520" bIns="2520" anchor="t">
-            <a:noAutofit/>
-          </a:bodyPr>
-          <a:p>
-            <a:endParaRPr lang="en-US" sz="2400" b="0" u="none" strike="noStrike">
-              <a:solidFill>
-                <a:srgbClr val="000000"/>
-              </a:solidFill>
-              <a:effectLst/>
-              <a:uFillTx/>
-              <a:latin typeface="Times New Roman"/>
-            </a:endParaRPr>
-          </a:p>
-        </p:txBody>
-      </p:sp>
-      <p:sp>
-        <p:nvSpPr>
-          <p:cNvPr id="228" name=""/>
-          <p:cNvSpPr/>
-          <p:nvPr/>
-        </p:nvSpPr>
-        <p:spPr>
-          <a:xfrm>
-            <a:off x="4794840" y="3760920"/>
-            <a:ext cx="41400" cy="41760"/>
-          </a:xfrm>
-          <a:custGeom>
-            <a:avLst/>
-            <a:gdLst/>
-            <a:ahLst/>
-            <a:rect l="0" t="0" r="r" b="b"/>
-            <a:pathLst>
-              <a:path w="115" h="116">
-                <a:moveTo>
-                  <a:pt x="0" y="58"/>
-                </a:moveTo>
-                <a:cubicBezTo>
-                  <a:pt x="0" y="-19"/>
-                  <a:pt x="115" y="-19"/>
-                  <a:pt x="115" y="58"/>
-                </a:cubicBezTo>
-                <a:cubicBezTo>
-                  <a:pt x="115" y="135"/>
-                  <a:pt x="0" y="135"/>
-                  <a:pt x="0" y="58"/>
-                </a:cubicBezTo>
-                <a:close/>
-              </a:path>
-            </a:pathLst>
-          </a:custGeom>
-          <a:solidFill>
-            <a:srgbClr val="6E6E6E"/>
-          </a:solidFill>
-          <a:ln w="0">
-            <a:noFill/>
-          </a:ln>
-        </p:spPr>
-        <p:txBody>
-          <a:bodyPr lIns="0" tIns="0" rIns="0" bIns="0" anchor="t">
-            <a:noAutofit/>
-          </a:bodyPr>
-          <a:p>
-            <a:endParaRPr lang="en-US" sz="2400" b="0" u="none" strike="noStrike">
-              <a:solidFill>
-                <a:srgbClr val="FFFFFF"/>
-              </a:solidFill>
-              <a:effectLst/>
-              <a:uFillTx/>
-              <a:latin typeface="Times New Roman"/>
-            </a:endParaRPr>
-          </a:p>
-        </p:txBody>
-      </p:sp>
-      <p:sp>
-        <p:nvSpPr>
-          <p:cNvPr id="229" name=""/>
-          <p:cNvSpPr/>
-          <p:nvPr/>
-        </p:nvSpPr>
-        <p:spPr>
-          <a:xfrm>
-            <a:off x="4794840" y="3760920"/>
-            <a:ext cx="41400" cy="41760"/>
-          </a:xfrm>
-          <a:custGeom>
-            <a:avLst/>
-            <a:gdLst/>
-            <a:ahLst/>
-            <a:rect l="0" t="0" r="r" b="b"/>
-            <a:pathLst>
-              <a:path fill="none" w="115" h="116">
-                <a:moveTo>
-                  <a:pt x="115" y="58"/>
-                </a:moveTo>
-                <a:cubicBezTo>
-                  <a:pt x="115" y="135"/>
-                  <a:pt x="0" y="135"/>
-                  <a:pt x="0" y="58"/>
-                </a:cubicBezTo>
-                <a:cubicBezTo>
-                  <a:pt x="0" y="-19"/>
-                  <a:pt x="115" y="-19"/>
-                  <a:pt x="115" y="58"/>
-                </a:cubicBezTo>
-              </a:path>
-            </a:pathLst>
-          </a:custGeom>
-          <a:ln cap="rnd" w="5400">
-            <a:solidFill>
-              <a:srgbClr val="6E6E6E"/>
-            </a:solidFill>
-            <a:round/>
-          </a:ln>
-        </p:spPr>
-        <p:txBody>
-          <a:bodyPr lIns="2520" tIns="2520" rIns="2520" bIns="2520" anchor="t">
-            <a:noAutofit/>
-          </a:bodyPr>
-          <a:p>
-            <a:endParaRPr lang="en-US" sz="2400" b="0" u="none" strike="noStrike">
-              <a:solidFill>
-                <a:srgbClr val="000000"/>
-              </a:solidFill>
-              <a:effectLst/>
-              <a:uFillTx/>
-              <a:latin typeface="Times New Roman"/>
-            </a:endParaRPr>
-          </a:p>
-        </p:txBody>
-      </p:sp>
-      <p:sp>
-        <p:nvSpPr>
           <p:cNvPr id="230" name=""/>
           <p:cNvSpPr txBox="1"/>
           <p:nvPr/>
         </p:nvSpPr>
         <p:spPr>
           <a:xfrm>
-            <a:off x="2815200" y="2653560"/>
+            <a:off x="2826720" y="2653560"/>
             <a:ext cx="624240" cy="79560"/>
           </a:xfrm>
           <a:prstGeom prst="rect">
